--- a/tests/report_generator/integration/references/reference_portfolio-baseline-report.pptx
+++ b/tests/report_generator/integration/references/reference_portfolio-baseline-report.pptx
@@ -219,7 +219,7 @@
             <c:invertIfNegative val="0"/>
             <c:bubble3D val="0"/>
             <c:explosion val="6"/>
-            <c:extLst xmlns:lc="http://schemas.openxmlformats.org/drawingml/2006/lockedCanvas" xmlns:comp="http://schemas.openxmlformats.org/drawingml/2006/compatibility" xmlns:we="http://schemas.microsoft.com/office/webextensions/webextension/2010/11" xmlns:wetp="http://schemas.microsoft.com/office/webextensions/taskpanes/2010/11" xmlns:w16cid="http://schemas.microsoft.com/office/word/2016/wordml/cid" xmlns:w16se="http://schemas.microsoft.com/office/word/2015/wordml/symex" xmlns:wps="http://schemas.microsoft.com/office/word/2010/wordprocessingShape" xmlns:b="http://schemas.openxmlformats.org/officeDocument/2006/bibliography" xmlns:odgm="http://opendope.org/SmartArt/DataHierarchy" xmlns:odi="http://opendope.org/components" xmlns:oda="http://opendope.org/answers" xmlns:odq="http://opendope.org/questions" xmlns:odc="http://opendope.org/conditions" xmlns:odx="http://opendope.org/xpaths" xmlns:cppr="http://schemas.microsoft.com/office/2006/coverPageProps" xmlns:pvml="urn:schemas-microsoft-com:office:powerpoint" xmlns:w10="urn:schemas-microsoft-com:office:word" xmlns:v="urn:schemas-microsoft-com:vml" xmlns:o="urn:schemas-microsoft-com:office:office" xmlns:xvml="urn:schemas-microsoft-com:office:excel" xmlns:dsp="http://schemas.microsoft.com/office/drawing/2008/diagram" xmlns:xdr="http://schemas.openxmlformats.org/drawingml/2006/spreadsheetDrawing" xmlns:pic="http://schemas.openxmlformats.org/drawingml/2006/picture" xmlns:dgm="http://schemas.openxmlformats.org/drawingml/2006/diagram" xmlns:c14="http://schemas.microsoft.com/office/drawing/2007/8/2/chart" xmlns:cdr="http://schemas.openxmlformats.org/drawingml/2006/chartDrawing" xmlns:wne="http://schemas.microsoft.com/office/word/2006/wordml" xmlns:sl="http://schemas.openxmlformats.org/schemaLibrary/2006/main" xmlns:mc="http://schemas.openxmlformats.org/markup-compatibility/2006" xmlns:wp14="http://schemas.microsoft.com/office/word/2010/wordprocessingDrawing" xmlns:wp="http://schemas.openxmlformats.org/drawingml/2006/wordprocessingDrawing" xmlns:m="http://schemas.openxmlformats.org/officeDocument/2006/math" xmlns:w14="http://schemas.microsoft.com/office/word/2010/wordml" xmlns:w15="http://schemas.microsoft.com/office/word/2012/wordml" xmlns:w="http://schemas.openxmlformats.org/wordprocessingml/2006/main">
+            <c:extLst xmlns:w="http://schemas.openxmlformats.org/wordprocessingml/2006/main" xmlns:w15="http://schemas.microsoft.com/office/word/2012/wordml" xmlns:w14="http://schemas.microsoft.com/office/word/2010/wordml" xmlns:m="http://schemas.openxmlformats.org/officeDocument/2006/math" xmlns:wp="http://schemas.openxmlformats.org/drawingml/2006/wordprocessingDrawing" xmlns:wp14="http://schemas.microsoft.com/office/word/2010/wordprocessingDrawing" xmlns:mc="http://schemas.openxmlformats.org/markup-compatibility/2006" xmlns:sl="http://schemas.openxmlformats.org/schemaLibrary/2006/main" xmlns:wne="http://schemas.microsoft.com/office/word/2006/wordml" xmlns:cdr="http://schemas.openxmlformats.org/drawingml/2006/chartDrawing" xmlns:c14="http://schemas.microsoft.com/office/drawing/2007/8/2/chart" xmlns:dgm="http://schemas.openxmlformats.org/drawingml/2006/diagram" xmlns:pic="http://schemas.openxmlformats.org/drawingml/2006/picture" xmlns:xdr="http://schemas.openxmlformats.org/drawingml/2006/spreadsheetDrawing" xmlns:dsp="http://schemas.microsoft.com/office/drawing/2008/diagram" xmlns:xvml="urn:schemas-microsoft-com:office:excel" xmlns:o="urn:schemas-microsoft-com:office:office" xmlns:v="urn:schemas-microsoft-com:vml" xmlns:w10="urn:schemas-microsoft-com:office:word" xmlns:pvml="urn:schemas-microsoft-com:office:powerpoint" xmlns:cppr="http://schemas.microsoft.com/office/2006/coverPageProps" xmlns:odx="http://opendope.org/xpaths" xmlns:odc="http://opendope.org/conditions" xmlns:odq="http://opendope.org/questions" xmlns:oda="http://opendope.org/answers" xmlns:odi="http://opendope.org/components" xmlns:odgm="http://opendope.org/SmartArt/DataHierarchy" xmlns:b="http://schemas.openxmlformats.org/officeDocument/2006/bibliography" xmlns:wps="http://schemas.microsoft.com/office/word/2010/wordprocessingShape" xmlns:w16se="http://schemas.microsoft.com/office/word/2015/wordml/symex" xmlns:w16cid="http://schemas.microsoft.com/office/word/2016/wordml/cid" xmlns:wetp="http://schemas.microsoft.com/office/webextensions/taskpanes/2010/11" xmlns:we="http://schemas.microsoft.com/office/webextensions/webextension/2010/11" xmlns:comp="http://schemas.openxmlformats.org/drawingml/2006/compatibility" xmlns:lc="http://schemas.openxmlformats.org/drawingml/2006/lockedCanvas">
               <c:ext xmlns:c16="http://schemas.microsoft.com/office/drawing/2014/chart" uri="{C3380CC4-5D6E-409C-BE32-E72D297353CC}">
                 <c16:uniqueId val="{00000000-7C96-CF4F-94AD-E08A5CD6D25E}"/>
               </c:ext>
@@ -358,7 +358,7 @@
               </c:numCache>
             </c:numRef>
           </c:val>
-          <c:extLst xmlns:lc="http://schemas.openxmlformats.org/drawingml/2006/lockedCanvas" xmlns:comp="http://schemas.openxmlformats.org/drawingml/2006/compatibility" xmlns:we="http://schemas.microsoft.com/office/webextensions/webextension/2010/11" xmlns:wetp="http://schemas.microsoft.com/office/webextensions/taskpanes/2010/11" xmlns:w16cid="http://schemas.microsoft.com/office/word/2016/wordml/cid" xmlns:w16se="http://schemas.microsoft.com/office/word/2015/wordml/symex" xmlns:wps="http://schemas.microsoft.com/office/word/2010/wordprocessingShape" xmlns:b="http://schemas.openxmlformats.org/officeDocument/2006/bibliography" xmlns:odgm="http://opendope.org/SmartArt/DataHierarchy" xmlns:odi="http://opendope.org/components" xmlns:oda="http://opendope.org/answers" xmlns:odq="http://opendope.org/questions" xmlns:odc="http://opendope.org/conditions" xmlns:odx="http://opendope.org/xpaths" xmlns:cppr="http://schemas.microsoft.com/office/2006/coverPageProps" xmlns:pvml="urn:schemas-microsoft-com:office:powerpoint" xmlns:w10="urn:schemas-microsoft-com:office:word" xmlns:v="urn:schemas-microsoft-com:vml" xmlns:o="urn:schemas-microsoft-com:office:office" xmlns:xvml="urn:schemas-microsoft-com:office:excel" xmlns:dsp="http://schemas.microsoft.com/office/drawing/2008/diagram" xmlns:xdr="http://schemas.openxmlformats.org/drawingml/2006/spreadsheetDrawing" xmlns:pic="http://schemas.openxmlformats.org/drawingml/2006/picture" xmlns:dgm="http://schemas.openxmlformats.org/drawingml/2006/diagram" xmlns:c14="http://schemas.microsoft.com/office/drawing/2007/8/2/chart" xmlns:cdr="http://schemas.openxmlformats.org/drawingml/2006/chartDrawing" xmlns:wne="http://schemas.microsoft.com/office/word/2006/wordml" xmlns:sl="http://schemas.openxmlformats.org/schemaLibrary/2006/main" xmlns:mc="http://schemas.openxmlformats.org/markup-compatibility/2006" xmlns:wp14="http://schemas.microsoft.com/office/word/2010/wordprocessingDrawing" xmlns:wp="http://schemas.openxmlformats.org/drawingml/2006/wordprocessingDrawing" xmlns:m="http://schemas.openxmlformats.org/officeDocument/2006/math" xmlns:w14="http://schemas.microsoft.com/office/word/2010/wordml" xmlns:w15="http://schemas.microsoft.com/office/word/2012/wordml" xmlns:w="http://schemas.openxmlformats.org/wordprocessingml/2006/main">
+          <c:extLst xmlns:w="http://schemas.openxmlformats.org/wordprocessingml/2006/main" xmlns:w15="http://schemas.microsoft.com/office/word/2012/wordml" xmlns:w14="http://schemas.microsoft.com/office/word/2010/wordml" xmlns:m="http://schemas.openxmlformats.org/officeDocument/2006/math" xmlns:wp="http://schemas.openxmlformats.org/drawingml/2006/wordprocessingDrawing" xmlns:wp14="http://schemas.microsoft.com/office/word/2010/wordprocessingDrawing" xmlns:mc="http://schemas.openxmlformats.org/markup-compatibility/2006" xmlns:sl="http://schemas.openxmlformats.org/schemaLibrary/2006/main" xmlns:wne="http://schemas.microsoft.com/office/word/2006/wordml" xmlns:cdr="http://schemas.openxmlformats.org/drawingml/2006/chartDrawing" xmlns:c14="http://schemas.microsoft.com/office/drawing/2007/8/2/chart" xmlns:dgm="http://schemas.openxmlformats.org/drawingml/2006/diagram" xmlns:pic="http://schemas.openxmlformats.org/drawingml/2006/picture" xmlns:xdr="http://schemas.openxmlformats.org/drawingml/2006/spreadsheetDrawing" xmlns:dsp="http://schemas.microsoft.com/office/drawing/2008/diagram" xmlns:xvml="urn:schemas-microsoft-com:office:excel" xmlns:o="urn:schemas-microsoft-com:office:office" xmlns:v="urn:schemas-microsoft-com:vml" xmlns:w10="urn:schemas-microsoft-com:office:word" xmlns:pvml="urn:schemas-microsoft-com:office:powerpoint" xmlns:cppr="http://schemas.microsoft.com/office/2006/coverPageProps" xmlns:odx="http://opendope.org/xpaths" xmlns:odc="http://opendope.org/conditions" xmlns:odq="http://opendope.org/questions" xmlns:oda="http://opendope.org/answers" xmlns:odi="http://opendope.org/components" xmlns:odgm="http://opendope.org/SmartArt/DataHierarchy" xmlns:b="http://schemas.openxmlformats.org/officeDocument/2006/bibliography" xmlns:wps="http://schemas.microsoft.com/office/word/2010/wordprocessingShape" xmlns:w16se="http://schemas.microsoft.com/office/word/2015/wordml/symex" xmlns:w16cid="http://schemas.microsoft.com/office/word/2016/wordml/cid" xmlns:wetp="http://schemas.microsoft.com/office/webextensions/taskpanes/2010/11" xmlns:we="http://schemas.microsoft.com/office/webextensions/webextension/2010/11" xmlns:comp="http://schemas.openxmlformats.org/drawingml/2006/compatibility" xmlns:lc="http://schemas.openxmlformats.org/drawingml/2006/lockedCanvas">
             <c:ext xmlns:c16="http://schemas.microsoft.com/office/drawing/2014/chart" uri="{C3380CC4-5D6E-409C-BE32-E72D297353CC}">
               <c16:uniqueId val="{00000001-7C96-CF4F-94AD-E08A5CD6D25E}"/>
             </c:ext>
@@ -601,7 +601,7 @@
     <c:plotVisOnly val="1"/>
     <c:dispBlanksAs val="gap"/>
     <c:showDLblsOverMax val="0"/>
-    <c:extLst xmlns:lc="http://schemas.openxmlformats.org/drawingml/2006/lockedCanvas" xmlns:comp="http://schemas.openxmlformats.org/drawingml/2006/compatibility" xmlns:we="http://schemas.microsoft.com/office/webextensions/webextension/2010/11" xmlns:wetp="http://schemas.microsoft.com/office/webextensions/taskpanes/2010/11" xmlns:w16cid="http://schemas.microsoft.com/office/word/2016/wordml/cid" xmlns:w16se="http://schemas.microsoft.com/office/word/2015/wordml/symex" xmlns:wps="http://schemas.microsoft.com/office/word/2010/wordprocessingShape" xmlns:b="http://schemas.openxmlformats.org/officeDocument/2006/bibliography" xmlns:odgm="http://opendope.org/SmartArt/DataHierarchy" xmlns:odi="http://opendope.org/components" xmlns:oda="http://opendope.org/answers" xmlns:odq="http://opendope.org/questions" xmlns:odc="http://opendope.org/conditions" xmlns:odx="http://opendope.org/xpaths" xmlns:cppr="http://schemas.microsoft.com/office/2006/coverPageProps" xmlns:pvml="urn:schemas-microsoft-com:office:powerpoint" xmlns:w10="urn:schemas-microsoft-com:office:word" xmlns:v="urn:schemas-microsoft-com:vml" xmlns:o="urn:schemas-microsoft-com:office:office" xmlns:xvml="urn:schemas-microsoft-com:office:excel" xmlns:dsp="http://schemas.microsoft.com/office/drawing/2008/diagram" xmlns:xdr="http://schemas.openxmlformats.org/drawingml/2006/spreadsheetDrawing" xmlns:pic="http://schemas.openxmlformats.org/drawingml/2006/picture" xmlns:dgm="http://schemas.openxmlformats.org/drawingml/2006/diagram" xmlns:c14="http://schemas.microsoft.com/office/drawing/2007/8/2/chart" xmlns:cdr="http://schemas.openxmlformats.org/drawingml/2006/chartDrawing" xmlns:wne="http://schemas.microsoft.com/office/word/2006/wordml" xmlns:sl="http://schemas.openxmlformats.org/schemaLibrary/2006/main" xmlns:mc="http://schemas.openxmlformats.org/markup-compatibility/2006" xmlns:wp14="http://schemas.microsoft.com/office/word/2010/wordprocessingDrawing" xmlns:wp="http://schemas.openxmlformats.org/drawingml/2006/wordprocessingDrawing" xmlns:m="http://schemas.openxmlformats.org/officeDocument/2006/math" xmlns:w14="http://schemas.microsoft.com/office/word/2010/wordml" xmlns:w15="http://schemas.microsoft.com/office/word/2012/wordml" xmlns:w="http://schemas.openxmlformats.org/wordprocessingml/2006/main">
+    <c:extLst xmlns:w="http://schemas.openxmlformats.org/wordprocessingml/2006/main" xmlns:w15="http://schemas.microsoft.com/office/word/2012/wordml" xmlns:w14="http://schemas.microsoft.com/office/word/2010/wordml" xmlns:m="http://schemas.openxmlformats.org/officeDocument/2006/math" xmlns:wp="http://schemas.openxmlformats.org/drawingml/2006/wordprocessingDrawing" xmlns:wp14="http://schemas.microsoft.com/office/word/2010/wordprocessingDrawing" xmlns:mc="http://schemas.openxmlformats.org/markup-compatibility/2006" xmlns:sl="http://schemas.openxmlformats.org/schemaLibrary/2006/main" xmlns:wne="http://schemas.microsoft.com/office/word/2006/wordml" xmlns:cdr="http://schemas.openxmlformats.org/drawingml/2006/chartDrawing" xmlns:c14="http://schemas.microsoft.com/office/drawing/2007/8/2/chart" xmlns:dgm="http://schemas.openxmlformats.org/drawingml/2006/diagram" xmlns:pic="http://schemas.openxmlformats.org/drawingml/2006/picture" xmlns:xdr="http://schemas.openxmlformats.org/drawingml/2006/spreadsheetDrawing" xmlns:dsp="http://schemas.microsoft.com/office/drawing/2008/diagram" xmlns:xvml="urn:schemas-microsoft-com:office:excel" xmlns:o="urn:schemas-microsoft-com:office:office" xmlns:v="urn:schemas-microsoft-com:vml" xmlns:w10="urn:schemas-microsoft-com:office:word" xmlns:pvml="urn:schemas-microsoft-com:office:powerpoint" xmlns:cppr="http://schemas.microsoft.com/office/2006/coverPageProps" xmlns:odx="http://opendope.org/xpaths" xmlns:odc="http://opendope.org/conditions" xmlns:odq="http://opendope.org/questions" xmlns:oda="http://opendope.org/answers" xmlns:odi="http://opendope.org/components" xmlns:odgm="http://opendope.org/SmartArt/DataHierarchy" xmlns:b="http://schemas.openxmlformats.org/officeDocument/2006/bibliography" xmlns:wps="http://schemas.microsoft.com/office/word/2010/wordprocessingShape" xmlns:w16se="http://schemas.microsoft.com/office/word/2015/wordml/symex" xmlns:w16cid="http://schemas.microsoft.com/office/word/2016/wordml/cid" xmlns:wetp="http://schemas.microsoft.com/office/webextensions/taskpanes/2010/11" xmlns:we="http://schemas.microsoft.com/office/webextensions/webextension/2010/11" xmlns:comp="http://schemas.openxmlformats.org/drawingml/2006/compatibility" xmlns:lc="http://schemas.openxmlformats.org/drawingml/2006/lockedCanvas">
       <c:ext xmlns:c16r3="http://schemas.microsoft.com/office/drawing/2017/03/chart" uri="{56B9EC1D-385E-4148-901F-78D8002777C0}">
         <c16r3:dataDisplayOptions16>
           <c16r3:dispNaAsBlank val="1"/>
@@ -1050,7 +1050,7 @@
                 </a:outerShdw>
               </a:effectLst>
             </c:spPr>
-            <c:extLst xmlns:w="http://schemas.openxmlformats.org/wordprocessingml/2006/main" xmlns:w15="http://schemas.microsoft.com/office/word/2012/wordml" xmlns:w14="http://schemas.microsoft.com/office/word/2010/wordml" xmlns:m="http://schemas.openxmlformats.org/officeDocument/2006/math" xmlns:wp="http://schemas.openxmlformats.org/drawingml/2006/wordprocessingDrawing" xmlns:wp14="http://schemas.microsoft.com/office/word/2010/wordprocessingDrawing" xmlns:mc="http://schemas.openxmlformats.org/markup-compatibility/2006" xmlns:sl="http://schemas.openxmlformats.org/schemaLibrary/2006/main" xmlns:wne="http://schemas.microsoft.com/office/word/2006/wordml" xmlns:cdr="http://schemas.openxmlformats.org/drawingml/2006/chartDrawing" xmlns:c14="http://schemas.microsoft.com/office/drawing/2007/8/2/chart" xmlns:dgm="http://schemas.openxmlformats.org/drawingml/2006/diagram" xmlns:pic="http://schemas.openxmlformats.org/drawingml/2006/picture" xmlns:xdr="http://schemas.openxmlformats.org/drawingml/2006/spreadsheetDrawing" xmlns:dsp="http://schemas.microsoft.com/office/drawing/2008/diagram" xmlns:xvml="urn:schemas-microsoft-com:office:excel" xmlns:o="urn:schemas-microsoft-com:office:office" xmlns:v="urn:schemas-microsoft-com:vml" xmlns:w10="urn:schemas-microsoft-com:office:word" xmlns:pvml="urn:schemas-microsoft-com:office:powerpoint" xmlns:cppr="http://schemas.microsoft.com/office/2006/coverPageProps" xmlns:odx="http://opendope.org/xpaths" xmlns:odc="http://opendope.org/conditions" xmlns:odq="http://opendope.org/questions" xmlns:oda="http://opendope.org/answers" xmlns:odi="http://opendope.org/components" xmlns:odgm="http://opendope.org/SmartArt/DataHierarchy" xmlns:b="http://schemas.openxmlformats.org/officeDocument/2006/bibliography" xmlns:wps="http://schemas.microsoft.com/office/word/2010/wordprocessingShape" xmlns:w16se="http://schemas.microsoft.com/office/word/2015/wordml/symex" xmlns:w16cid="http://schemas.microsoft.com/office/word/2016/wordml/cid" xmlns:wetp="http://schemas.microsoft.com/office/webextensions/taskpanes/2010/11" xmlns:we="http://schemas.microsoft.com/office/webextensions/webextension/2010/11" xmlns:comp="http://schemas.openxmlformats.org/drawingml/2006/compatibility" xmlns:lc="http://schemas.openxmlformats.org/drawingml/2006/lockedCanvas">
+            <c:extLst xmlns:lc="http://schemas.openxmlformats.org/drawingml/2006/lockedCanvas" xmlns:comp="http://schemas.openxmlformats.org/drawingml/2006/compatibility" xmlns:we="http://schemas.microsoft.com/office/webextensions/webextension/2010/11" xmlns:wetp="http://schemas.microsoft.com/office/webextensions/taskpanes/2010/11" xmlns:w16cid="http://schemas.microsoft.com/office/word/2016/wordml/cid" xmlns:w16se="http://schemas.microsoft.com/office/word/2015/wordml/symex" xmlns:wps="http://schemas.microsoft.com/office/word/2010/wordprocessingShape" xmlns:b="http://schemas.openxmlformats.org/officeDocument/2006/bibliography" xmlns:odgm="http://opendope.org/SmartArt/DataHierarchy" xmlns:odi="http://opendope.org/components" xmlns:oda="http://opendope.org/answers" xmlns:odq="http://opendope.org/questions" xmlns:odc="http://opendope.org/conditions" xmlns:odx="http://opendope.org/xpaths" xmlns:cppr="http://schemas.microsoft.com/office/2006/coverPageProps" xmlns:pvml="urn:schemas-microsoft-com:office:powerpoint" xmlns:w10="urn:schemas-microsoft-com:office:word" xmlns:v="urn:schemas-microsoft-com:vml" xmlns:o="urn:schemas-microsoft-com:office:office" xmlns:xvml="urn:schemas-microsoft-com:office:excel" xmlns:dsp="http://schemas.microsoft.com/office/drawing/2008/diagram" xmlns:xdr="http://schemas.openxmlformats.org/drawingml/2006/spreadsheetDrawing" xmlns:pic="http://schemas.openxmlformats.org/drawingml/2006/picture" xmlns:dgm="http://schemas.openxmlformats.org/drawingml/2006/diagram" xmlns:c14="http://schemas.microsoft.com/office/drawing/2007/8/2/chart" xmlns:cdr="http://schemas.openxmlformats.org/drawingml/2006/chartDrawing" xmlns:wne="http://schemas.microsoft.com/office/word/2006/wordml" xmlns:sl="http://schemas.openxmlformats.org/schemaLibrary/2006/main" xmlns:mc="http://schemas.openxmlformats.org/markup-compatibility/2006" xmlns:wp14="http://schemas.microsoft.com/office/word/2010/wordprocessingDrawing" xmlns:wp="http://schemas.openxmlformats.org/drawingml/2006/wordprocessingDrawing" xmlns:m="http://schemas.openxmlformats.org/officeDocument/2006/math" xmlns:w14="http://schemas.microsoft.com/office/word/2010/wordml" xmlns:w15="http://schemas.microsoft.com/office/word/2012/wordml" xmlns:w="http://schemas.openxmlformats.org/wordprocessingml/2006/main">
               <c:ext xmlns:c16="http://schemas.microsoft.com/office/drawing/2014/chart" uri="{C3380CC4-5D6E-409C-BE32-E72D297353CC}">
                 <c16:uniqueId val="{00000001-6147-E74A-AA7B-5531F0E4EE0C}"/>
               </c:ext>
@@ -1175,7 +1175,7 @@
               </c:numCache>
             </c:numRef>
           </c:val>
-          <c:extLst xmlns:w="http://schemas.openxmlformats.org/wordprocessingml/2006/main" xmlns:w15="http://schemas.microsoft.com/office/word/2012/wordml" xmlns:w14="http://schemas.microsoft.com/office/word/2010/wordml" xmlns:m="http://schemas.openxmlformats.org/officeDocument/2006/math" xmlns:wp="http://schemas.openxmlformats.org/drawingml/2006/wordprocessingDrawing" xmlns:wp14="http://schemas.microsoft.com/office/word/2010/wordprocessingDrawing" xmlns:mc="http://schemas.openxmlformats.org/markup-compatibility/2006" xmlns:sl="http://schemas.openxmlformats.org/schemaLibrary/2006/main" xmlns:wne="http://schemas.microsoft.com/office/word/2006/wordml" xmlns:cdr="http://schemas.openxmlformats.org/drawingml/2006/chartDrawing" xmlns:c14="http://schemas.microsoft.com/office/drawing/2007/8/2/chart" xmlns:dgm="http://schemas.openxmlformats.org/drawingml/2006/diagram" xmlns:pic="http://schemas.openxmlformats.org/drawingml/2006/picture" xmlns:xdr="http://schemas.openxmlformats.org/drawingml/2006/spreadsheetDrawing" xmlns:dsp="http://schemas.microsoft.com/office/drawing/2008/diagram" xmlns:xvml="urn:schemas-microsoft-com:office:excel" xmlns:o="urn:schemas-microsoft-com:office:office" xmlns:v="urn:schemas-microsoft-com:vml" xmlns:w10="urn:schemas-microsoft-com:office:word" xmlns:pvml="urn:schemas-microsoft-com:office:powerpoint" xmlns:cppr="http://schemas.microsoft.com/office/2006/coverPageProps" xmlns:odx="http://opendope.org/xpaths" xmlns:odc="http://opendope.org/conditions" xmlns:odq="http://opendope.org/questions" xmlns:oda="http://opendope.org/answers" xmlns:odi="http://opendope.org/components" xmlns:odgm="http://opendope.org/SmartArt/DataHierarchy" xmlns:b="http://schemas.openxmlformats.org/officeDocument/2006/bibliography" xmlns:wps="http://schemas.microsoft.com/office/word/2010/wordprocessingShape" xmlns:w16se="http://schemas.microsoft.com/office/word/2015/wordml/symex" xmlns:w16cid="http://schemas.microsoft.com/office/word/2016/wordml/cid" xmlns:wetp="http://schemas.microsoft.com/office/webextensions/taskpanes/2010/11" xmlns:we="http://schemas.microsoft.com/office/webextensions/webextension/2010/11" xmlns:comp="http://schemas.openxmlformats.org/drawingml/2006/compatibility" xmlns:lc="http://schemas.openxmlformats.org/drawingml/2006/lockedCanvas">
+          <c:extLst xmlns:lc="http://schemas.openxmlformats.org/drawingml/2006/lockedCanvas" xmlns:comp="http://schemas.openxmlformats.org/drawingml/2006/compatibility" xmlns:we="http://schemas.microsoft.com/office/webextensions/webextension/2010/11" xmlns:wetp="http://schemas.microsoft.com/office/webextensions/taskpanes/2010/11" xmlns:w16cid="http://schemas.microsoft.com/office/word/2016/wordml/cid" xmlns:w16se="http://schemas.microsoft.com/office/word/2015/wordml/symex" xmlns:wps="http://schemas.microsoft.com/office/word/2010/wordprocessingShape" xmlns:b="http://schemas.openxmlformats.org/officeDocument/2006/bibliography" xmlns:odgm="http://opendope.org/SmartArt/DataHierarchy" xmlns:odi="http://opendope.org/components" xmlns:oda="http://opendope.org/answers" xmlns:odq="http://opendope.org/questions" xmlns:odc="http://opendope.org/conditions" xmlns:odx="http://opendope.org/xpaths" xmlns:cppr="http://schemas.microsoft.com/office/2006/coverPageProps" xmlns:pvml="urn:schemas-microsoft-com:office:powerpoint" xmlns:w10="urn:schemas-microsoft-com:office:word" xmlns:v="urn:schemas-microsoft-com:vml" xmlns:o="urn:schemas-microsoft-com:office:office" xmlns:xvml="urn:schemas-microsoft-com:office:excel" xmlns:dsp="http://schemas.microsoft.com/office/drawing/2008/diagram" xmlns:xdr="http://schemas.openxmlformats.org/drawingml/2006/spreadsheetDrawing" xmlns:pic="http://schemas.openxmlformats.org/drawingml/2006/picture" xmlns:dgm="http://schemas.openxmlformats.org/drawingml/2006/diagram" xmlns:c14="http://schemas.microsoft.com/office/drawing/2007/8/2/chart" xmlns:cdr="http://schemas.openxmlformats.org/drawingml/2006/chartDrawing" xmlns:wne="http://schemas.microsoft.com/office/word/2006/wordml" xmlns:sl="http://schemas.openxmlformats.org/schemaLibrary/2006/main" xmlns:mc="http://schemas.openxmlformats.org/markup-compatibility/2006" xmlns:wp14="http://schemas.microsoft.com/office/word/2010/wordprocessingDrawing" xmlns:wp="http://schemas.openxmlformats.org/drawingml/2006/wordprocessingDrawing" xmlns:m="http://schemas.openxmlformats.org/officeDocument/2006/math" xmlns:w14="http://schemas.microsoft.com/office/word/2010/wordml" xmlns:w15="http://schemas.microsoft.com/office/word/2012/wordml" xmlns:w="http://schemas.openxmlformats.org/wordprocessingml/2006/main">
             <c:ext xmlns:c16="http://schemas.microsoft.com/office/drawing/2014/chart" uri="{C3380CC4-5D6E-409C-BE32-E72D297353CC}">
               <c16:uniqueId val="{00000002-6147-E74A-AA7B-5531F0E4EE0C}"/>
             </c:ext>
@@ -1633,7 +1633,7 @@
     <c:plotVisOnly val="1"/>
     <c:dispBlanksAs val="gap"/>
     <c:showDLblsOverMax val="0"/>
-    <c:extLst xmlns:w="http://schemas.openxmlformats.org/wordprocessingml/2006/main" xmlns:w15="http://schemas.microsoft.com/office/word/2012/wordml" xmlns:w14="http://schemas.microsoft.com/office/word/2010/wordml" xmlns:m="http://schemas.openxmlformats.org/officeDocument/2006/math" xmlns:wp="http://schemas.openxmlformats.org/drawingml/2006/wordprocessingDrawing" xmlns:wp14="http://schemas.microsoft.com/office/word/2010/wordprocessingDrawing" xmlns:mc="http://schemas.openxmlformats.org/markup-compatibility/2006" xmlns:sl="http://schemas.openxmlformats.org/schemaLibrary/2006/main" xmlns:wne="http://schemas.microsoft.com/office/word/2006/wordml" xmlns:cdr="http://schemas.openxmlformats.org/drawingml/2006/chartDrawing" xmlns:c14="http://schemas.microsoft.com/office/drawing/2007/8/2/chart" xmlns:dgm="http://schemas.openxmlformats.org/drawingml/2006/diagram" xmlns:pic="http://schemas.openxmlformats.org/drawingml/2006/picture" xmlns:xdr="http://schemas.openxmlformats.org/drawingml/2006/spreadsheetDrawing" xmlns:dsp="http://schemas.microsoft.com/office/drawing/2008/diagram" xmlns:xvml="urn:schemas-microsoft-com:office:excel" xmlns:o="urn:schemas-microsoft-com:office:office" xmlns:v="urn:schemas-microsoft-com:vml" xmlns:w10="urn:schemas-microsoft-com:office:word" xmlns:pvml="urn:schemas-microsoft-com:office:powerpoint" xmlns:cppr="http://schemas.microsoft.com/office/2006/coverPageProps" xmlns:odx="http://opendope.org/xpaths" xmlns:odc="http://opendope.org/conditions" xmlns:odq="http://opendope.org/questions" xmlns:oda="http://opendope.org/answers" xmlns:odi="http://opendope.org/components" xmlns:odgm="http://opendope.org/SmartArt/DataHierarchy" xmlns:b="http://schemas.openxmlformats.org/officeDocument/2006/bibliography" xmlns:wps="http://schemas.microsoft.com/office/word/2010/wordprocessingShape" xmlns:w16se="http://schemas.microsoft.com/office/word/2015/wordml/symex" xmlns:w16cid="http://schemas.microsoft.com/office/word/2016/wordml/cid" xmlns:wetp="http://schemas.microsoft.com/office/webextensions/taskpanes/2010/11" xmlns:we="http://schemas.microsoft.com/office/webextensions/webextension/2010/11" xmlns:comp="http://schemas.openxmlformats.org/drawingml/2006/compatibility" xmlns:lc="http://schemas.openxmlformats.org/drawingml/2006/lockedCanvas">
+    <c:extLst xmlns:lc="http://schemas.openxmlformats.org/drawingml/2006/lockedCanvas" xmlns:comp="http://schemas.openxmlformats.org/drawingml/2006/compatibility" xmlns:we="http://schemas.microsoft.com/office/webextensions/webextension/2010/11" xmlns:wetp="http://schemas.microsoft.com/office/webextensions/taskpanes/2010/11" xmlns:w16cid="http://schemas.microsoft.com/office/word/2016/wordml/cid" xmlns:w16se="http://schemas.microsoft.com/office/word/2015/wordml/symex" xmlns:wps="http://schemas.microsoft.com/office/word/2010/wordprocessingShape" xmlns:b="http://schemas.openxmlformats.org/officeDocument/2006/bibliography" xmlns:odgm="http://opendope.org/SmartArt/DataHierarchy" xmlns:odi="http://opendope.org/components" xmlns:oda="http://opendope.org/answers" xmlns:odq="http://opendope.org/questions" xmlns:odc="http://opendope.org/conditions" xmlns:odx="http://opendope.org/xpaths" xmlns:cppr="http://schemas.microsoft.com/office/2006/coverPageProps" xmlns:pvml="urn:schemas-microsoft-com:office:powerpoint" xmlns:w10="urn:schemas-microsoft-com:office:word" xmlns:v="urn:schemas-microsoft-com:vml" xmlns:o="urn:schemas-microsoft-com:office:office" xmlns:xvml="urn:schemas-microsoft-com:office:excel" xmlns:dsp="http://schemas.microsoft.com/office/drawing/2008/diagram" xmlns:xdr="http://schemas.openxmlformats.org/drawingml/2006/spreadsheetDrawing" xmlns:pic="http://schemas.openxmlformats.org/drawingml/2006/picture" xmlns:dgm="http://schemas.openxmlformats.org/drawingml/2006/diagram" xmlns:c14="http://schemas.microsoft.com/office/drawing/2007/8/2/chart" xmlns:cdr="http://schemas.openxmlformats.org/drawingml/2006/chartDrawing" xmlns:wne="http://schemas.microsoft.com/office/word/2006/wordml" xmlns:sl="http://schemas.openxmlformats.org/schemaLibrary/2006/main" xmlns:mc="http://schemas.openxmlformats.org/markup-compatibility/2006" xmlns:wp14="http://schemas.microsoft.com/office/word/2010/wordprocessingDrawing" xmlns:wp="http://schemas.openxmlformats.org/drawingml/2006/wordprocessingDrawing" xmlns:m="http://schemas.openxmlformats.org/officeDocument/2006/math" xmlns:w14="http://schemas.microsoft.com/office/word/2010/wordml" xmlns:w15="http://schemas.microsoft.com/office/word/2012/wordml" xmlns:w="http://schemas.openxmlformats.org/wordprocessingml/2006/main">
       <c:ext xmlns:c16r3="http://schemas.microsoft.com/office/drawing/2017/03/chart" uri="{56B9EC1D-385E-4148-901F-78D8002777C0}">
         <c16r3:dataDisplayOptions16>
           <c16r3:dispNaAsBlank val="1"/>
@@ -1735,7 +1735,7 @@
                 </a:outerShdw>
               </a:effectLst>
             </c:spPr>
-            <c:extLst xmlns:w="http://schemas.openxmlformats.org/wordprocessingml/2006/main" xmlns:w15="http://schemas.microsoft.com/office/word/2012/wordml" xmlns:w14="http://schemas.microsoft.com/office/word/2010/wordml" xmlns:m="http://schemas.openxmlformats.org/officeDocument/2006/math" xmlns:wp="http://schemas.openxmlformats.org/drawingml/2006/wordprocessingDrawing" xmlns:wp14="http://schemas.microsoft.com/office/word/2010/wordprocessingDrawing" xmlns:mc="http://schemas.openxmlformats.org/markup-compatibility/2006" xmlns:sl="http://schemas.openxmlformats.org/schemaLibrary/2006/main" xmlns:wne="http://schemas.microsoft.com/office/word/2006/wordml" xmlns:cdr="http://schemas.openxmlformats.org/drawingml/2006/chartDrawing" xmlns:c14="http://schemas.microsoft.com/office/drawing/2007/8/2/chart" xmlns:dgm="http://schemas.openxmlformats.org/drawingml/2006/diagram" xmlns:pic="http://schemas.openxmlformats.org/drawingml/2006/picture" xmlns:xdr="http://schemas.openxmlformats.org/drawingml/2006/spreadsheetDrawing" xmlns:dsp="http://schemas.microsoft.com/office/drawing/2008/diagram" xmlns:xvml="urn:schemas-microsoft-com:office:excel" xmlns:o="urn:schemas-microsoft-com:office:office" xmlns:v="urn:schemas-microsoft-com:vml" xmlns:w10="urn:schemas-microsoft-com:office:word" xmlns:pvml="urn:schemas-microsoft-com:office:powerpoint" xmlns:cppr="http://schemas.microsoft.com/office/2006/coverPageProps" xmlns:odx="http://opendope.org/xpaths" xmlns:odc="http://opendope.org/conditions" xmlns:odq="http://opendope.org/questions" xmlns:oda="http://opendope.org/answers" xmlns:odi="http://opendope.org/components" xmlns:odgm="http://opendope.org/SmartArt/DataHierarchy" xmlns:b="http://schemas.openxmlformats.org/officeDocument/2006/bibliography" xmlns:wps="http://schemas.microsoft.com/office/word/2010/wordprocessingShape" xmlns:w16se="http://schemas.microsoft.com/office/word/2015/wordml/symex" xmlns:w16cid="http://schemas.microsoft.com/office/word/2016/wordml/cid" xmlns:wetp="http://schemas.microsoft.com/office/webextensions/taskpanes/2010/11" xmlns:we="http://schemas.microsoft.com/office/webextensions/webextension/2010/11" xmlns:comp="http://schemas.openxmlformats.org/drawingml/2006/compatibility" xmlns:lc="http://schemas.openxmlformats.org/drawingml/2006/lockedCanvas">
+            <c:extLst xmlns:lc="http://schemas.openxmlformats.org/drawingml/2006/lockedCanvas" xmlns:comp="http://schemas.openxmlformats.org/drawingml/2006/compatibility" xmlns:we="http://schemas.microsoft.com/office/webextensions/webextension/2010/11" xmlns:wetp="http://schemas.microsoft.com/office/webextensions/taskpanes/2010/11" xmlns:w16cid="http://schemas.microsoft.com/office/word/2016/wordml/cid" xmlns:w16se="http://schemas.microsoft.com/office/word/2015/wordml/symex" xmlns:wps="http://schemas.microsoft.com/office/word/2010/wordprocessingShape" xmlns:b="http://schemas.openxmlformats.org/officeDocument/2006/bibliography" xmlns:odgm="http://opendope.org/SmartArt/DataHierarchy" xmlns:odi="http://opendope.org/components" xmlns:oda="http://opendope.org/answers" xmlns:odq="http://opendope.org/questions" xmlns:odc="http://opendope.org/conditions" xmlns:odx="http://opendope.org/xpaths" xmlns:cppr="http://schemas.microsoft.com/office/2006/coverPageProps" xmlns:pvml="urn:schemas-microsoft-com:office:powerpoint" xmlns:w10="urn:schemas-microsoft-com:office:word" xmlns:v="urn:schemas-microsoft-com:vml" xmlns:o="urn:schemas-microsoft-com:office:office" xmlns:xvml="urn:schemas-microsoft-com:office:excel" xmlns:dsp="http://schemas.microsoft.com/office/drawing/2008/diagram" xmlns:xdr="http://schemas.openxmlformats.org/drawingml/2006/spreadsheetDrawing" xmlns:pic="http://schemas.openxmlformats.org/drawingml/2006/picture" xmlns:dgm="http://schemas.openxmlformats.org/drawingml/2006/diagram" xmlns:c14="http://schemas.microsoft.com/office/drawing/2007/8/2/chart" xmlns:cdr="http://schemas.openxmlformats.org/drawingml/2006/chartDrawing" xmlns:wne="http://schemas.microsoft.com/office/word/2006/wordml" xmlns:sl="http://schemas.openxmlformats.org/schemaLibrary/2006/main" xmlns:mc="http://schemas.openxmlformats.org/markup-compatibility/2006" xmlns:wp14="http://schemas.microsoft.com/office/word/2010/wordprocessingDrawing" xmlns:wp="http://schemas.openxmlformats.org/drawingml/2006/wordprocessingDrawing" xmlns:m="http://schemas.openxmlformats.org/officeDocument/2006/math" xmlns:w14="http://schemas.microsoft.com/office/word/2010/wordml" xmlns:w15="http://schemas.microsoft.com/office/word/2012/wordml" xmlns:w="http://schemas.openxmlformats.org/wordprocessingml/2006/main">
               <c:ext xmlns:c16="http://schemas.microsoft.com/office/drawing/2014/chart" uri="{C3380CC4-5D6E-409C-BE32-E72D297353CC}">
                 <c16:uniqueId val="{00000001-6147-E74A-AA7B-5531F0E4EE0C}"/>
               </c:ext>
@@ -1838,7 +1838,7 @@
               </c:numCache>
             </c:numRef>
           </c:val>
-          <c:extLst xmlns:w="http://schemas.openxmlformats.org/wordprocessingml/2006/main" xmlns:w15="http://schemas.microsoft.com/office/word/2012/wordml" xmlns:w14="http://schemas.microsoft.com/office/word/2010/wordml" xmlns:m="http://schemas.openxmlformats.org/officeDocument/2006/math" xmlns:wp="http://schemas.openxmlformats.org/drawingml/2006/wordprocessingDrawing" xmlns:wp14="http://schemas.microsoft.com/office/word/2010/wordprocessingDrawing" xmlns:mc="http://schemas.openxmlformats.org/markup-compatibility/2006" xmlns:sl="http://schemas.openxmlformats.org/schemaLibrary/2006/main" xmlns:wne="http://schemas.microsoft.com/office/word/2006/wordml" xmlns:cdr="http://schemas.openxmlformats.org/drawingml/2006/chartDrawing" xmlns:c14="http://schemas.microsoft.com/office/drawing/2007/8/2/chart" xmlns:dgm="http://schemas.openxmlformats.org/drawingml/2006/diagram" xmlns:pic="http://schemas.openxmlformats.org/drawingml/2006/picture" xmlns:xdr="http://schemas.openxmlformats.org/drawingml/2006/spreadsheetDrawing" xmlns:dsp="http://schemas.microsoft.com/office/drawing/2008/diagram" xmlns:xvml="urn:schemas-microsoft-com:office:excel" xmlns:o="urn:schemas-microsoft-com:office:office" xmlns:v="urn:schemas-microsoft-com:vml" xmlns:w10="urn:schemas-microsoft-com:office:word" xmlns:pvml="urn:schemas-microsoft-com:office:powerpoint" xmlns:cppr="http://schemas.microsoft.com/office/2006/coverPageProps" xmlns:odx="http://opendope.org/xpaths" xmlns:odc="http://opendope.org/conditions" xmlns:odq="http://opendope.org/questions" xmlns:oda="http://opendope.org/answers" xmlns:odi="http://opendope.org/components" xmlns:odgm="http://opendope.org/SmartArt/DataHierarchy" xmlns:b="http://schemas.openxmlformats.org/officeDocument/2006/bibliography" xmlns:wps="http://schemas.microsoft.com/office/word/2010/wordprocessingShape" xmlns:w16se="http://schemas.microsoft.com/office/word/2015/wordml/symex" xmlns:w16cid="http://schemas.microsoft.com/office/word/2016/wordml/cid" xmlns:wetp="http://schemas.microsoft.com/office/webextensions/taskpanes/2010/11" xmlns:we="http://schemas.microsoft.com/office/webextensions/webextension/2010/11" xmlns:comp="http://schemas.openxmlformats.org/drawingml/2006/compatibility" xmlns:lc="http://schemas.openxmlformats.org/drawingml/2006/lockedCanvas">
+          <c:extLst xmlns:lc="http://schemas.openxmlformats.org/drawingml/2006/lockedCanvas" xmlns:comp="http://schemas.openxmlformats.org/drawingml/2006/compatibility" xmlns:we="http://schemas.microsoft.com/office/webextensions/webextension/2010/11" xmlns:wetp="http://schemas.microsoft.com/office/webextensions/taskpanes/2010/11" xmlns:w16cid="http://schemas.microsoft.com/office/word/2016/wordml/cid" xmlns:w16se="http://schemas.microsoft.com/office/word/2015/wordml/symex" xmlns:wps="http://schemas.microsoft.com/office/word/2010/wordprocessingShape" xmlns:b="http://schemas.openxmlformats.org/officeDocument/2006/bibliography" xmlns:odgm="http://opendope.org/SmartArt/DataHierarchy" xmlns:odi="http://opendope.org/components" xmlns:oda="http://opendope.org/answers" xmlns:odq="http://opendope.org/questions" xmlns:odc="http://opendope.org/conditions" xmlns:odx="http://opendope.org/xpaths" xmlns:cppr="http://schemas.microsoft.com/office/2006/coverPageProps" xmlns:pvml="urn:schemas-microsoft-com:office:powerpoint" xmlns:w10="urn:schemas-microsoft-com:office:word" xmlns:v="urn:schemas-microsoft-com:vml" xmlns:o="urn:schemas-microsoft-com:office:office" xmlns:xvml="urn:schemas-microsoft-com:office:excel" xmlns:dsp="http://schemas.microsoft.com/office/drawing/2008/diagram" xmlns:xdr="http://schemas.openxmlformats.org/drawingml/2006/spreadsheetDrawing" xmlns:pic="http://schemas.openxmlformats.org/drawingml/2006/picture" xmlns:dgm="http://schemas.openxmlformats.org/drawingml/2006/diagram" xmlns:c14="http://schemas.microsoft.com/office/drawing/2007/8/2/chart" xmlns:cdr="http://schemas.openxmlformats.org/drawingml/2006/chartDrawing" xmlns:wne="http://schemas.microsoft.com/office/word/2006/wordml" xmlns:sl="http://schemas.openxmlformats.org/schemaLibrary/2006/main" xmlns:mc="http://schemas.openxmlformats.org/markup-compatibility/2006" xmlns:wp14="http://schemas.microsoft.com/office/word/2010/wordprocessingDrawing" xmlns:wp="http://schemas.openxmlformats.org/drawingml/2006/wordprocessingDrawing" xmlns:m="http://schemas.openxmlformats.org/officeDocument/2006/math" xmlns:w14="http://schemas.microsoft.com/office/word/2010/wordml" xmlns:w15="http://schemas.microsoft.com/office/word/2012/wordml" xmlns:w="http://schemas.openxmlformats.org/wordprocessingml/2006/main">
             <c:ext xmlns:c16="http://schemas.microsoft.com/office/drawing/2014/chart" uri="{C3380CC4-5D6E-409C-BE32-E72D297353CC}">
               <c16:uniqueId val="{00000002-6147-E74A-AA7B-5531F0E4EE0C}"/>
             </c:ext>
@@ -2296,7 +2296,7 @@
     <c:plotVisOnly val="1"/>
     <c:dispBlanksAs val="gap"/>
     <c:showDLblsOverMax val="0"/>
-    <c:extLst xmlns:w="http://schemas.openxmlformats.org/wordprocessingml/2006/main" xmlns:w15="http://schemas.microsoft.com/office/word/2012/wordml" xmlns:w14="http://schemas.microsoft.com/office/word/2010/wordml" xmlns:m="http://schemas.openxmlformats.org/officeDocument/2006/math" xmlns:wp="http://schemas.openxmlformats.org/drawingml/2006/wordprocessingDrawing" xmlns:wp14="http://schemas.microsoft.com/office/word/2010/wordprocessingDrawing" xmlns:mc="http://schemas.openxmlformats.org/markup-compatibility/2006" xmlns:sl="http://schemas.openxmlformats.org/schemaLibrary/2006/main" xmlns:wne="http://schemas.microsoft.com/office/word/2006/wordml" xmlns:cdr="http://schemas.openxmlformats.org/drawingml/2006/chartDrawing" xmlns:c14="http://schemas.microsoft.com/office/drawing/2007/8/2/chart" xmlns:dgm="http://schemas.openxmlformats.org/drawingml/2006/diagram" xmlns:pic="http://schemas.openxmlformats.org/drawingml/2006/picture" xmlns:xdr="http://schemas.openxmlformats.org/drawingml/2006/spreadsheetDrawing" xmlns:dsp="http://schemas.microsoft.com/office/drawing/2008/diagram" xmlns:xvml="urn:schemas-microsoft-com:office:excel" xmlns:o="urn:schemas-microsoft-com:office:office" xmlns:v="urn:schemas-microsoft-com:vml" xmlns:w10="urn:schemas-microsoft-com:office:word" xmlns:pvml="urn:schemas-microsoft-com:office:powerpoint" xmlns:cppr="http://schemas.microsoft.com/office/2006/coverPageProps" xmlns:odx="http://opendope.org/xpaths" xmlns:odc="http://opendope.org/conditions" xmlns:odq="http://opendope.org/questions" xmlns:oda="http://opendope.org/answers" xmlns:odi="http://opendope.org/components" xmlns:odgm="http://opendope.org/SmartArt/DataHierarchy" xmlns:b="http://schemas.openxmlformats.org/officeDocument/2006/bibliography" xmlns:wps="http://schemas.microsoft.com/office/word/2010/wordprocessingShape" xmlns:w16se="http://schemas.microsoft.com/office/word/2015/wordml/symex" xmlns:w16cid="http://schemas.microsoft.com/office/word/2016/wordml/cid" xmlns:wetp="http://schemas.microsoft.com/office/webextensions/taskpanes/2010/11" xmlns:we="http://schemas.microsoft.com/office/webextensions/webextension/2010/11" xmlns:comp="http://schemas.openxmlformats.org/drawingml/2006/compatibility" xmlns:lc="http://schemas.openxmlformats.org/drawingml/2006/lockedCanvas">
+    <c:extLst xmlns:lc="http://schemas.openxmlformats.org/drawingml/2006/lockedCanvas" xmlns:comp="http://schemas.openxmlformats.org/drawingml/2006/compatibility" xmlns:we="http://schemas.microsoft.com/office/webextensions/webextension/2010/11" xmlns:wetp="http://schemas.microsoft.com/office/webextensions/taskpanes/2010/11" xmlns:w16cid="http://schemas.microsoft.com/office/word/2016/wordml/cid" xmlns:w16se="http://schemas.microsoft.com/office/word/2015/wordml/symex" xmlns:wps="http://schemas.microsoft.com/office/word/2010/wordprocessingShape" xmlns:b="http://schemas.openxmlformats.org/officeDocument/2006/bibliography" xmlns:odgm="http://opendope.org/SmartArt/DataHierarchy" xmlns:odi="http://opendope.org/components" xmlns:oda="http://opendope.org/answers" xmlns:odq="http://opendope.org/questions" xmlns:odc="http://opendope.org/conditions" xmlns:odx="http://opendope.org/xpaths" xmlns:cppr="http://schemas.microsoft.com/office/2006/coverPageProps" xmlns:pvml="urn:schemas-microsoft-com:office:powerpoint" xmlns:w10="urn:schemas-microsoft-com:office:word" xmlns:v="urn:schemas-microsoft-com:vml" xmlns:o="urn:schemas-microsoft-com:office:office" xmlns:xvml="urn:schemas-microsoft-com:office:excel" xmlns:dsp="http://schemas.microsoft.com/office/drawing/2008/diagram" xmlns:xdr="http://schemas.openxmlformats.org/drawingml/2006/spreadsheetDrawing" xmlns:pic="http://schemas.openxmlformats.org/drawingml/2006/picture" xmlns:dgm="http://schemas.openxmlformats.org/drawingml/2006/diagram" xmlns:c14="http://schemas.microsoft.com/office/drawing/2007/8/2/chart" xmlns:cdr="http://schemas.openxmlformats.org/drawingml/2006/chartDrawing" xmlns:wne="http://schemas.microsoft.com/office/word/2006/wordml" xmlns:sl="http://schemas.openxmlformats.org/schemaLibrary/2006/main" xmlns:mc="http://schemas.openxmlformats.org/markup-compatibility/2006" xmlns:wp14="http://schemas.microsoft.com/office/word/2010/wordprocessingDrawing" xmlns:wp="http://schemas.openxmlformats.org/drawingml/2006/wordprocessingDrawing" xmlns:m="http://schemas.openxmlformats.org/officeDocument/2006/math" xmlns:w14="http://schemas.microsoft.com/office/word/2010/wordml" xmlns:w15="http://schemas.microsoft.com/office/word/2012/wordml" xmlns:w="http://schemas.openxmlformats.org/wordprocessingml/2006/main">
       <c:ext xmlns:c16r3="http://schemas.microsoft.com/office/drawing/2017/03/chart" uri="{56B9EC1D-385E-4148-901F-78D8002777C0}">
         <c16r3:dataDisplayOptions16>
           <c16r3:dispNaAsBlank val="1"/>
@@ -8110,7 +8110,7 @@
           <a:p>
             <a:fld id="{C1255C68-584F-174D-BB81-51BF91708794}" type="datetimeFigureOut">
               <a:rPr lang="en-US" smtClean="0"/>
-              <a:t>5/6/26</a:t>
+              <a:t>5/7/26</a:t>
             </a:fld>
             <a:endParaRPr lang="en-US"/>
           </a:p>
@@ -8303,7 +8303,7 @@
           <a:p>
             <a:fld id="{A1EDAAC4-819D-C544-9EA1-C73624CFD70B}" type="datetimeFigureOut">
               <a:rPr lang="en-US" smtClean="0"/>
-              <a:t>5/6/26</a:t>
+              <a:t>5/7/26</a:t>
             </a:fld>
             <a:endParaRPr lang="en-US"/>
           </a:p>
@@ -28076,7 +28076,7 @@
         <p:spPr>
           <a:xfrm>
             <a:off x="381600" y="129568"/>
-            <a:ext cx="4192668" cy="228209"/>
+            <a:ext cx="3012217" cy="228209"/>
           </a:xfrm>
         </p:spPr>
         <p:txBody>
@@ -28085,7 +28085,7 @@
           <a:p>
             <a:r>
               <a:rPr lang="en-GB" dirty="0"/>
-              <a:t>Portfolio trends – Test-to-production code ratio</a:t>
+              <a:t>Portfolio trends – Maintainability</a:t>
             </a:r>
           </a:p>
         </p:txBody>
@@ -31701,8 +31701,8 @@
         </p:nvSpPr>
         <p:spPr>
           <a:xfrm>
-            <a:off x="381600" y="129600"/>
-            <a:ext cx="2927899" cy="228145"/>
+            <a:off x="381600" y="129568"/>
+            <a:ext cx="3265171" cy="228209"/>
           </a:xfrm>
         </p:spPr>
         <p:txBody>
@@ -31711,7 +31711,7 @@
           <a:p>
             <a:r>
               <a:rPr lang="en-GB" dirty="0"/>
-              <a:t>Key findings – Open Source and IP</a:t>
+              <a:t>Portfolio trends – Open-Source Health</a:t>
             </a:r>
           </a:p>
         </p:txBody>
@@ -33232,8 +33232,8 @@
         </p:nvSpPr>
         <p:spPr>
           <a:xfrm>
-            <a:off x="381600" y="129600"/>
-            <a:ext cx="735632" cy="228145"/>
+            <a:off x="381600" y="129568"/>
+            <a:ext cx="1325858" cy="228209"/>
           </a:xfrm>
         </p:spPr>
         <p:txBody>
@@ -33246,7 +33246,7 @@
                   <a:schemeClr val="tx2"/>
                 </a:solidFill>
               </a:rPr>
-              <a:t>Context</a:t>
+              <a:t>Report context</a:t>
             </a:r>
             <a:endParaRPr lang="en-GB" dirty="0"/>
           </a:p>
@@ -33474,7 +33474,7 @@
           <a:p>
             <a:r>
               <a:rPr lang="en-GB" dirty="0"/>
-              <a:t>Report Context</a:t>
+              <a:t>Introduction to the baseline report</a:t>
             </a:r>
           </a:p>
         </p:txBody>
@@ -33852,7 +33852,7 @@
         <p:spPr>
           <a:xfrm>
             <a:off x="381600" y="129568"/>
-            <a:ext cx="1916084" cy="228209"/>
+            <a:ext cx="2169037" cy="228209"/>
           </a:xfrm>
         </p:spPr>
         <p:txBody>
@@ -33861,7 +33861,7 @@
           <a:p>
             <a:r>
               <a:rPr lang="en-GB" dirty="0"/>
-              <a:t>Metadata completeness</a:t>
+              <a:t>Sigrid portfolio hygiene</a:t>
             </a:r>
           </a:p>
         </p:txBody>
@@ -34104,7 +34104,7 @@
         <p:spPr>
           <a:xfrm>
             <a:off x="381600" y="129568"/>
-            <a:ext cx="1747448" cy="228209"/>
+            <a:ext cx="2169037" cy="228209"/>
           </a:xfrm>
         </p:spPr>
         <p:txBody>
@@ -34113,7 +34113,7 @@
           <a:p>
             <a:r>
               <a:rPr lang="en-US" dirty="0"/>
-              <a:t>Objectives coverage</a:t>
+              <a:t>Sigrid portfolio hygiene</a:t>
             </a:r>
           </a:p>
         </p:txBody>
@@ -34834,7 +34834,7 @@
         <p:spPr>
           <a:xfrm>
             <a:off x="381600" y="129568"/>
-            <a:ext cx="1747448" cy="228209"/>
+            <a:ext cx="988586" cy="228209"/>
           </a:xfrm>
         </p:spPr>
         <p:txBody>
@@ -34843,7 +34843,7 @@
           <a:p>
             <a:r>
               <a:rPr lang="en-GB" dirty="0"/>
-              <a:t>Objectives - Status</a:t>
+              <a:t>Objectives</a:t>
             </a:r>
           </a:p>
         </p:txBody>
@@ -35160,7 +35160,7 @@
         <p:spPr>
           <a:xfrm>
             <a:off x="381600" y="129568"/>
-            <a:ext cx="1747448" cy="228209"/>
+            <a:ext cx="988586" cy="228209"/>
           </a:xfrm>
         </p:spPr>
         <p:txBody>
@@ -35169,7 +35169,7 @@
           <a:p>
             <a:r>
               <a:rPr lang="en-GB" dirty="0"/>
-              <a:t>Objectives - Status</a:t>
+              <a:t>Objectives</a:t>
             </a:r>
           </a:p>
         </p:txBody>
@@ -36636,18 +36636,18 @@
 </file>
 
 <file path=customXml/item1.xml><?xml version="1.0" encoding="utf-8"?>
-<p:properties xmlns:p="http://schemas.microsoft.com/office/2006/metadata/properties" xmlns:xsi="http://www.w3.org/2001/XMLSchema-instance" xmlns:pc="http://schemas.microsoft.com/office/infopath/2007/PartnerControls">
-  <documentManagement/>
-</p:properties>
-</file>
-
-<file path=customXml/item2.xml><?xml version="1.0" encoding="utf-8"?>
 <?mso-contentType ?>
 <FormTemplates xmlns="http://schemas.microsoft.com/sharepoint/v3/contenttype/forms">
   <Display>DocumentLibraryForm</Display>
   <Edit>DocumentLibraryForm</Edit>
   <New>DocumentLibraryForm</New>
 </FormTemplates>
+</file>
+
+<file path=customXml/item2.xml><?xml version="1.0" encoding="utf-8"?>
+<p:properties xmlns:p="http://schemas.microsoft.com/office/2006/metadata/properties" xmlns:xsi="http://www.w3.org/2001/XMLSchema-instance" xmlns:pc="http://schemas.microsoft.com/office/infopath/2007/PartnerControls">
+  <documentManagement/>
+</p:properties>
 </file>
 
 <file path=customXml/item3.xml><?xml version="1.0" encoding="utf-8"?>
@@ -36789,6 +36789,14 @@
 </file>
 
 <file path=customXml/itemProps1.xml><?xml version="1.0" encoding="utf-8"?>
+<ds:datastoreItem xmlns:ds="http://schemas.openxmlformats.org/officeDocument/2006/customXml" ds:itemID="{88AD9160-B56A-4FCD-857D-8AE63521E7FB}">
+  <ds:schemaRefs>
+    <ds:schemaRef ds:uri="http://schemas.microsoft.com/sharepoint/v3/contenttype/forms"/>
+  </ds:schemaRefs>
+</ds:datastoreItem>
+</file>
+
+<file path=customXml/itemProps2.xml><?xml version="1.0" encoding="utf-8"?>
 <ds:datastoreItem xmlns:ds="http://schemas.openxmlformats.org/officeDocument/2006/customXml" ds:itemID="{7575A4A2-8818-4F4B-AD30-88D568004514}">
   <ds:schemaRefs>
     <ds:schemaRef ds:uri="http://schemas.microsoft.com/office/2006/metadata/properties"/>
@@ -36800,14 +36808,6 @@
     <ds:schemaRef ds:uri="http://schemas.openxmlformats.org/package/2006/metadata/core-properties"/>
     <ds:schemaRef ds:uri="http://www.w3.org/XML/1998/namespace"/>
     <ds:schemaRef ds:uri="http://purl.org/dc/dcmitype/"/>
-  </ds:schemaRefs>
-</ds:datastoreItem>
-</file>
-
-<file path=customXml/itemProps2.xml><?xml version="1.0" encoding="utf-8"?>
-<ds:datastoreItem xmlns:ds="http://schemas.openxmlformats.org/officeDocument/2006/customXml" ds:itemID="{88AD9160-B56A-4FCD-857D-8AE63521E7FB}">
-  <ds:schemaRefs>
-    <ds:schemaRef ds:uri="http://schemas.microsoft.com/sharepoint/v3/contenttype/forms"/>
   </ds:schemaRefs>
 </ds:datastoreItem>
 </file>

--- a/tests/report_generator/integration/references/reference_portfolio-baseline-report.pptx
+++ b/tests/report_generator/integration/references/reference_portfolio-baseline-report.pptx
@@ -31525,7 +31525,7 @@
           <a:p>
             <a:r>
               <a:rPr lang="en-US" b="0" dirty="0"/>
-              <a:t>243</a:t>
+              <a:t>251</a:t>
             </a:r>
           </a:p>
         </p:txBody>
@@ -31555,7 +31555,7 @@
           <a:p>
             <a:r>
               <a:rPr lang="en-US" b="0" dirty="0"/>
-              <a:t>154</a:t>
+              <a:t>158</a:t>
             </a:r>
           </a:p>
         </p:txBody>
@@ -31585,7 +31585,7 @@
           <a:p>
             <a:r>
               <a:rPr lang="en-US" b="0" dirty="0"/>
-              <a:t>821</a:t>
+              <a:t>855</a:t>
             </a:r>
           </a:p>
         </p:txBody>
@@ -31615,7 +31615,7 @@
           <a:p>
             <a:r>
               <a:rPr lang="en-US" b="0" dirty="0"/>
-              <a:t>167</a:t>
+              <a:t>174</a:t>
             </a:r>
           </a:p>
         </p:txBody>

--- a/tests/report_generator/integration/references/reference_portfolio-baseline-report.pptx
+++ b/tests/report_generator/integration/references/reference_portfolio-baseline-report.pptx
@@ -219,7 +219,7 @@
             <c:invertIfNegative val="0"/>
             <c:bubble3D val="0"/>
             <c:explosion val="6"/>
-            <c:extLst xmlns:w="http://schemas.openxmlformats.org/wordprocessingml/2006/main" xmlns:w15="http://schemas.microsoft.com/office/word/2012/wordml" xmlns:w14="http://schemas.microsoft.com/office/word/2010/wordml" xmlns:m="http://schemas.openxmlformats.org/officeDocument/2006/math" xmlns:wp="http://schemas.openxmlformats.org/drawingml/2006/wordprocessingDrawing" xmlns:wp14="http://schemas.microsoft.com/office/word/2010/wordprocessingDrawing" xmlns:mc="http://schemas.openxmlformats.org/markup-compatibility/2006" xmlns:sl="http://schemas.openxmlformats.org/schemaLibrary/2006/main" xmlns:wne="http://schemas.microsoft.com/office/word/2006/wordml" xmlns:cdr="http://schemas.openxmlformats.org/drawingml/2006/chartDrawing" xmlns:c14="http://schemas.microsoft.com/office/drawing/2007/8/2/chart" xmlns:dgm="http://schemas.openxmlformats.org/drawingml/2006/diagram" xmlns:pic="http://schemas.openxmlformats.org/drawingml/2006/picture" xmlns:xdr="http://schemas.openxmlformats.org/drawingml/2006/spreadsheetDrawing" xmlns:dsp="http://schemas.microsoft.com/office/drawing/2008/diagram" xmlns:xvml="urn:schemas-microsoft-com:office:excel" xmlns:o="urn:schemas-microsoft-com:office:office" xmlns:v="urn:schemas-microsoft-com:vml" xmlns:w10="urn:schemas-microsoft-com:office:word" xmlns:pvml="urn:schemas-microsoft-com:office:powerpoint" xmlns:cppr="http://schemas.microsoft.com/office/2006/coverPageProps" xmlns:odx="http://opendope.org/xpaths" xmlns:odc="http://opendope.org/conditions" xmlns:odq="http://opendope.org/questions" xmlns:oda="http://opendope.org/answers" xmlns:odi="http://opendope.org/components" xmlns:odgm="http://opendope.org/SmartArt/DataHierarchy" xmlns:b="http://schemas.openxmlformats.org/officeDocument/2006/bibliography" xmlns:wps="http://schemas.microsoft.com/office/word/2010/wordprocessingShape" xmlns:w16se="http://schemas.microsoft.com/office/word/2015/wordml/symex" xmlns:w16cid="http://schemas.microsoft.com/office/word/2016/wordml/cid" xmlns:wetp="http://schemas.microsoft.com/office/webextensions/taskpanes/2010/11" xmlns:we="http://schemas.microsoft.com/office/webextensions/webextension/2010/11" xmlns:comp="http://schemas.openxmlformats.org/drawingml/2006/compatibility" xmlns:lc="http://schemas.openxmlformats.org/drawingml/2006/lockedCanvas">
+            <c:extLst xmlns:lc="http://schemas.openxmlformats.org/drawingml/2006/lockedCanvas" xmlns:comp="http://schemas.openxmlformats.org/drawingml/2006/compatibility" xmlns:we="http://schemas.microsoft.com/office/webextensions/webextension/2010/11" xmlns:wetp="http://schemas.microsoft.com/office/webextensions/taskpanes/2010/11" xmlns:w16cid="http://schemas.microsoft.com/office/word/2016/wordml/cid" xmlns:w16se="http://schemas.microsoft.com/office/word/2015/wordml/symex" xmlns:wps="http://schemas.microsoft.com/office/word/2010/wordprocessingShape" xmlns:b="http://schemas.openxmlformats.org/officeDocument/2006/bibliography" xmlns:odgm="http://opendope.org/SmartArt/DataHierarchy" xmlns:odi="http://opendope.org/components" xmlns:oda="http://opendope.org/answers" xmlns:odq="http://opendope.org/questions" xmlns:odc="http://opendope.org/conditions" xmlns:odx="http://opendope.org/xpaths" xmlns:cppr="http://schemas.microsoft.com/office/2006/coverPageProps" xmlns:pvml="urn:schemas-microsoft-com:office:powerpoint" xmlns:w10="urn:schemas-microsoft-com:office:word" xmlns:v="urn:schemas-microsoft-com:vml" xmlns:o="urn:schemas-microsoft-com:office:office" xmlns:xvml="urn:schemas-microsoft-com:office:excel" xmlns:dsp="http://schemas.microsoft.com/office/drawing/2008/diagram" xmlns:xdr="http://schemas.openxmlformats.org/drawingml/2006/spreadsheetDrawing" xmlns:pic="http://schemas.openxmlformats.org/drawingml/2006/picture" xmlns:dgm="http://schemas.openxmlformats.org/drawingml/2006/diagram" xmlns:c14="http://schemas.microsoft.com/office/drawing/2007/8/2/chart" xmlns:cdr="http://schemas.openxmlformats.org/drawingml/2006/chartDrawing" xmlns:wne="http://schemas.microsoft.com/office/word/2006/wordml" xmlns:sl="http://schemas.openxmlformats.org/schemaLibrary/2006/main" xmlns:mc="http://schemas.openxmlformats.org/markup-compatibility/2006" xmlns:wp14="http://schemas.microsoft.com/office/word/2010/wordprocessingDrawing" xmlns:wp="http://schemas.openxmlformats.org/drawingml/2006/wordprocessingDrawing" xmlns:m="http://schemas.openxmlformats.org/officeDocument/2006/math" xmlns:w14="http://schemas.microsoft.com/office/word/2010/wordml" xmlns:w15="http://schemas.microsoft.com/office/word/2012/wordml" xmlns:w="http://schemas.openxmlformats.org/wordprocessingml/2006/main">
               <c:ext xmlns:c16="http://schemas.microsoft.com/office/drawing/2014/chart" uri="{C3380CC4-5D6E-409C-BE32-E72D297353CC}">
                 <c16:uniqueId val="{00000000-7C96-CF4F-94AD-E08A5CD6D25E}"/>
               </c:ext>
@@ -358,7 +358,7 @@
               </c:numCache>
             </c:numRef>
           </c:val>
-          <c:extLst xmlns:w="http://schemas.openxmlformats.org/wordprocessingml/2006/main" xmlns:w15="http://schemas.microsoft.com/office/word/2012/wordml" xmlns:w14="http://schemas.microsoft.com/office/word/2010/wordml" xmlns:m="http://schemas.openxmlformats.org/officeDocument/2006/math" xmlns:wp="http://schemas.openxmlformats.org/drawingml/2006/wordprocessingDrawing" xmlns:wp14="http://schemas.microsoft.com/office/word/2010/wordprocessingDrawing" xmlns:mc="http://schemas.openxmlformats.org/markup-compatibility/2006" xmlns:sl="http://schemas.openxmlformats.org/schemaLibrary/2006/main" xmlns:wne="http://schemas.microsoft.com/office/word/2006/wordml" xmlns:cdr="http://schemas.openxmlformats.org/drawingml/2006/chartDrawing" xmlns:c14="http://schemas.microsoft.com/office/drawing/2007/8/2/chart" xmlns:dgm="http://schemas.openxmlformats.org/drawingml/2006/diagram" xmlns:pic="http://schemas.openxmlformats.org/drawingml/2006/picture" xmlns:xdr="http://schemas.openxmlformats.org/drawingml/2006/spreadsheetDrawing" xmlns:dsp="http://schemas.microsoft.com/office/drawing/2008/diagram" xmlns:xvml="urn:schemas-microsoft-com:office:excel" xmlns:o="urn:schemas-microsoft-com:office:office" xmlns:v="urn:schemas-microsoft-com:vml" xmlns:w10="urn:schemas-microsoft-com:office:word" xmlns:pvml="urn:schemas-microsoft-com:office:powerpoint" xmlns:cppr="http://schemas.microsoft.com/office/2006/coverPageProps" xmlns:odx="http://opendope.org/xpaths" xmlns:odc="http://opendope.org/conditions" xmlns:odq="http://opendope.org/questions" xmlns:oda="http://opendope.org/answers" xmlns:odi="http://opendope.org/components" xmlns:odgm="http://opendope.org/SmartArt/DataHierarchy" xmlns:b="http://schemas.openxmlformats.org/officeDocument/2006/bibliography" xmlns:wps="http://schemas.microsoft.com/office/word/2010/wordprocessingShape" xmlns:w16se="http://schemas.microsoft.com/office/word/2015/wordml/symex" xmlns:w16cid="http://schemas.microsoft.com/office/word/2016/wordml/cid" xmlns:wetp="http://schemas.microsoft.com/office/webextensions/taskpanes/2010/11" xmlns:we="http://schemas.microsoft.com/office/webextensions/webextension/2010/11" xmlns:comp="http://schemas.openxmlformats.org/drawingml/2006/compatibility" xmlns:lc="http://schemas.openxmlformats.org/drawingml/2006/lockedCanvas">
+          <c:extLst xmlns:lc="http://schemas.openxmlformats.org/drawingml/2006/lockedCanvas" xmlns:comp="http://schemas.openxmlformats.org/drawingml/2006/compatibility" xmlns:we="http://schemas.microsoft.com/office/webextensions/webextension/2010/11" xmlns:wetp="http://schemas.microsoft.com/office/webextensions/taskpanes/2010/11" xmlns:w16cid="http://schemas.microsoft.com/office/word/2016/wordml/cid" xmlns:w16se="http://schemas.microsoft.com/office/word/2015/wordml/symex" xmlns:wps="http://schemas.microsoft.com/office/word/2010/wordprocessingShape" xmlns:b="http://schemas.openxmlformats.org/officeDocument/2006/bibliography" xmlns:odgm="http://opendope.org/SmartArt/DataHierarchy" xmlns:odi="http://opendope.org/components" xmlns:oda="http://opendope.org/answers" xmlns:odq="http://opendope.org/questions" xmlns:odc="http://opendope.org/conditions" xmlns:odx="http://opendope.org/xpaths" xmlns:cppr="http://schemas.microsoft.com/office/2006/coverPageProps" xmlns:pvml="urn:schemas-microsoft-com:office:powerpoint" xmlns:w10="urn:schemas-microsoft-com:office:word" xmlns:v="urn:schemas-microsoft-com:vml" xmlns:o="urn:schemas-microsoft-com:office:office" xmlns:xvml="urn:schemas-microsoft-com:office:excel" xmlns:dsp="http://schemas.microsoft.com/office/drawing/2008/diagram" xmlns:xdr="http://schemas.openxmlformats.org/drawingml/2006/spreadsheetDrawing" xmlns:pic="http://schemas.openxmlformats.org/drawingml/2006/picture" xmlns:dgm="http://schemas.openxmlformats.org/drawingml/2006/diagram" xmlns:c14="http://schemas.microsoft.com/office/drawing/2007/8/2/chart" xmlns:cdr="http://schemas.openxmlformats.org/drawingml/2006/chartDrawing" xmlns:wne="http://schemas.microsoft.com/office/word/2006/wordml" xmlns:sl="http://schemas.openxmlformats.org/schemaLibrary/2006/main" xmlns:mc="http://schemas.openxmlformats.org/markup-compatibility/2006" xmlns:wp14="http://schemas.microsoft.com/office/word/2010/wordprocessingDrawing" xmlns:wp="http://schemas.openxmlformats.org/drawingml/2006/wordprocessingDrawing" xmlns:m="http://schemas.openxmlformats.org/officeDocument/2006/math" xmlns:w14="http://schemas.microsoft.com/office/word/2010/wordml" xmlns:w15="http://schemas.microsoft.com/office/word/2012/wordml" xmlns:w="http://schemas.openxmlformats.org/wordprocessingml/2006/main">
             <c:ext xmlns:c16="http://schemas.microsoft.com/office/drawing/2014/chart" uri="{C3380CC4-5D6E-409C-BE32-E72D297353CC}">
               <c16:uniqueId val="{00000001-7C96-CF4F-94AD-E08A5CD6D25E}"/>
             </c:ext>
@@ -601,7 +601,7 @@
     <c:plotVisOnly val="1"/>
     <c:dispBlanksAs val="gap"/>
     <c:showDLblsOverMax val="0"/>
-    <c:extLst xmlns:w="http://schemas.openxmlformats.org/wordprocessingml/2006/main" xmlns:w15="http://schemas.microsoft.com/office/word/2012/wordml" xmlns:w14="http://schemas.microsoft.com/office/word/2010/wordml" xmlns:m="http://schemas.openxmlformats.org/officeDocument/2006/math" xmlns:wp="http://schemas.openxmlformats.org/drawingml/2006/wordprocessingDrawing" xmlns:wp14="http://schemas.microsoft.com/office/word/2010/wordprocessingDrawing" xmlns:mc="http://schemas.openxmlformats.org/markup-compatibility/2006" xmlns:sl="http://schemas.openxmlformats.org/schemaLibrary/2006/main" xmlns:wne="http://schemas.microsoft.com/office/word/2006/wordml" xmlns:cdr="http://schemas.openxmlformats.org/drawingml/2006/chartDrawing" xmlns:c14="http://schemas.microsoft.com/office/drawing/2007/8/2/chart" xmlns:dgm="http://schemas.openxmlformats.org/drawingml/2006/diagram" xmlns:pic="http://schemas.openxmlformats.org/drawingml/2006/picture" xmlns:xdr="http://schemas.openxmlformats.org/drawingml/2006/spreadsheetDrawing" xmlns:dsp="http://schemas.microsoft.com/office/drawing/2008/diagram" xmlns:xvml="urn:schemas-microsoft-com:office:excel" xmlns:o="urn:schemas-microsoft-com:office:office" xmlns:v="urn:schemas-microsoft-com:vml" xmlns:w10="urn:schemas-microsoft-com:office:word" xmlns:pvml="urn:schemas-microsoft-com:office:powerpoint" xmlns:cppr="http://schemas.microsoft.com/office/2006/coverPageProps" xmlns:odx="http://opendope.org/xpaths" xmlns:odc="http://opendope.org/conditions" xmlns:odq="http://opendope.org/questions" xmlns:oda="http://opendope.org/answers" xmlns:odi="http://opendope.org/components" xmlns:odgm="http://opendope.org/SmartArt/DataHierarchy" xmlns:b="http://schemas.openxmlformats.org/officeDocument/2006/bibliography" xmlns:wps="http://schemas.microsoft.com/office/word/2010/wordprocessingShape" xmlns:w16se="http://schemas.microsoft.com/office/word/2015/wordml/symex" xmlns:w16cid="http://schemas.microsoft.com/office/word/2016/wordml/cid" xmlns:wetp="http://schemas.microsoft.com/office/webextensions/taskpanes/2010/11" xmlns:we="http://schemas.microsoft.com/office/webextensions/webextension/2010/11" xmlns:comp="http://schemas.openxmlformats.org/drawingml/2006/compatibility" xmlns:lc="http://schemas.openxmlformats.org/drawingml/2006/lockedCanvas">
+    <c:extLst xmlns:lc="http://schemas.openxmlformats.org/drawingml/2006/lockedCanvas" xmlns:comp="http://schemas.openxmlformats.org/drawingml/2006/compatibility" xmlns:we="http://schemas.microsoft.com/office/webextensions/webextension/2010/11" xmlns:wetp="http://schemas.microsoft.com/office/webextensions/taskpanes/2010/11" xmlns:w16cid="http://schemas.microsoft.com/office/word/2016/wordml/cid" xmlns:w16se="http://schemas.microsoft.com/office/word/2015/wordml/symex" xmlns:wps="http://schemas.microsoft.com/office/word/2010/wordprocessingShape" xmlns:b="http://schemas.openxmlformats.org/officeDocument/2006/bibliography" xmlns:odgm="http://opendope.org/SmartArt/DataHierarchy" xmlns:odi="http://opendope.org/components" xmlns:oda="http://opendope.org/answers" xmlns:odq="http://opendope.org/questions" xmlns:odc="http://opendope.org/conditions" xmlns:odx="http://opendope.org/xpaths" xmlns:cppr="http://schemas.microsoft.com/office/2006/coverPageProps" xmlns:pvml="urn:schemas-microsoft-com:office:powerpoint" xmlns:w10="urn:schemas-microsoft-com:office:word" xmlns:v="urn:schemas-microsoft-com:vml" xmlns:o="urn:schemas-microsoft-com:office:office" xmlns:xvml="urn:schemas-microsoft-com:office:excel" xmlns:dsp="http://schemas.microsoft.com/office/drawing/2008/diagram" xmlns:xdr="http://schemas.openxmlformats.org/drawingml/2006/spreadsheetDrawing" xmlns:pic="http://schemas.openxmlformats.org/drawingml/2006/picture" xmlns:dgm="http://schemas.openxmlformats.org/drawingml/2006/diagram" xmlns:c14="http://schemas.microsoft.com/office/drawing/2007/8/2/chart" xmlns:cdr="http://schemas.openxmlformats.org/drawingml/2006/chartDrawing" xmlns:wne="http://schemas.microsoft.com/office/word/2006/wordml" xmlns:sl="http://schemas.openxmlformats.org/schemaLibrary/2006/main" xmlns:mc="http://schemas.openxmlformats.org/markup-compatibility/2006" xmlns:wp14="http://schemas.microsoft.com/office/word/2010/wordprocessingDrawing" xmlns:wp="http://schemas.openxmlformats.org/drawingml/2006/wordprocessingDrawing" xmlns:m="http://schemas.openxmlformats.org/officeDocument/2006/math" xmlns:w14="http://schemas.microsoft.com/office/word/2010/wordml" xmlns:w15="http://schemas.microsoft.com/office/word/2012/wordml" xmlns:w="http://schemas.openxmlformats.org/wordprocessingml/2006/main">
       <c:ext xmlns:c16r3="http://schemas.microsoft.com/office/drawing/2017/03/chart" uri="{56B9EC1D-385E-4148-901F-78D8002777C0}">
         <c16r3:dataDisplayOptions16>
           <c16r3:dispNaAsBlank val="1"/>
@@ -1050,7 +1050,7 @@
                 </a:outerShdw>
               </a:effectLst>
             </c:spPr>
-            <c:extLst xmlns:lc="http://schemas.openxmlformats.org/drawingml/2006/lockedCanvas" xmlns:comp="http://schemas.openxmlformats.org/drawingml/2006/compatibility" xmlns:we="http://schemas.microsoft.com/office/webextensions/webextension/2010/11" xmlns:wetp="http://schemas.microsoft.com/office/webextensions/taskpanes/2010/11" xmlns:w16cid="http://schemas.microsoft.com/office/word/2016/wordml/cid" xmlns:w16se="http://schemas.microsoft.com/office/word/2015/wordml/symex" xmlns:wps="http://schemas.microsoft.com/office/word/2010/wordprocessingShape" xmlns:b="http://schemas.openxmlformats.org/officeDocument/2006/bibliography" xmlns:odgm="http://opendope.org/SmartArt/DataHierarchy" xmlns:odi="http://opendope.org/components" xmlns:oda="http://opendope.org/answers" xmlns:odq="http://opendope.org/questions" xmlns:odc="http://opendope.org/conditions" xmlns:odx="http://opendope.org/xpaths" xmlns:cppr="http://schemas.microsoft.com/office/2006/coverPageProps" xmlns:pvml="urn:schemas-microsoft-com:office:powerpoint" xmlns:w10="urn:schemas-microsoft-com:office:word" xmlns:v="urn:schemas-microsoft-com:vml" xmlns:o="urn:schemas-microsoft-com:office:office" xmlns:xvml="urn:schemas-microsoft-com:office:excel" xmlns:dsp="http://schemas.microsoft.com/office/drawing/2008/diagram" xmlns:xdr="http://schemas.openxmlformats.org/drawingml/2006/spreadsheetDrawing" xmlns:pic="http://schemas.openxmlformats.org/drawingml/2006/picture" xmlns:dgm="http://schemas.openxmlformats.org/drawingml/2006/diagram" xmlns:c14="http://schemas.microsoft.com/office/drawing/2007/8/2/chart" xmlns:cdr="http://schemas.openxmlformats.org/drawingml/2006/chartDrawing" xmlns:wne="http://schemas.microsoft.com/office/word/2006/wordml" xmlns:sl="http://schemas.openxmlformats.org/schemaLibrary/2006/main" xmlns:mc="http://schemas.openxmlformats.org/markup-compatibility/2006" xmlns:wp14="http://schemas.microsoft.com/office/word/2010/wordprocessingDrawing" xmlns:wp="http://schemas.openxmlformats.org/drawingml/2006/wordprocessingDrawing" xmlns:m="http://schemas.openxmlformats.org/officeDocument/2006/math" xmlns:w14="http://schemas.microsoft.com/office/word/2010/wordml" xmlns:w15="http://schemas.microsoft.com/office/word/2012/wordml" xmlns:w="http://schemas.openxmlformats.org/wordprocessingml/2006/main">
+            <c:extLst xmlns:w="http://schemas.openxmlformats.org/wordprocessingml/2006/main" xmlns:w15="http://schemas.microsoft.com/office/word/2012/wordml" xmlns:w14="http://schemas.microsoft.com/office/word/2010/wordml" xmlns:m="http://schemas.openxmlformats.org/officeDocument/2006/math" xmlns:wp="http://schemas.openxmlformats.org/drawingml/2006/wordprocessingDrawing" xmlns:wp14="http://schemas.microsoft.com/office/word/2010/wordprocessingDrawing" xmlns:mc="http://schemas.openxmlformats.org/markup-compatibility/2006" xmlns:sl="http://schemas.openxmlformats.org/schemaLibrary/2006/main" xmlns:wne="http://schemas.microsoft.com/office/word/2006/wordml" xmlns:cdr="http://schemas.openxmlformats.org/drawingml/2006/chartDrawing" xmlns:c14="http://schemas.microsoft.com/office/drawing/2007/8/2/chart" xmlns:dgm="http://schemas.openxmlformats.org/drawingml/2006/diagram" xmlns:pic="http://schemas.openxmlformats.org/drawingml/2006/picture" xmlns:xdr="http://schemas.openxmlformats.org/drawingml/2006/spreadsheetDrawing" xmlns:dsp="http://schemas.microsoft.com/office/drawing/2008/diagram" xmlns:xvml="urn:schemas-microsoft-com:office:excel" xmlns:o="urn:schemas-microsoft-com:office:office" xmlns:v="urn:schemas-microsoft-com:vml" xmlns:w10="urn:schemas-microsoft-com:office:word" xmlns:pvml="urn:schemas-microsoft-com:office:powerpoint" xmlns:cppr="http://schemas.microsoft.com/office/2006/coverPageProps" xmlns:odx="http://opendope.org/xpaths" xmlns:odc="http://opendope.org/conditions" xmlns:odq="http://opendope.org/questions" xmlns:oda="http://opendope.org/answers" xmlns:odi="http://opendope.org/components" xmlns:odgm="http://opendope.org/SmartArt/DataHierarchy" xmlns:b="http://schemas.openxmlformats.org/officeDocument/2006/bibliography" xmlns:wps="http://schemas.microsoft.com/office/word/2010/wordprocessingShape" xmlns:w16se="http://schemas.microsoft.com/office/word/2015/wordml/symex" xmlns:w16cid="http://schemas.microsoft.com/office/word/2016/wordml/cid" xmlns:wetp="http://schemas.microsoft.com/office/webextensions/taskpanes/2010/11" xmlns:we="http://schemas.microsoft.com/office/webextensions/webextension/2010/11" xmlns:comp="http://schemas.openxmlformats.org/drawingml/2006/compatibility" xmlns:lc="http://schemas.openxmlformats.org/drawingml/2006/lockedCanvas">
               <c:ext xmlns:c16="http://schemas.microsoft.com/office/drawing/2014/chart" uri="{C3380CC4-5D6E-409C-BE32-E72D297353CC}">
                 <c16:uniqueId val="{00000001-6147-E74A-AA7B-5531F0E4EE0C}"/>
               </c:ext>
@@ -1175,7 +1175,7 @@
               </c:numCache>
             </c:numRef>
           </c:val>
-          <c:extLst xmlns:lc="http://schemas.openxmlformats.org/drawingml/2006/lockedCanvas" xmlns:comp="http://schemas.openxmlformats.org/drawingml/2006/compatibility" xmlns:we="http://schemas.microsoft.com/office/webextensions/webextension/2010/11" xmlns:wetp="http://schemas.microsoft.com/office/webextensions/taskpanes/2010/11" xmlns:w16cid="http://schemas.microsoft.com/office/word/2016/wordml/cid" xmlns:w16se="http://schemas.microsoft.com/office/word/2015/wordml/symex" xmlns:wps="http://schemas.microsoft.com/office/word/2010/wordprocessingShape" xmlns:b="http://schemas.openxmlformats.org/officeDocument/2006/bibliography" xmlns:odgm="http://opendope.org/SmartArt/DataHierarchy" xmlns:odi="http://opendope.org/components" xmlns:oda="http://opendope.org/answers" xmlns:odq="http://opendope.org/questions" xmlns:odc="http://opendope.org/conditions" xmlns:odx="http://opendope.org/xpaths" xmlns:cppr="http://schemas.microsoft.com/office/2006/coverPageProps" xmlns:pvml="urn:schemas-microsoft-com:office:powerpoint" xmlns:w10="urn:schemas-microsoft-com:office:word" xmlns:v="urn:schemas-microsoft-com:vml" xmlns:o="urn:schemas-microsoft-com:office:office" xmlns:xvml="urn:schemas-microsoft-com:office:excel" xmlns:dsp="http://schemas.microsoft.com/office/drawing/2008/diagram" xmlns:xdr="http://schemas.openxmlformats.org/drawingml/2006/spreadsheetDrawing" xmlns:pic="http://schemas.openxmlformats.org/drawingml/2006/picture" xmlns:dgm="http://schemas.openxmlformats.org/drawingml/2006/diagram" xmlns:c14="http://schemas.microsoft.com/office/drawing/2007/8/2/chart" xmlns:cdr="http://schemas.openxmlformats.org/drawingml/2006/chartDrawing" xmlns:wne="http://schemas.microsoft.com/office/word/2006/wordml" xmlns:sl="http://schemas.openxmlformats.org/schemaLibrary/2006/main" xmlns:mc="http://schemas.openxmlformats.org/markup-compatibility/2006" xmlns:wp14="http://schemas.microsoft.com/office/word/2010/wordprocessingDrawing" xmlns:wp="http://schemas.openxmlformats.org/drawingml/2006/wordprocessingDrawing" xmlns:m="http://schemas.openxmlformats.org/officeDocument/2006/math" xmlns:w14="http://schemas.microsoft.com/office/word/2010/wordml" xmlns:w15="http://schemas.microsoft.com/office/word/2012/wordml" xmlns:w="http://schemas.openxmlformats.org/wordprocessingml/2006/main">
+          <c:extLst xmlns:w="http://schemas.openxmlformats.org/wordprocessingml/2006/main" xmlns:w15="http://schemas.microsoft.com/office/word/2012/wordml" xmlns:w14="http://schemas.microsoft.com/office/word/2010/wordml" xmlns:m="http://schemas.openxmlformats.org/officeDocument/2006/math" xmlns:wp="http://schemas.openxmlformats.org/drawingml/2006/wordprocessingDrawing" xmlns:wp14="http://schemas.microsoft.com/office/word/2010/wordprocessingDrawing" xmlns:mc="http://schemas.openxmlformats.org/markup-compatibility/2006" xmlns:sl="http://schemas.openxmlformats.org/schemaLibrary/2006/main" xmlns:wne="http://schemas.microsoft.com/office/word/2006/wordml" xmlns:cdr="http://schemas.openxmlformats.org/drawingml/2006/chartDrawing" xmlns:c14="http://schemas.microsoft.com/office/drawing/2007/8/2/chart" xmlns:dgm="http://schemas.openxmlformats.org/drawingml/2006/diagram" xmlns:pic="http://schemas.openxmlformats.org/drawingml/2006/picture" xmlns:xdr="http://schemas.openxmlformats.org/drawingml/2006/spreadsheetDrawing" xmlns:dsp="http://schemas.microsoft.com/office/drawing/2008/diagram" xmlns:xvml="urn:schemas-microsoft-com:office:excel" xmlns:o="urn:schemas-microsoft-com:office:office" xmlns:v="urn:schemas-microsoft-com:vml" xmlns:w10="urn:schemas-microsoft-com:office:word" xmlns:pvml="urn:schemas-microsoft-com:office:powerpoint" xmlns:cppr="http://schemas.microsoft.com/office/2006/coverPageProps" xmlns:odx="http://opendope.org/xpaths" xmlns:odc="http://opendope.org/conditions" xmlns:odq="http://opendope.org/questions" xmlns:oda="http://opendope.org/answers" xmlns:odi="http://opendope.org/components" xmlns:odgm="http://opendope.org/SmartArt/DataHierarchy" xmlns:b="http://schemas.openxmlformats.org/officeDocument/2006/bibliography" xmlns:wps="http://schemas.microsoft.com/office/word/2010/wordprocessingShape" xmlns:w16se="http://schemas.microsoft.com/office/word/2015/wordml/symex" xmlns:w16cid="http://schemas.microsoft.com/office/word/2016/wordml/cid" xmlns:wetp="http://schemas.microsoft.com/office/webextensions/taskpanes/2010/11" xmlns:we="http://schemas.microsoft.com/office/webextensions/webextension/2010/11" xmlns:comp="http://schemas.openxmlformats.org/drawingml/2006/compatibility" xmlns:lc="http://schemas.openxmlformats.org/drawingml/2006/lockedCanvas">
             <c:ext xmlns:c16="http://schemas.microsoft.com/office/drawing/2014/chart" uri="{C3380CC4-5D6E-409C-BE32-E72D297353CC}">
               <c16:uniqueId val="{00000002-6147-E74A-AA7B-5531F0E4EE0C}"/>
             </c:ext>
@@ -1633,7 +1633,7 @@
     <c:plotVisOnly val="1"/>
     <c:dispBlanksAs val="gap"/>
     <c:showDLblsOverMax val="0"/>
-    <c:extLst xmlns:lc="http://schemas.openxmlformats.org/drawingml/2006/lockedCanvas" xmlns:comp="http://schemas.openxmlformats.org/drawingml/2006/compatibility" xmlns:we="http://schemas.microsoft.com/office/webextensions/webextension/2010/11" xmlns:wetp="http://schemas.microsoft.com/office/webextensions/taskpanes/2010/11" xmlns:w16cid="http://schemas.microsoft.com/office/word/2016/wordml/cid" xmlns:w16se="http://schemas.microsoft.com/office/word/2015/wordml/symex" xmlns:wps="http://schemas.microsoft.com/office/word/2010/wordprocessingShape" xmlns:b="http://schemas.openxmlformats.org/officeDocument/2006/bibliography" xmlns:odgm="http://opendope.org/SmartArt/DataHierarchy" xmlns:odi="http://opendope.org/components" xmlns:oda="http://opendope.org/answers" xmlns:odq="http://opendope.org/questions" xmlns:odc="http://opendope.org/conditions" xmlns:odx="http://opendope.org/xpaths" xmlns:cppr="http://schemas.microsoft.com/office/2006/coverPageProps" xmlns:pvml="urn:schemas-microsoft-com:office:powerpoint" xmlns:w10="urn:schemas-microsoft-com:office:word" xmlns:v="urn:schemas-microsoft-com:vml" xmlns:o="urn:schemas-microsoft-com:office:office" xmlns:xvml="urn:schemas-microsoft-com:office:excel" xmlns:dsp="http://schemas.microsoft.com/office/drawing/2008/diagram" xmlns:xdr="http://schemas.openxmlformats.org/drawingml/2006/spreadsheetDrawing" xmlns:pic="http://schemas.openxmlformats.org/drawingml/2006/picture" xmlns:dgm="http://schemas.openxmlformats.org/drawingml/2006/diagram" xmlns:c14="http://schemas.microsoft.com/office/drawing/2007/8/2/chart" xmlns:cdr="http://schemas.openxmlformats.org/drawingml/2006/chartDrawing" xmlns:wne="http://schemas.microsoft.com/office/word/2006/wordml" xmlns:sl="http://schemas.openxmlformats.org/schemaLibrary/2006/main" xmlns:mc="http://schemas.openxmlformats.org/markup-compatibility/2006" xmlns:wp14="http://schemas.microsoft.com/office/word/2010/wordprocessingDrawing" xmlns:wp="http://schemas.openxmlformats.org/drawingml/2006/wordprocessingDrawing" xmlns:m="http://schemas.openxmlformats.org/officeDocument/2006/math" xmlns:w14="http://schemas.microsoft.com/office/word/2010/wordml" xmlns:w15="http://schemas.microsoft.com/office/word/2012/wordml" xmlns:w="http://schemas.openxmlformats.org/wordprocessingml/2006/main">
+    <c:extLst xmlns:w="http://schemas.openxmlformats.org/wordprocessingml/2006/main" xmlns:w15="http://schemas.microsoft.com/office/word/2012/wordml" xmlns:w14="http://schemas.microsoft.com/office/word/2010/wordml" xmlns:m="http://schemas.openxmlformats.org/officeDocument/2006/math" xmlns:wp="http://schemas.openxmlformats.org/drawingml/2006/wordprocessingDrawing" xmlns:wp14="http://schemas.microsoft.com/office/word/2010/wordprocessingDrawing" xmlns:mc="http://schemas.openxmlformats.org/markup-compatibility/2006" xmlns:sl="http://schemas.openxmlformats.org/schemaLibrary/2006/main" xmlns:wne="http://schemas.microsoft.com/office/word/2006/wordml" xmlns:cdr="http://schemas.openxmlformats.org/drawingml/2006/chartDrawing" xmlns:c14="http://schemas.microsoft.com/office/drawing/2007/8/2/chart" xmlns:dgm="http://schemas.openxmlformats.org/drawingml/2006/diagram" xmlns:pic="http://schemas.openxmlformats.org/drawingml/2006/picture" xmlns:xdr="http://schemas.openxmlformats.org/drawingml/2006/spreadsheetDrawing" xmlns:dsp="http://schemas.microsoft.com/office/drawing/2008/diagram" xmlns:xvml="urn:schemas-microsoft-com:office:excel" xmlns:o="urn:schemas-microsoft-com:office:office" xmlns:v="urn:schemas-microsoft-com:vml" xmlns:w10="urn:schemas-microsoft-com:office:word" xmlns:pvml="urn:schemas-microsoft-com:office:powerpoint" xmlns:cppr="http://schemas.microsoft.com/office/2006/coverPageProps" xmlns:odx="http://opendope.org/xpaths" xmlns:odc="http://opendope.org/conditions" xmlns:odq="http://opendope.org/questions" xmlns:oda="http://opendope.org/answers" xmlns:odi="http://opendope.org/components" xmlns:odgm="http://opendope.org/SmartArt/DataHierarchy" xmlns:b="http://schemas.openxmlformats.org/officeDocument/2006/bibliography" xmlns:wps="http://schemas.microsoft.com/office/word/2010/wordprocessingShape" xmlns:w16se="http://schemas.microsoft.com/office/word/2015/wordml/symex" xmlns:w16cid="http://schemas.microsoft.com/office/word/2016/wordml/cid" xmlns:wetp="http://schemas.microsoft.com/office/webextensions/taskpanes/2010/11" xmlns:we="http://schemas.microsoft.com/office/webextensions/webextension/2010/11" xmlns:comp="http://schemas.openxmlformats.org/drawingml/2006/compatibility" xmlns:lc="http://schemas.openxmlformats.org/drawingml/2006/lockedCanvas">
       <c:ext xmlns:c16r3="http://schemas.microsoft.com/office/drawing/2017/03/chart" uri="{56B9EC1D-385E-4148-901F-78D8002777C0}">
         <c16r3:dataDisplayOptions16>
           <c16r3:dispNaAsBlank val="1"/>
@@ -1735,7 +1735,7 @@
                 </a:outerShdw>
               </a:effectLst>
             </c:spPr>
-            <c:extLst xmlns:lc="http://schemas.openxmlformats.org/drawingml/2006/lockedCanvas" xmlns:comp="http://schemas.openxmlformats.org/drawingml/2006/compatibility" xmlns:we="http://schemas.microsoft.com/office/webextensions/webextension/2010/11" xmlns:wetp="http://schemas.microsoft.com/office/webextensions/taskpanes/2010/11" xmlns:w16cid="http://schemas.microsoft.com/office/word/2016/wordml/cid" xmlns:w16se="http://schemas.microsoft.com/office/word/2015/wordml/symex" xmlns:wps="http://schemas.microsoft.com/office/word/2010/wordprocessingShape" xmlns:b="http://schemas.openxmlformats.org/officeDocument/2006/bibliography" xmlns:odgm="http://opendope.org/SmartArt/DataHierarchy" xmlns:odi="http://opendope.org/components" xmlns:oda="http://opendope.org/answers" xmlns:odq="http://opendope.org/questions" xmlns:odc="http://opendope.org/conditions" xmlns:odx="http://opendope.org/xpaths" xmlns:cppr="http://schemas.microsoft.com/office/2006/coverPageProps" xmlns:pvml="urn:schemas-microsoft-com:office:powerpoint" xmlns:w10="urn:schemas-microsoft-com:office:word" xmlns:v="urn:schemas-microsoft-com:vml" xmlns:o="urn:schemas-microsoft-com:office:office" xmlns:xvml="urn:schemas-microsoft-com:office:excel" xmlns:dsp="http://schemas.microsoft.com/office/drawing/2008/diagram" xmlns:xdr="http://schemas.openxmlformats.org/drawingml/2006/spreadsheetDrawing" xmlns:pic="http://schemas.openxmlformats.org/drawingml/2006/picture" xmlns:dgm="http://schemas.openxmlformats.org/drawingml/2006/diagram" xmlns:c14="http://schemas.microsoft.com/office/drawing/2007/8/2/chart" xmlns:cdr="http://schemas.openxmlformats.org/drawingml/2006/chartDrawing" xmlns:wne="http://schemas.microsoft.com/office/word/2006/wordml" xmlns:sl="http://schemas.openxmlformats.org/schemaLibrary/2006/main" xmlns:mc="http://schemas.openxmlformats.org/markup-compatibility/2006" xmlns:wp14="http://schemas.microsoft.com/office/word/2010/wordprocessingDrawing" xmlns:wp="http://schemas.openxmlformats.org/drawingml/2006/wordprocessingDrawing" xmlns:m="http://schemas.openxmlformats.org/officeDocument/2006/math" xmlns:w14="http://schemas.microsoft.com/office/word/2010/wordml" xmlns:w15="http://schemas.microsoft.com/office/word/2012/wordml" xmlns:w="http://schemas.openxmlformats.org/wordprocessingml/2006/main">
+            <c:extLst xmlns:w="http://schemas.openxmlformats.org/wordprocessingml/2006/main" xmlns:w15="http://schemas.microsoft.com/office/word/2012/wordml" xmlns:w14="http://schemas.microsoft.com/office/word/2010/wordml" xmlns:m="http://schemas.openxmlformats.org/officeDocument/2006/math" xmlns:wp="http://schemas.openxmlformats.org/drawingml/2006/wordprocessingDrawing" xmlns:wp14="http://schemas.microsoft.com/office/word/2010/wordprocessingDrawing" xmlns:mc="http://schemas.openxmlformats.org/markup-compatibility/2006" xmlns:sl="http://schemas.openxmlformats.org/schemaLibrary/2006/main" xmlns:wne="http://schemas.microsoft.com/office/word/2006/wordml" xmlns:cdr="http://schemas.openxmlformats.org/drawingml/2006/chartDrawing" xmlns:c14="http://schemas.microsoft.com/office/drawing/2007/8/2/chart" xmlns:dgm="http://schemas.openxmlformats.org/drawingml/2006/diagram" xmlns:pic="http://schemas.openxmlformats.org/drawingml/2006/picture" xmlns:xdr="http://schemas.openxmlformats.org/drawingml/2006/spreadsheetDrawing" xmlns:dsp="http://schemas.microsoft.com/office/drawing/2008/diagram" xmlns:xvml="urn:schemas-microsoft-com:office:excel" xmlns:o="urn:schemas-microsoft-com:office:office" xmlns:v="urn:schemas-microsoft-com:vml" xmlns:w10="urn:schemas-microsoft-com:office:word" xmlns:pvml="urn:schemas-microsoft-com:office:powerpoint" xmlns:cppr="http://schemas.microsoft.com/office/2006/coverPageProps" xmlns:odx="http://opendope.org/xpaths" xmlns:odc="http://opendope.org/conditions" xmlns:odq="http://opendope.org/questions" xmlns:oda="http://opendope.org/answers" xmlns:odi="http://opendope.org/components" xmlns:odgm="http://opendope.org/SmartArt/DataHierarchy" xmlns:b="http://schemas.openxmlformats.org/officeDocument/2006/bibliography" xmlns:wps="http://schemas.microsoft.com/office/word/2010/wordprocessingShape" xmlns:w16se="http://schemas.microsoft.com/office/word/2015/wordml/symex" xmlns:w16cid="http://schemas.microsoft.com/office/word/2016/wordml/cid" xmlns:wetp="http://schemas.microsoft.com/office/webextensions/taskpanes/2010/11" xmlns:we="http://schemas.microsoft.com/office/webextensions/webextension/2010/11" xmlns:comp="http://schemas.openxmlformats.org/drawingml/2006/compatibility" xmlns:lc="http://schemas.openxmlformats.org/drawingml/2006/lockedCanvas">
               <c:ext xmlns:c16="http://schemas.microsoft.com/office/drawing/2014/chart" uri="{C3380CC4-5D6E-409C-BE32-E72D297353CC}">
                 <c16:uniqueId val="{00000001-6147-E74A-AA7B-5531F0E4EE0C}"/>
               </c:ext>
@@ -1838,7 +1838,7 @@
               </c:numCache>
             </c:numRef>
           </c:val>
-          <c:extLst xmlns:lc="http://schemas.openxmlformats.org/drawingml/2006/lockedCanvas" xmlns:comp="http://schemas.openxmlformats.org/drawingml/2006/compatibility" xmlns:we="http://schemas.microsoft.com/office/webextensions/webextension/2010/11" xmlns:wetp="http://schemas.microsoft.com/office/webextensions/taskpanes/2010/11" xmlns:w16cid="http://schemas.microsoft.com/office/word/2016/wordml/cid" xmlns:w16se="http://schemas.microsoft.com/office/word/2015/wordml/symex" xmlns:wps="http://schemas.microsoft.com/office/word/2010/wordprocessingShape" xmlns:b="http://schemas.openxmlformats.org/officeDocument/2006/bibliography" xmlns:odgm="http://opendope.org/SmartArt/DataHierarchy" xmlns:odi="http://opendope.org/components" xmlns:oda="http://opendope.org/answers" xmlns:odq="http://opendope.org/questions" xmlns:odc="http://opendope.org/conditions" xmlns:odx="http://opendope.org/xpaths" xmlns:cppr="http://schemas.microsoft.com/office/2006/coverPageProps" xmlns:pvml="urn:schemas-microsoft-com:office:powerpoint" xmlns:w10="urn:schemas-microsoft-com:office:word" xmlns:v="urn:schemas-microsoft-com:vml" xmlns:o="urn:schemas-microsoft-com:office:office" xmlns:xvml="urn:schemas-microsoft-com:office:excel" xmlns:dsp="http://schemas.microsoft.com/office/drawing/2008/diagram" xmlns:xdr="http://schemas.openxmlformats.org/drawingml/2006/spreadsheetDrawing" xmlns:pic="http://schemas.openxmlformats.org/drawingml/2006/picture" xmlns:dgm="http://schemas.openxmlformats.org/drawingml/2006/diagram" xmlns:c14="http://schemas.microsoft.com/office/drawing/2007/8/2/chart" xmlns:cdr="http://schemas.openxmlformats.org/drawingml/2006/chartDrawing" xmlns:wne="http://schemas.microsoft.com/office/word/2006/wordml" xmlns:sl="http://schemas.openxmlformats.org/schemaLibrary/2006/main" xmlns:mc="http://schemas.openxmlformats.org/markup-compatibility/2006" xmlns:wp14="http://schemas.microsoft.com/office/word/2010/wordprocessingDrawing" xmlns:wp="http://schemas.openxmlformats.org/drawingml/2006/wordprocessingDrawing" xmlns:m="http://schemas.openxmlformats.org/officeDocument/2006/math" xmlns:w14="http://schemas.microsoft.com/office/word/2010/wordml" xmlns:w15="http://schemas.microsoft.com/office/word/2012/wordml" xmlns:w="http://schemas.openxmlformats.org/wordprocessingml/2006/main">
+          <c:extLst xmlns:w="http://schemas.openxmlformats.org/wordprocessingml/2006/main" xmlns:w15="http://schemas.microsoft.com/office/word/2012/wordml" xmlns:w14="http://schemas.microsoft.com/office/word/2010/wordml" xmlns:m="http://schemas.openxmlformats.org/officeDocument/2006/math" xmlns:wp="http://schemas.openxmlformats.org/drawingml/2006/wordprocessingDrawing" xmlns:wp14="http://schemas.microsoft.com/office/word/2010/wordprocessingDrawing" xmlns:mc="http://schemas.openxmlformats.org/markup-compatibility/2006" xmlns:sl="http://schemas.openxmlformats.org/schemaLibrary/2006/main" xmlns:wne="http://schemas.microsoft.com/office/word/2006/wordml" xmlns:cdr="http://schemas.openxmlformats.org/drawingml/2006/chartDrawing" xmlns:c14="http://schemas.microsoft.com/office/drawing/2007/8/2/chart" xmlns:dgm="http://schemas.openxmlformats.org/drawingml/2006/diagram" xmlns:pic="http://schemas.openxmlformats.org/drawingml/2006/picture" xmlns:xdr="http://schemas.openxmlformats.org/drawingml/2006/spreadsheetDrawing" xmlns:dsp="http://schemas.microsoft.com/office/drawing/2008/diagram" xmlns:xvml="urn:schemas-microsoft-com:office:excel" xmlns:o="urn:schemas-microsoft-com:office:office" xmlns:v="urn:schemas-microsoft-com:vml" xmlns:w10="urn:schemas-microsoft-com:office:word" xmlns:pvml="urn:schemas-microsoft-com:office:powerpoint" xmlns:cppr="http://schemas.microsoft.com/office/2006/coverPageProps" xmlns:odx="http://opendope.org/xpaths" xmlns:odc="http://opendope.org/conditions" xmlns:odq="http://opendope.org/questions" xmlns:oda="http://opendope.org/answers" xmlns:odi="http://opendope.org/components" xmlns:odgm="http://opendope.org/SmartArt/DataHierarchy" xmlns:b="http://schemas.openxmlformats.org/officeDocument/2006/bibliography" xmlns:wps="http://schemas.microsoft.com/office/word/2010/wordprocessingShape" xmlns:w16se="http://schemas.microsoft.com/office/word/2015/wordml/symex" xmlns:w16cid="http://schemas.microsoft.com/office/word/2016/wordml/cid" xmlns:wetp="http://schemas.microsoft.com/office/webextensions/taskpanes/2010/11" xmlns:we="http://schemas.microsoft.com/office/webextensions/webextension/2010/11" xmlns:comp="http://schemas.openxmlformats.org/drawingml/2006/compatibility" xmlns:lc="http://schemas.openxmlformats.org/drawingml/2006/lockedCanvas">
             <c:ext xmlns:c16="http://schemas.microsoft.com/office/drawing/2014/chart" uri="{C3380CC4-5D6E-409C-BE32-E72D297353CC}">
               <c16:uniqueId val="{00000002-6147-E74A-AA7B-5531F0E4EE0C}"/>
             </c:ext>
@@ -2296,7 +2296,7 @@
     <c:plotVisOnly val="1"/>
     <c:dispBlanksAs val="gap"/>
     <c:showDLblsOverMax val="0"/>
-    <c:extLst xmlns:lc="http://schemas.openxmlformats.org/drawingml/2006/lockedCanvas" xmlns:comp="http://schemas.openxmlformats.org/drawingml/2006/compatibility" xmlns:we="http://schemas.microsoft.com/office/webextensions/webextension/2010/11" xmlns:wetp="http://schemas.microsoft.com/office/webextensions/taskpanes/2010/11" xmlns:w16cid="http://schemas.microsoft.com/office/word/2016/wordml/cid" xmlns:w16se="http://schemas.microsoft.com/office/word/2015/wordml/symex" xmlns:wps="http://schemas.microsoft.com/office/word/2010/wordprocessingShape" xmlns:b="http://schemas.openxmlformats.org/officeDocument/2006/bibliography" xmlns:odgm="http://opendope.org/SmartArt/DataHierarchy" xmlns:odi="http://opendope.org/components" xmlns:oda="http://opendope.org/answers" xmlns:odq="http://opendope.org/questions" xmlns:odc="http://opendope.org/conditions" xmlns:odx="http://opendope.org/xpaths" xmlns:cppr="http://schemas.microsoft.com/office/2006/coverPageProps" xmlns:pvml="urn:schemas-microsoft-com:office:powerpoint" xmlns:w10="urn:schemas-microsoft-com:office:word" xmlns:v="urn:schemas-microsoft-com:vml" xmlns:o="urn:schemas-microsoft-com:office:office" xmlns:xvml="urn:schemas-microsoft-com:office:excel" xmlns:dsp="http://schemas.microsoft.com/office/drawing/2008/diagram" xmlns:xdr="http://schemas.openxmlformats.org/drawingml/2006/spreadsheetDrawing" xmlns:pic="http://schemas.openxmlformats.org/drawingml/2006/picture" xmlns:dgm="http://schemas.openxmlformats.org/drawingml/2006/diagram" xmlns:c14="http://schemas.microsoft.com/office/drawing/2007/8/2/chart" xmlns:cdr="http://schemas.openxmlformats.org/drawingml/2006/chartDrawing" xmlns:wne="http://schemas.microsoft.com/office/word/2006/wordml" xmlns:sl="http://schemas.openxmlformats.org/schemaLibrary/2006/main" xmlns:mc="http://schemas.openxmlformats.org/markup-compatibility/2006" xmlns:wp14="http://schemas.microsoft.com/office/word/2010/wordprocessingDrawing" xmlns:wp="http://schemas.openxmlformats.org/drawingml/2006/wordprocessingDrawing" xmlns:m="http://schemas.openxmlformats.org/officeDocument/2006/math" xmlns:w14="http://schemas.microsoft.com/office/word/2010/wordml" xmlns:w15="http://schemas.microsoft.com/office/word/2012/wordml" xmlns:w="http://schemas.openxmlformats.org/wordprocessingml/2006/main">
+    <c:extLst xmlns:w="http://schemas.openxmlformats.org/wordprocessingml/2006/main" xmlns:w15="http://schemas.microsoft.com/office/word/2012/wordml" xmlns:w14="http://schemas.microsoft.com/office/word/2010/wordml" xmlns:m="http://schemas.openxmlformats.org/officeDocument/2006/math" xmlns:wp="http://schemas.openxmlformats.org/drawingml/2006/wordprocessingDrawing" xmlns:wp14="http://schemas.microsoft.com/office/word/2010/wordprocessingDrawing" xmlns:mc="http://schemas.openxmlformats.org/markup-compatibility/2006" xmlns:sl="http://schemas.openxmlformats.org/schemaLibrary/2006/main" xmlns:wne="http://schemas.microsoft.com/office/word/2006/wordml" xmlns:cdr="http://schemas.openxmlformats.org/drawingml/2006/chartDrawing" xmlns:c14="http://schemas.microsoft.com/office/drawing/2007/8/2/chart" xmlns:dgm="http://schemas.openxmlformats.org/drawingml/2006/diagram" xmlns:pic="http://schemas.openxmlformats.org/drawingml/2006/picture" xmlns:xdr="http://schemas.openxmlformats.org/drawingml/2006/spreadsheetDrawing" xmlns:dsp="http://schemas.microsoft.com/office/drawing/2008/diagram" xmlns:xvml="urn:schemas-microsoft-com:office:excel" xmlns:o="urn:schemas-microsoft-com:office:office" xmlns:v="urn:schemas-microsoft-com:vml" xmlns:w10="urn:schemas-microsoft-com:office:word" xmlns:pvml="urn:schemas-microsoft-com:office:powerpoint" xmlns:cppr="http://schemas.microsoft.com/office/2006/coverPageProps" xmlns:odx="http://opendope.org/xpaths" xmlns:odc="http://opendope.org/conditions" xmlns:odq="http://opendope.org/questions" xmlns:oda="http://opendope.org/answers" xmlns:odi="http://opendope.org/components" xmlns:odgm="http://opendope.org/SmartArt/DataHierarchy" xmlns:b="http://schemas.openxmlformats.org/officeDocument/2006/bibliography" xmlns:wps="http://schemas.microsoft.com/office/word/2010/wordprocessingShape" xmlns:w16se="http://schemas.microsoft.com/office/word/2015/wordml/symex" xmlns:w16cid="http://schemas.microsoft.com/office/word/2016/wordml/cid" xmlns:wetp="http://schemas.microsoft.com/office/webextensions/taskpanes/2010/11" xmlns:we="http://schemas.microsoft.com/office/webextensions/webextension/2010/11" xmlns:comp="http://schemas.openxmlformats.org/drawingml/2006/compatibility" xmlns:lc="http://schemas.openxmlformats.org/drawingml/2006/lockedCanvas">
       <c:ext xmlns:c16r3="http://schemas.microsoft.com/office/drawing/2017/03/chart" uri="{56B9EC1D-385E-4148-901F-78D8002777C0}">
         <c16r3:dataDisplayOptions16>
           <c16r3:dispNaAsBlank val="1"/>
@@ -8110,7 +8110,7 @@
           <a:p>
             <a:fld id="{C1255C68-584F-174D-BB81-51BF91708794}" type="datetimeFigureOut">
               <a:rPr lang="en-US" smtClean="0"/>
-              <a:t>5/7/26</a:t>
+              <a:t>5/19/26</a:t>
             </a:fld>
             <a:endParaRPr lang="en-US"/>
           </a:p>
@@ -8303,7 +8303,7 @@
           <a:p>
             <a:fld id="{A1EDAAC4-819D-C544-9EA1-C73624CFD70B}" type="datetimeFigureOut">
               <a:rPr lang="en-US" smtClean="0"/>
-              <a:t>5/7/26</a:t>
+              <a:t>5/19/26</a:t>
             </a:fld>
             <a:endParaRPr lang="en-US"/>
           </a:p>
@@ -9617,10 +9617,31 @@
           </a:lstStyle>
           <a:p>
             <a:r>
-              <a:rPr lang="nl-NL"/>
-              <a:t>Confidential</a:t>
-            </a:r>
-            <a:endParaRPr lang="nl-NL" dirty="0"/>
+              <a:rPr lang="nl-NL" dirty="0" err="1"/>
+              <a:t>Generated</a:t>
+            </a:r>
+            <a:r>
+              <a:rPr lang="nl-NL" dirty="0"/>
+              <a:t> </a:t>
+            </a:r>
+            <a:r>
+              <a:rPr lang="nl-NL" dirty="0" err="1"/>
+              <a:t>with</a:t>
+            </a:r>
+            <a:r>
+              <a:rPr lang="nl-NL" dirty="0"/>
+              <a:t> Sigrid</a:t>
+            </a:r>
+          </a:p>
+          <a:p>
+            <a:r>
+              <a:rPr lang="nl-NL" dirty="0" err="1"/>
+              <a:t>for</a:t>
+            </a:r>
+            <a:r>
+              <a:rPr lang="nl-NL" dirty="0"/>
+              <a:t> CUSTOMER_NAME</a:t>
+            </a:r>
           </a:p>
         </p:txBody>
       </p:sp>
@@ -9836,51 +9857,6 @@
       </p:sp>
       <p:sp>
         <p:nvSpPr>
-          <p:cNvPr id="2" name="Tijdelijke aanduiding voor voettekst 1">
-            <a:extLst>
-              <a:ext uri="{FF2B5EF4-FFF2-40B4-BE49-F238E27FC236}">
-                <a16:creationId xmlns:a16="http://schemas.microsoft.com/office/drawing/2014/main" id="{D962B193-53CA-0D19-0118-C61D7DEBCFE8}"/>
-              </a:ext>
-            </a:extLst>
-          </p:cNvPr>
-          <p:cNvSpPr>
-            <a:spLocks noGrp="1"/>
-          </p:cNvSpPr>
-          <p:nvPr>
-            <p:ph type="ftr" sz="quarter" idx="14"/>
-          </p:nvPr>
-        </p:nvSpPr>
-        <p:spPr>
-          <a:xfrm>
-            <a:off x="849600" y="6462000"/>
-            <a:ext cx="1085851" cy="231923"/>
-          </a:xfrm>
-          <a:prstGeom prst="rect">
-            <a:avLst/>
-          </a:prstGeom>
-        </p:spPr>
-        <p:txBody>
-          <a:bodyPr/>
-          <a:lstStyle>
-            <a:lvl1pPr>
-              <a:defRPr>
-                <a:solidFill>
-                  <a:srgbClr val="FFFFFF"/>
-                </a:solidFill>
-              </a:defRPr>
-            </a:lvl1pPr>
-          </a:lstStyle>
-          <a:p>
-            <a:r>
-              <a:rPr lang="nl-NL"/>
-              <a:t>Confidential</a:t>
-            </a:r>
-            <a:endParaRPr lang="nl-NL" dirty="0"/>
-          </a:p>
-        </p:txBody>
-      </p:sp>
-      <p:sp>
-        <p:nvSpPr>
           <p:cNvPr id="3" name="Tijdelijke aanduiding voor dianummer 2">
             <a:extLst>
               <a:ext uri="{FF2B5EF4-FFF2-40B4-BE49-F238E27FC236}">
@@ -10157,6 +10133,96 @@
           </a:p>
         </p:txBody>
       </p:sp>
+      <p:sp>
+        <p:nvSpPr>
+          <p:cNvPr id="5" name="Footer Placeholder 5">
+            <a:extLst>
+              <a:ext uri="{FF2B5EF4-FFF2-40B4-BE49-F238E27FC236}">
+                <a16:creationId xmlns:a16="http://schemas.microsoft.com/office/drawing/2014/main" id="{B0C0C93F-2FEA-2A95-D1EB-F56E5131AF3B}"/>
+              </a:ext>
+            </a:extLst>
+          </p:cNvPr>
+          <p:cNvSpPr>
+            <a:spLocks noGrp="1"/>
+          </p:cNvSpPr>
+          <p:nvPr>
+            <p:ph type="ftr" sz="quarter" idx="3"/>
+          </p:nvPr>
+        </p:nvSpPr>
+        <p:spPr>
+          <a:xfrm>
+            <a:off x="194555" y="6388767"/>
+            <a:ext cx="1763922" cy="370422"/>
+          </a:xfrm>
+          <a:prstGeom prst="rect">
+            <a:avLst/>
+          </a:prstGeom>
+          <a:noFill/>
+          <a:ln>
+            <a:noFill/>
+          </a:ln>
+        </p:spPr>
+        <p:style>
+          <a:lnRef idx="2">
+            <a:schemeClr val="accent1">
+              <a:shade val="50000"/>
+            </a:schemeClr>
+          </a:lnRef>
+          <a:fillRef idx="1">
+            <a:schemeClr val="accent1"/>
+          </a:fillRef>
+          <a:effectRef idx="0">
+            <a:schemeClr val="accent1"/>
+          </a:effectRef>
+          <a:fontRef idx="minor">
+            <a:schemeClr val="lt1"/>
+          </a:fontRef>
+        </p:style>
+        <p:txBody>
+          <a:bodyPr wrap="none" lIns="90000" tIns="46800" rIns="90000" rtlCol="0" anchor="ctr">
+            <a:spAutoFit/>
+          </a:bodyPr>
+          <a:lstStyle>
+            <a:lvl1pPr>
+              <a:defRPr lang="en-US" sz="900" b="0" cap="none" spc="0" baseline="0" dirty="0">
+                <a:solidFill>
+                  <a:schemeClr val="bg1"/>
+                </a:solidFill>
+                <a:latin typeface="Azeret Mono" pitchFamily="2" charset="77"/>
+                <a:cs typeface="Azeret Mono" pitchFamily="2" charset="77"/>
+              </a:defRPr>
+            </a:lvl1pPr>
+          </a:lstStyle>
+          <a:p>
+            <a:r>
+              <a:rPr lang="nl-NL" dirty="0" err="1"/>
+              <a:t>Generated</a:t>
+            </a:r>
+            <a:r>
+              <a:rPr lang="nl-NL" dirty="0"/>
+              <a:t> </a:t>
+            </a:r>
+            <a:r>
+              <a:rPr lang="nl-NL" dirty="0" err="1"/>
+              <a:t>with</a:t>
+            </a:r>
+            <a:r>
+              <a:rPr lang="nl-NL" dirty="0"/>
+              <a:t> Sigrid</a:t>
+            </a:r>
+          </a:p>
+          <a:p>
+            <a:r>
+              <a:rPr lang="nl-NL" dirty="0" err="1"/>
+              <a:t>for</a:t>
+            </a:r>
+            <a:r>
+              <a:rPr lang="nl-NL" dirty="0"/>
+              <a:t> CUSTOMER_NAME</a:t>
+            </a:r>
+          </a:p>
+        </p:txBody>
+      </p:sp>
     </p:spTree>
     <p:extLst>
       <p:ext uri="{BB962C8B-B14F-4D97-AF65-F5344CB8AC3E}">
@@ -10297,43 +10363,6 @@
       </p:sp>
       <p:sp>
         <p:nvSpPr>
-          <p:cNvPr id="2" name="Tijdelijke aanduiding voor voettekst 1">
-            <a:extLst>
-              <a:ext uri="{FF2B5EF4-FFF2-40B4-BE49-F238E27FC236}">
-                <a16:creationId xmlns:a16="http://schemas.microsoft.com/office/drawing/2014/main" id="{E3DFEFF2-832D-3790-5F9D-5A5E200E718B}"/>
-              </a:ext>
-            </a:extLst>
-          </p:cNvPr>
-          <p:cNvSpPr>
-            <a:spLocks noGrp="1"/>
-          </p:cNvSpPr>
-          <p:nvPr>
-            <p:ph type="ftr" sz="quarter" idx="14"/>
-          </p:nvPr>
-        </p:nvSpPr>
-        <p:spPr>
-          <a:xfrm>
-            <a:off x="849600" y="6462000"/>
-            <a:ext cx="1085851" cy="231923"/>
-          </a:xfrm>
-          <a:prstGeom prst="rect">
-            <a:avLst/>
-          </a:prstGeom>
-        </p:spPr>
-        <p:txBody>
-          <a:bodyPr/>
-          <a:lstStyle/>
-          <a:p>
-            <a:r>
-              <a:rPr lang="nl-NL" dirty="0" err="1"/>
-              <a:t>Confidential</a:t>
-            </a:r>
-            <a:endParaRPr lang="nl-NL" dirty="0"/>
-          </a:p>
-        </p:txBody>
-      </p:sp>
-      <p:sp>
-        <p:nvSpPr>
           <p:cNvPr id="3" name="Tijdelijke aanduiding voor dianummer 2">
             <a:extLst>
               <a:ext uri="{FF2B5EF4-FFF2-40B4-BE49-F238E27FC236}">
@@ -10416,6 +10445,96 @@
               <a:t>)</a:t>
             </a:r>
             <a:endParaRPr lang="en-US" dirty="0"/>
+          </a:p>
+        </p:txBody>
+      </p:sp>
+      <p:sp>
+        <p:nvSpPr>
+          <p:cNvPr id="5" name="Footer Placeholder 5">
+            <a:extLst>
+              <a:ext uri="{FF2B5EF4-FFF2-40B4-BE49-F238E27FC236}">
+                <a16:creationId xmlns:a16="http://schemas.microsoft.com/office/drawing/2014/main" id="{37650158-9378-BDA6-B989-A50961008A30}"/>
+              </a:ext>
+            </a:extLst>
+          </p:cNvPr>
+          <p:cNvSpPr>
+            <a:spLocks noGrp="1"/>
+          </p:cNvSpPr>
+          <p:nvPr>
+            <p:ph type="ftr" sz="quarter" idx="3"/>
+          </p:nvPr>
+        </p:nvSpPr>
+        <p:spPr>
+          <a:xfrm>
+            <a:off x="194555" y="6388767"/>
+            <a:ext cx="1763922" cy="370422"/>
+          </a:xfrm>
+          <a:prstGeom prst="rect">
+            <a:avLst/>
+          </a:prstGeom>
+          <a:noFill/>
+          <a:ln>
+            <a:noFill/>
+          </a:ln>
+        </p:spPr>
+        <p:style>
+          <a:lnRef idx="2">
+            <a:schemeClr val="accent1">
+              <a:shade val="50000"/>
+            </a:schemeClr>
+          </a:lnRef>
+          <a:fillRef idx="1">
+            <a:schemeClr val="accent1"/>
+          </a:fillRef>
+          <a:effectRef idx="0">
+            <a:schemeClr val="accent1"/>
+          </a:effectRef>
+          <a:fontRef idx="minor">
+            <a:schemeClr val="lt1"/>
+          </a:fontRef>
+        </p:style>
+        <p:txBody>
+          <a:bodyPr wrap="none" lIns="90000" tIns="46800" rIns="90000" rtlCol="0" anchor="ctr">
+            <a:spAutoFit/>
+          </a:bodyPr>
+          <a:lstStyle>
+            <a:lvl1pPr>
+              <a:defRPr lang="en-US" sz="900" b="0" cap="none" spc="0" baseline="0" dirty="0">
+                <a:solidFill>
+                  <a:srgbClr val="0B54E6"/>
+                </a:solidFill>
+                <a:latin typeface="Azeret Mono" pitchFamily="2" charset="77"/>
+                <a:cs typeface="Azeret Mono" pitchFamily="2" charset="77"/>
+              </a:defRPr>
+            </a:lvl1pPr>
+          </a:lstStyle>
+          <a:p>
+            <a:r>
+              <a:rPr lang="nl-NL" dirty="0" err="1"/>
+              <a:t>Generated</a:t>
+            </a:r>
+            <a:r>
+              <a:rPr lang="nl-NL" dirty="0"/>
+              <a:t> </a:t>
+            </a:r>
+            <a:r>
+              <a:rPr lang="nl-NL" dirty="0" err="1"/>
+              <a:t>with</a:t>
+            </a:r>
+            <a:r>
+              <a:rPr lang="nl-NL" dirty="0"/>
+              <a:t> Sigrid</a:t>
+            </a:r>
+          </a:p>
+          <a:p>
+            <a:r>
+              <a:rPr lang="nl-NL" dirty="0" err="1"/>
+              <a:t>for</a:t>
+            </a:r>
+            <a:r>
+              <a:rPr lang="nl-NL" dirty="0"/>
+              <a:t> CUSTOMER_NAME</a:t>
+            </a:r>
           </a:p>
         </p:txBody>
       </p:sp>
@@ -10559,43 +10678,6 @@
       </p:sp>
       <p:sp>
         <p:nvSpPr>
-          <p:cNvPr id="2" name="Tijdelijke aanduiding voor voettekst 1">
-            <a:extLst>
-              <a:ext uri="{FF2B5EF4-FFF2-40B4-BE49-F238E27FC236}">
-                <a16:creationId xmlns:a16="http://schemas.microsoft.com/office/drawing/2014/main" id="{E3DFEFF2-832D-3790-5F9D-5A5E200E718B}"/>
-              </a:ext>
-            </a:extLst>
-          </p:cNvPr>
-          <p:cNvSpPr>
-            <a:spLocks noGrp="1"/>
-          </p:cNvSpPr>
-          <p:nvPr>
-            <p:ph type="ftr" sz="quarter" idx="14"/>
-          </p:nvPr>
-        </p:nvSpPr>
-        <p:spPr>
-          <a:xfrm>
-            <a:off x="849600" y="6462000"/>
-            <a:ext cx="1085851" cy="231923"/>
-          </a:xfrm>
-          <a:prstGeom prst="rect">
-            <a:avLst/>
-          </a:prstGeom>
-        </p:spPr>
-        <p:txBody>
-          <a:bodyPr/>
-          <a:lstStyle/>
-          <a:p>
-            <a:r>
-              <a:rPr lang="nl-NL" dirty="0" err="1"/>
-              <a:t>Confidential</a:t>
-            </a:r>
-            <a:endParaRPr lang="nl-NL" dirty="0"/>
-          </a:p>
-        </p:txBody>
-      </p:sp>
-      <p:sp>
-        <p:nvSpPr>
           <p:cNvPr id="3" name="Tijdelijke aanduiding voor dianummer 2">
             <a:extLst>
               <a:ext uri="{FF2B5EF4-FFF2-40B4-BE49-F238E27FC236}">
@@ -10740,6 +10822,96 @@
                 <a:schemeClr val="accent1"/>
               </a:solidFill>
             </a:endParaRPr>
+          </a:p>
+        </p:txBody>
+      </p:sp>
+      <p:sp>
+        <p:nvSpPr>
+          <p:cNvPr id="6" name="Footer Placeholder 5">
+            <a:extLst>
+              <a:ext uri="{FF2B5EF4-FFF2-40B4-BE49-F238E27FC236}">
+                <a16:creationId xmlns:a16="http://schemas.microsoft.com/office/drawing/2014/main" id="{29A1803D-62ED-5989-489B-04C2354098C9}"/>
+              </a:ext>
+            </a:extLst>
+          </p:cNvPr>
+          <p:cNvSpPr>
+            <a:spLocks noGrp="1"/>
+          </p:cNvSpPr>
+          <p:nvPr>
+            <p:ph type="ftr" sz="quarter" idx="3"/>
+          </p:nvPr>
+        </p:nvSpPr>
+        <p:spPr>
+          <a:xfrm>
+            <a:off x="194555" y="6388767"/>
+            <a:ext cx="1763922" cy="370422"/>
+          </a:xfrm>
+          <a:prstGeom prst="rect">
+            <a:avLst/>
+          </a:prstGeom>
+          <a:noFill/>
+          <a:ln>
+            <a:noFill/>
+          </a:ln>
+        </p:spPr>
+        <p:style>
+          <a:lnRef idx="2">
+            <a:schemeClr val="accent1">
+              <a:shade val="50000"/>
+            </a:schemeClr>
+          </a:lnRef>
+          <a:fillRef idx="1">
+            <a:schemeClr val="accent1"/>
+          </a:fillRef>
+          <a:effectRef idx="0">
+            <a:schemeClr val="accent1"/>
+          </a:effectRef>
+          <a:fontRef idx="minor">
+            <a:schemeClr val="lt1"/>
+          </a:fontRef>
+        </p:style>
+        <p:txBody>
+          <a:bodyPr wrap="none" lIns="90000" tIns="46800" rIns="90000" rtlCol="0" anchor="ctr">
+            <a:spAutoFit/>
+          </a:bodyPr>
+          <a:lstStyle>
+            <a:lvl1pPr>
+              <a:defRPr lang="en-US" sz="900" b="0" cap="none" spc="0" baseline="0" dirty="0">
+                <a:solidFill>
+                  <a:srgbClr val="0B54E6"/>
+                </a:solidFill>
+                <a:latin typeface="Azeret Mono" pitchFamily="2" charset="77"/>
+                <a:cs typeface="Azeret Mono" pitchFamily="2" charset="77"/>
+              </a:defRPr>
+            </a:lvl1pPr>
+          </a:lstStyle>
+          <a:p>
+            <a:r>
+              <a:rPr lang="nl-NL" dirty="0" err="1"/>
+              <a:t>Generated</a:t>
+            </a:r>
+            <a:r>
+              <a:rPr lang="nl-NL" dirty="0"/>
+              <a:t> </a:t>
+            </a:r>
+            <a:r>
+              <a:rPr lang="nl-NL" dirty="0" err="1"/>
+              <a:t>with</a:t>
+            </a:r>
+            <a:r>
+              <a:rPr lang="nl-NL" dirty="0"/>
+              <a:t> Sigrid</a:t>
+            </a:r>
+          </a:p>
+          <a:p>
+            <a:r>
+              <a:rPr lang="nl-NL" dirty="0" err="1"/>
+              <a:t>for</a:t>
+            </a:r>
+            <a:r>
+              <a:rPr lang="nl-NL" dirty="0"/>
+              <a:t> CUSTOMER_NAME</a:t>
+            </a:r>
           </a:p>
         </p:txBody>
       </p:sp>
@@ -12760,34 +12932,6 @@
       </p:sp>
       <p:sp>
         <p:nvSpPr>
-          <p:cNvPr id="3" name="Tijdelijke aanduiding voor voettekst 2">
-            <a:extLst>
-              <a:ext uri="{FF2B5EF4-FFF2-40B4-BE49-F238E27FC236}">
-                <a16:creationId xmlns:a16="http://schemas.microsoft.com/office/drawing/2014/main" id="{894A2A75-3145-2B40-BD84-D3A76CD6FFAD}"/>
-              </a:ext>
-            </a:extLst>
-          </p:cNvPr>
-          <p:cNvSpPr>
-            <a:spLocks noGrp="1"/>
-          </p:cNvSpPr>
-          <p:nvPr>
-            <p:ph type="ftr" sz="quarter" idx="20"/>
-          </p:nvPr>
-        </p:nvSpPr>
-        <p:spPr/>
-        <p:txBody>
-          <a:bodyPr/>
-          <a:lstStyle/>
-          <a:p>
-            <a:r>
-              <a:rPr lang="nl-NL"/>
-              <a:t>Confidential</a:t>
-            </a:r>
-          </a:p>
-        </p:txBody>
-      </p:sp>
-      <p:sp>
-        <p:nvSpPr>
           <p:cNvPr id="4" name="Tijdelijke aanduiding voor dianummer 3">
             <a:extLst>
               <a:ext uri="{FF2B5EF4-FFF2-40B4-BE49-F238E27FC236}">
@@ -12954,6 +13098,96 @@
           </a:prstGeom>
         </p:spPr>
       </p:pic>
+      <p:sp>
+        <p:nvSpPr>
+          <p:cNvPr id="8" name="Footer Placeholder 5">
+            <a:extLst>
+              <a:ext uri="{FF2B5EF4-FFF2-40B4-BE49-F238E27FC236}">
+                <a16:creationId xmlns:a16="http://schemas.microsoft.com/office/drawing/2014/main" id="{88F0C024-5ADF-C9D1-7E6D-DA7E7F352B1B}"/>
+              </a:ext>
+            </a:extLst>
+          </p:cNvPr>
+          <p:cNvSpPr>
+            <a:spLocks noGrp="1"/>
+          </p:cNvSpPr>
+          <p:nvPr>
+            <p:ph type="ftr" sz="quarter" idx="3"/>
+          </p:nvPr>
+        </p:nvSpPr>
+        <p:spPr>
+          <a:xfrm>
+            <a:off x="194555" y="6388767"/>
+            <a:ext cx="1763922" cy="370422"/>
+          </a:xfrm>
+          <a:prstGeom prst="rect">
+            <a:avLst/>
+          </a:prstGeom>
+          <a:noFill/>
+          <a:ln>
+            <a:noFill/>
+          </a:ln>
+        </p:spPr>
+        <p:style>
+          <a:lnRef idx="2">
+            <a:schemeClr val="accent1">
+              <a:shade val="50000"/>
+            </a:schemeClr>
+          </a:lnRef>
+          <a:fillRef idx="1">
+            <a:schemeClr val="accent1"/>
+          </a:fillRef>
+          <a:effectRef idx="0">
+            <a:schemeClr val="accent1"/>
+          </a:effectRef>
+          <a:fontRef idx="minor">
+            <a:schemeClr val="lt1"/>
+          </a:fontRef>
+        </p:style>
+        <p:txBody>
+          <a:bodyPr wrap="none" lIns="90000" tIns="46800" rIns="90000" rtlCol="0" anchor="ctr">
+            <a:spAutoFit/>
+          </a:bodyPr>
+          <a:lstStyle>
+            <a:lvl1pPr>
+              <a:defRPr lang="en-US" sz="900" b="0" cap="none" spc="0" baseline="0" dirty="0">
+                <a:solidFill>
+                  <a:srgbClr val="0B54E6"/>
+                </a:solidFill>
+                <a:latin typeface="Azeret Mono" pitchFamily="2" charset="77"/>
+                <a:cs typeface="Azeret Mono" pitchFamily="2" charset="77"/>
+              </a:defRPr>
+            </a:lvl1pPr>
+          </a:lstStyle>
+          <a:p>
+            <a:r>
+              <a:rPr lang="nl-NL" dirty="0" err="1"/>
+              <a:t>Generated</a:t>
+            </a:r>
+            <a:r>
+              <a:rPr lang="nl-NL" dirty="0"/>
+              <a:t> </a:t>
+            </a:r>
+            <a:r>
+              <a:rPr lang="nl-NL" dirty="0" err="1"/>
+              <a:t>with</a:t>
+            </a:r>
+            <a:r>
+              <a:rPr lang="nl-NL" dirty="0"/>
+              <a:t> Sigrid</a:t>
+            </a:r>
+          </a:p>
+          <a:p>
+            <a:r>
+              <a:rPr lang="nl-NL" dirty="0" err="1"/>
+              <a:t>for</a:t>
+            </a:r>
+            <a:r>
+              <a:rPr lang="nl-NL" dirty="0"/>
+              <a:t> CUSTOMER_NAME</a:t>
+            </a:r>
+          </a:p>
+        </p:txBody>
+      </p:sp>
     </p:spTree>
     <p:extLst>
       <p:ext uri="{BB962C8B-B14F-4D97-AF65-F5344CB8AC3E}">
@@ -13303,34 +13537,6 @@
       </p:sp>
       <p:sp>
         <p:nvSpPr>
-          <p:cNvPr id="5" name="Tijdelijke aanduiding voor voettekst 4">
-            <a:extLst>
-              <a:ext uri="{FF2B5EF4-FFF2-40B4-BE49-F238E27FC236}">
-                <a16:creationId xmlns:a16="http://schemas.microsoft.com/office/drawing/2014/main" id="{FD55FCDC-BB83-7114-0C6B-0AD338AD5B06}"/>
-              </a:ext>
-            </a:extLst>
-          </p:cNvPr>
-          <p:cNvSpPr>
-            <a:spLocks noGrp="1"/>
-          </p:cNvSpPr>
-          <p:nvPr>
-            <p:ph type="ftr" sz="quarter" idx="21"/>
-          </p:nvPr>
-        </p:nvSpPr>
-        <p:spPr/>
-        <p:txBody>
-          <a:bodyPr/>
-          <a:lstStyle/>
-          <a:p>
-            <a:r>
-              <a:rPr lang="nl-NL"/>
-              <a:t>Confidential</a:t>
-            </a:r>
-          </a:p>
-        </p:txBody>
-      </p:sp>
-      <p:sp>
-        <p:nvSpPr>
           <p:cNvPr id="6" name="Tijdelijke aanduiding voor dianummer 5">
             <a:extLst>
               <a:ext uri="{FF2B5EF4-FFF2-40B4-BE49-F238E27FC236}">
@@ -13356,6 +13562,96 @@
               <a:t>‹#›</a:t>
             </a:fld>
             <a:endParaRPr lang="nl-NL"/>
+          </a:p>
+        </p:txBody>
+      </p:sp>
+      <p:sp>
+        <p:nvSpPr>
+          <p:cNvPr id="2" name="Footer Placeholder 5">
+            <a:extLst>
+              <a:ext uri="{FF2B5EF4-FFF2-40B4-BE49-F238E27FC236}">
+                <a16:creationId xmlns:a16="http://schemas.microsoft.com/office/drawing/2014/main" id="{3D30C1FB-591F-4EC1-DBFA-7F1A47CAB3AF}"/>
+              </a:ext>
+            </a:extLst>
+          </p:cNvPr>
+          <p:cNvSpPr>
+            <a:spLocks noGrp="1"/>
+          </p:cNvSpPr>
+          <p:nvPr>
+            <p:ph type="ftr" sz="quarter" idx="3"/>
+          </p:nvPr>
+        </p:nvSpPr>
+        <p:spPr>
+          <a:xfrm>
+            <a:off x="194555" y="6388767"/>
+            <a:ext cx="1763922" cy="370422"/>
+          </a:xfrm>
+          <a:prstGeom prst="rect">
+            <a:avLst/>
+          </a:prstGeom>
+          <a:noFill/>
+          <a:ln>
+            <a:noFill/>
+          </a:ln>
+        </p:spPr>
+        <p:style>
+          <a:lnRef idx="2">
+            <a:schemeClr val="accent1">
+              <a:shade val="50000"/>
+            </a:schemeClr>
+          </a:lnRef>
+          <a:fillRef idx="1">
+            <a:schemeClr val="accent1"/>
+          </a:fillRef>
+          <a:effectRef idx="0">
+            <a:schemeClr val="accent1"/>
+          </a:effectRef>
+          <a:fontRef idx="minor">
+            <a:schemeClr val="lt1"/>
+          </a:fontRef>
+        </p:style>
+        <p:txBody>
+          <a:bodyPr wrap="none" lIns="90000" tIns="46800" rIns="90000" rtlCol="0" anchor="ctr">
+            <a:spAutoFit/>
+          </a:bodyPr>
+          <a:lstStyle>
+            <a:lvl1pPr>
+              <a:defRPr lang="en-US" sz="900" b="0" cap="none" spc="0" baseline="0" dirty="0">
+                <a:solidFill>
+                  <a:srgbClr val="0B54E6"/>
+                </a:solidFill>
+                <a:latin typeface="Azeret Mono" pitchFamily="2" charset="77"/>
+                <a:cs typeface="Azeret Mono" pitchFamily="2" charset="77"/>
+              </a:defRPr>
+            </a:lvl1pPr>
+          </a:lstStyle>
+          <a:p>
+            <a:r>
+              <a:rPr lang="nl-NL" dirty="0" err="1"/>
+              <a:t>Generated</a:t>
+            </a:r>
+            <a:r>
+              <a:rPr lang="nl-NL" dirty="0"/>
+              <a:t> </a:t>
+            </a:r>
+            <a:r>
+              <a:rPr lang="nl-NL" dirty="0" err="1"/>
+              <a:t>with</a:t>
+            </a:r>
+            <a:r>
+              <a:rPr lang="nl-NL" dirty="0"/>
+              <a:t> Sigrid</a:t>
+            </a:r>
+          </a:p>
+          <a:p>
+            <a:r>
+              <a:rPr lang="nl-NL" dirty="0" err="1"/>
+              <a:t>for</a:t>
+            </a:r>
+            <a:r>
+              <a:rPr lang="nl-NL" dirty="0"/>
+              <a:t> CUSTOMER_NAME</a:t>
+            </a:r>
           </a:p>
         </p:txBody>
       </p:sp>
@@ -13496,34 +13792,6 @@
       </p:sp>
       <p:sp>
         <p:nvSpPr>
-          <p:cNvPr id="2" name="Tijdelijke aanduiding voor voettekst 1">
-            <a:extLst>
-              <a:ext uri="{FF2B5EF4-FFF2-40B4-BE49-F238E27FC236}">
-                <a16:creationId xmlns:a16="http://schemas.microsoft.com/office/drawing/2014/main" id="{E3DFEFF2-832D-3790-5F9D-5A5E200E718B}"/>
-              </a:ext>
-            </a:extLst>
-          </p:cNvPr>
-          <p:cNvSpPr>
-            <a:spLocks noGrp="1"/>
-          </p:cNvSpPr>
-          <p:nvPr>
-            <p:ph type="ftr" sz="quarter" idx="14"/>
-          </p:nvPr>
-        </p:nvSpPr>
-        <p:spPr/>
-        <p:txBody>
-          <a:bodyPr/>
-          <a:lstStyle/>
-          <a:p>
-            <a:r>
-              <a:rPr lang="nl-NL"/>
-              <a:t>Confidential</a:t>
-            </a:r>
-          </a:p>
-        </p:txBody>
-      </p:sp>
-      <p:sp>
-        <p:nvSpPr>
           <p:cNvPr id="3" name="Tijdelijke aanduiding voor dianummer 2">
             <a:extLst>
               <a:ext uri="{FF2B5EF4-FFF2-40B4-BE49-F238E27FC236}">
@@ -13606,6 +13874,64 @@
               <a:t>)</a:t>
             </a:r>
             <a:endParaRPr lang="en-US" dirty="0"/>
+          </a:p>
+        </p:txBody>
+      </p:sp>
+      <p:sp>
+        <p:nvSpPr>
+          <p:cNvPr id="10" name="Tijdelijke aanduiding voor voettekst 1">
+            <a:extLst>
+              <a:ext uri="{FF2B5EF4-FFF2-40B4-BE49-F238E27FC236}">
+                <a16:creationId xmlns:a16="http://schemas.microsoft.com/office/drawing/2014/main" id="{1550FF2B-9973-D8E2-1D04-7D52FC7B4451}"/>
+              </a:ext>
+            </a:extLst>
+          </p:cNvPr>
+          <p:cNvSpPr>
+            <a:spLocks noGrp="1"/>
+          </p:cNvSpPr>
+          <p:nvPr>
+            <p:ph type="ftr" sz="quarter" idx="14"/>
+          </p:nvPr>
+        </p:nvSpPr>
+        <p:spPr>
+          <a:xfrm>
+            <a:off x="194555" y="6387115"/>
+            <a:ext cx="1763922" cy="370422"/>
+          </a:xfrm>
+          <a:prstGeom prst="rect">
+            <a:avLst/>
+          </a:prstGeom>
+        </p:spPr>
+        <p:txBody>
+          <a:bodyPr/>
+          <a:lstStyle/>
+          <a:p>
+            <a:r>
+              <a:rPr lang="nl-NL" dirty="0" err="1"/>
+              <a:t>Generated</a:t>
+            </a:r>
+            <a:r>
+              <a:rPr lang="nl-NL" dirty="0"/>
+              <a:t> </a:t>
+            </a:r>
+            <a:r>
+              <a:rPr lang="nl-NL" dirty="0" err="1"/>
+              <a:t>with</a:t>
+            </a:r>
+            <a:r>
+              <a:rPr lang="nl-NL" dirty="0"/>
+              <a:t> Sigrid</a:t>
+            </a:r>
+          </a:p>
+          <a:p>
+            <a:r>
+              <a:rPr lang="nl-NL" dirty="0" err="1"/>
+              <a:t>for</a:t>
+            </a:r>
+            <a:r>
+              <a:rPr lang="nl-NL" dirty="0"/>
+              <a:t> CUSTOMER_NAME</a:t>
+            </a:r>
           </a:p>
         </p:txBody>
       </p:sp>
@@ -14429,74 +14755,6 @@
           </a:p>
         </p:txBody>
       </p:sp>
-      <p:sp>
-        <p:nvSpPr>
-          <p:cNvPr id="6" name="Footer Placeholder 5">
-            <a:extLst>
-              <a:ext uri="{FF2B5EF4-FFF2-40B4-BE49-F238E27FC236}">
-                <a16:creationId xmlns:a16="http://schemas.microsoft.com/office/drawing/2014/main" id="{DDB6C8C7-4A4D-FB4E-9345-9292EFEF7610}"/>
-              </a:ext>
-            </a:extLst>
-          </p:cNvPr>
-          <p:cNvSpPr>
-            <a:spLocks noGrp="1"/>
-          </p:cNvSpPr>
-          <p:nvPr>
-            <p:ph type="ftr" sz="quarter" idx="3"/>
-          </p:nvPr>
-        </p:nvSpPr>
-        <p:spPr>
-          <a:xfrm>
-            <a:off x="849600" y="6462000"/>
-            <a:ext cx="1085851" cy="231923"/>
-          </a:xfrm>
-          <a:prstGeom prst="rect">
-            <a:avLst/>
-          </a:prstGeom>
-          <a:noFill/>
-          <a:ln>
-            <a:noFill/>
-          </a:ln>
-        </p:spPr>
-        <p:style>
-          <a:lnRef idx="2">
-            <a:schemeClr val="accent1">
-              <a:shade val="50000"/>
-            </a:schemeClr>
-          </a:lnRef>
-          <a:fillRef idx="1">
-            <a:schemeClr val="accent1"/>
-          </a:fillRef>
-          <a:effectRef idx="0">
-            <a:schemeClr val="accent1"/>
-          </a:effectRef>
-          <a:fontRef idx="minor">
-            <a:schemeClr val="lt1"/>
-          </a:fontRef>
-        </p:style>
-        <p:txBody>
-          <a:bodyPr wrap="none" lIns="90000" tIns="46800" rIns="90000" rtlCol="0" anchor="ctr">
-            <a:spAutoFit/>
-          </a:bodyPr>
-          <a:lstStyle>
-            <a:lvl1pPr>
-              <a:defRPr lang="en-US" sz="900" b="0" cap="none" spc="0" baseline="0" dirty="0">
-                <a:solidFill>
-                  <a:srgbClr val="0B54E6"/>
-                </a:solidFill>
-                <a:latin typeface="Azeret Mono" pitchFamily="2" charset="77"/>
-                <a:cs typeface="Azeret Mono" pitchFamily="2" charset="77"/>
-              </a:defRPr>
-            </a:lvl1pPr>
-          </a:lstStyle>
-          <a:p>
-            <a:r>
-              <a:rPr lang="nl-NL"/>
-              <a:t>Confidential</a:t>
-            </a:r>
-          </a:p>
-        </p:txBody>
-      </p:sp>
       <p:pic>
         <p:nvPicPr>
           <p:cNvPr id="157" name="Afbeelding 156">
@@ -14646,6 +14904,96 @@
               <a:t>‹#›</a:t>
             </a:fld>
             <a:endParaRPr lang="nl-NL"/>
+          </a:p>
+        </p:txBody>
+      </p:sp>
+      <p:sp>
+        <p:nvSpPr>
+          <p:cNvPr id="13" name="Footer Placeholder 5">
+            <a:extLst>
+              <a:ext uri="{FF2B5EF4-FFF2-40B4-BE49-F238E27FC236}">
+                <a16:creationId xmlns:a16="http://schemas.microsoft.com/office/drawing/2014/main" id="{8F0D1AEF-DE47-8489-6A2A-611156540ED5}"/>
+              </a:ext>
+            </a:extLst>
+          </p:cNvPr>
+          <p:cNvSpPr>
+            <a:spLocks noGrp="1"/>
+          </p:cNvSpPr>
+          <p:nvPr>
+            <p:ph type="ftr" sz="quarter" idx="3"/>
+          </p:nvPr>
+        </p:nvSpPr>
+        <p:spPr>
+          <a:xfrm>
+            <a:off x="194555" y="6383072"/>
+            <a:ext cx="1763922" cy="370422"/>
+          </a:xfrm>
+          <a:prstGeom prst="rect">
+            <a:avLst/>
+          </a:prstGeom>
+          <a:noFill/>
+          <a:ln>
+            <a:noFill/>
+          </a:ln>
+        </p:spPr>
+        <p:style>
+          <a:lnRef idx="2">
+            <a:schemeClr val="accent1">
+              <a:shade val="50000"/>
+            </a:schemeClr>
+          </a:lnRef>
+          <a:fillRef idx="1">
+            <a:schemeClr val="accent1"/>
+          </a:fillRef>
+          <a:effectRef idx="0">
+            <a:schemeClr val="accent1"/>
+          </a:effectRef>
+          <a:fontRef idx="minor">
+            <a:schemeClr val="lt1"/>
+          </a:fontRef>
+        </p:style>
+        <p:txBody>
+          <a:bodyPr wrap="none" lIns="90000" tIns="46800" rIns="90000" rtlCol="0" anchor="ctr">
+            <a:spAutoFit/>
+          </a:bodyPr>
+          <a:lstStyle>
+            <a:lvl1pPr>
+              <a:defRPr lang="en-US" sz="900" b="0" cap="none" spc="0" baseline="0" dirty="0">
+                <a:solidFill>
+                  <a:srgbClr val="0B54E6"/>
+                </a:solidFill>
+                <a:latin typeface="Azeret Mono" pitchFamily="2" charset="77"/>
+                <a:cs typeface="Azeret Mono" pitchFamily="2" charset="77"/>
+              </a:defRPr>
+            </a:lvl1pPr>
+          </a:lstStyle>
+          <a:p>
+            <a:r>
+              <a:rPr lang="nl-NL" dirty="0" err="1"/>
+              <a:t>Generated</a:t>
+            </a:r>
+            <a:r>
+              <a:rPr lang="nl-NL" dirty="0"/>
+              <a:t> </a:t>
+            </a:r>
+            <a:r>
+              <a:rPr lang="nl-NL" dirty="0" err="1"/>
+              <a:t>with</a:t>
+            </a:r>
+            <a:r>
+              <a:rPr lang="nl-NL" dirty="0"/>
+              <a:t> Sigrid</a:t>
+            </a:r>
+          </a:p>
+          <a:p>
+            <a:r>
+              <a:rPr lang="nl-NL" dirty="0" err="1"/>
+              <a:t>for</a:t>
+            </a:r>
+            <a:r>
+              <a:rPr lang="nl-NL" dirty="0"/>
+              <a:t> CUSTOMER_NAME</a:t>
+            </a:r>
           </a:p>
         </p:txBody>
       </p:sp>
@@ -19320,8 +19668,8 @@
         </p:nvSpPr>
         <p:spPr>
           <a:xfrm>
-            <a:off x="849600" y="6462000"/>
-            <a:ext cx="1085851" cy="231923"/>
+            <a:off x="194555" y="6382737"/>
+            <a:ext cx="1763922" cy="370422"/>
           </a:xfrm>
           <a:prstGeom prst="rect">
             <a:avLst/>
@@ -19364,8 +19712,30 @@
           </a:lstStyle>
           <a:p>
             <a:r>
-              <a:rPr lang="nl-NL"/>
-              <a:t>Confidential</a:t>
+              <a:rPr lang="nl-NL" dirty="0" err="1"/>
+              <a:t>Generated</a:t>
+            </a:r>
+            <a:r>
+              <a:rPr lang="nl-NL" dirty="0"/>
+              <a:t> </a:t>
+            </a:r>
+            <a:r>
+              <a:rPr lang="nl-NL" dirty="0" err="1"/>
+              <a:t>with</a:t>
+            </a:r>
+            <a:r>
+              <a:rPr lang="nl-NL" dirty="0"/>
+              <a:t> Sigrid</a:t>
+            </a:r>
+          </a:p>
+          <a:p>
+            <a:r>
+              <a:rPr lang="nl-NL" dirty="0" err="1"/>
+              <a:t>for</a:t>
+            </a:r>
+            <a:r>
+              <a:rPr lang="nl-NL" dirty="0"/>
+              <a:t> CUSTOMER_NAME</a:t>
             </a:r>
           </a:p>
         </p:txBody>
@@ -25436,6 +25806,70 @@
           </a:p>
         </p:txBody>
       </p:sp>
+      <p:sp>
+        <p:nvSpPr>
+          <p:cNvPr id="5" name="Tijdelijke aanduiding voor voettekst 10">
+            <a:extLst>
+              <a:ext uri="{FF2B5EF4-FFF2-40B4-BE49-F238E27FC236}">
+                <a16:creationId xmlns:a16="http://schemas.microsoft.com/office/drawing/2014/main" id="{03AAA943-ED6F-B90F-27FC-E22483CED91E}"/>
+              </a:ext>
+            </a:extLst>
+          </p:cNvPr>
+          <p:cNvSpPr>
+            <a:spLocks noGrp="1"/>
+          </p:cNvSpPr>
+          <p:nvPr>
+            <p:ph type="ftr" sz="quarter" idx="44"/>
+          </p:nvPr>
+        </p:nvSpPr>
+        <p:spPr>
+          <a:xfrm>
+            <a:off x="9854418" y="6429600"/>
+            <a:ext cx="1712382" cy="237600"/>
+          </a:xfrm>
+          <a:prstGeom prst="rect">
+            <a:avLst/>
+          </a:prstGeom>
+        </p:spPr>
+        <p:txBody>
+          <a:bodyPr lIns="251999" rIns="180000" bIns="46800">
+            <a:noAutofit/>
+          </a:bodyPr>
+          <a:lstStyle>
+            <a:lvl1pPr algn="r">
+              <a:defRPr sz="1000">
+                <a:solidFill>
+                  <a:srgbClr val="FFFFFF"/>
+                </a:solidFill>
+              </a:defRPr>
+            </a:lvl1pPr>
+          </a:lstStyle>
+          <a:p>
+            <a:r>
+              <a:rPr lang="nl-NL" dirty="0" err="1"/>
+              <a:t>Generated</a:t>
+            </a:r>
+            <a:r>
+              <a:rPr lang="nl-NL" dirty="0"/>
+              <a:t> </a:t>
+            </a:r>
+            <a:r>
+              <a:rPr lang="nl-NL" dirty="0" err="1"/>
+              <a:t>with</a:t>
+            </a:r>
+            <a:r>
+              <a:rPr lang="nl-NL" dirty="0"/>
+              <a:t> Sigrid</a:t>
+            </a:r>
+          </a:p>
+          <a:p>
+            <a:r>
+              <a:rPr lang="nl-NL" dirty="0" err="1"/>
+              <a:t>for Reportgeneratordemo</a:t>
+            </a:r>
+          </a:p>
+        </p:txBody>
+      </p:sp>
     </p:spTree>
     <p:extLst>
       <p:ext uri="{BB962C8B-B14F-4D97-AF65-F5344CB8AC3E}">
@@ -26130,6 +26564,92 @@
           </p:txBody>
         </p:sp>
       </p:grpSp>
+      <p:sp>
+        <p:nvSpPr>
+          <p:cNvPr id="6" name="Footer Placeholder 5">
+            <a:extLst>
+              <a:ext uri="{FF2B5EF4-FFF2-40B4-BE49-F238E27FC236}">
+                <a16:creationId xmlns:a16="http://schemas.microsoft.com/office/drawing/2014/main" id="{1EF2CB95-9458-0410-67B8-D0010F7323BD}"/>
+              </a:ext>
+            </a:extLst>
+          </p:cNvPr>
+          <p:cNvSpPr>
+            <a:spLocks noGrp="1"/>
+          </p:cNvSpPr>
+          <p:nvPr>
+            <p:ph type="ftr" sz="quarter" idx="3"/>
+          </p:nvPr>
+        </p:nvSpPr>
+        <p:spPr>
+          <a:xfrm>
+            <a:off x="194555" y="6388767"/>
+            <a:ext cx="1763922" cy="370422"/>
+          </a:xfrm>
+          <a:prstGeom prst="rect">
+            <a:avLst/>
+          </a:prstGeom>
+          <a:noFill/>
+          <a:ln>
+            <a:noFill/>
+          </a:ln>
+        </p:spPr>
+        <p:style>
+          <a:lnRef idx="2">
+            <a:schemeClr val="accent1">
+              <a:shade val="50000"/>
+            </a:schemeClr>
+          </a:lnRef>
+          <a:fillRef idx="1">
+            <a:schemeClr val="accent1"/>
+          </a:fillRef>
+          <a:effectRef idx="0">
+            <a:schemeClr val="accent1"/>
+          </a:effectRef>
+          <a:fontRef idx="minor">
+            <a:schemeClr val="lt1"/>
+          </a:fontRef>
+        </p:style>
+        <p:txBody>
+          <a:bodyPr wrap="none" lIns="90000" tIns="46800" rIns="90000" rtlCol="0" anchor="ctr">
+            <a:spAutoFit/>
+          </a:bodyPr>
+          <a:lstStyle>
+            <a:lvl1pPr>
+              <a:defRPr lang="en-US" sz="900" b="0" cap="none" spc="0" baseline="0" dirty="0">
+                <a:solidFill>
+                  <a:schemeClr val="bg1"/>
+                </a:solidFill>
+                <a:latin typeface="Azeret Mono" pitchFamily="2" charset="77"/>
+                <a:cs typeface="Azeret Mono" pitchFamily="2" charset="77"/>
+              </a:defRPr>
+            </a:lvl1pPr>
+          </a:lstStyle>
+          <a:p>
+            <a:r>
+              <a:rPr lang="nl-NL" dirty="0" err="1"/>
+              <a:t>Generated</a:t>
+            </a:r>
+            <a:r>
+              <a:rPr lang="nl-NL" dirty="0"/>
+              <a:t> </a:t>
+            </a:r>
+            <a:r>
+              <a:rPr lang="nl-NL" dirty="0" err="1"/>
+              <a:t>with</a:t>
+            </a:r>
+            <a:r>
+              <a:rPr lang="nl-NL" dirty="0"/>
+              <a:t> Sigrid</a:t>
+            </a:r>
+          </a:p>
+          <a:p>
+            <a:r>
+              <a:rPr lang="nl-NL" dirty="0" err="1"/>
+              <a:t>for Reportgeneratordemo</a:t>
+            </a:r>
+          </a:p>
+        </p:txBody>
+      </p:sp>
     </p:spTree>
     <p:extLst>
       <p:ext uri="{BB962C8B-B14F-4D97-AF65-F5344CB8AC3E}">
@@ -27263,6 +27783,92 @@
           </a:p>
         </p:txBody>
       </p:sp>
+      <p:sp>
+        <p:nvSpPr>
+          <p:cNvPr id="3" name="Footer Placeholder 5">
+            <a:extLst>
+              <a:ext uri="{FF2B5EF4-FFF2-40B4-BE49-F238E27FC236}">
+                <a16:creationId xmlns:a16="http://schemas.microsoft.com/office/drawing/2014/main" id="{82359267-D9DF-5DAD-4FF7-F4F7A208FD08}"/>
+              </a:ext>
+            </a:extLst>
+          </p:cNvPr>
+          <p:cNvSpPr>
+            <a:spLocks noGrp="1"/>
+          </p:cNvSpPr>
+          <p:nvPr>
+            <p:ph type="ftr" sz="quarter" idx="3"/>
+          </p:nvPr>
+        </p:nvSpPr>
+        <p:spPr>
+          <a:xfrm>
+            <a:off x="194555" y="6383072"/>
+            <a:ext cx="1763922" cy="370422"/>
+          </a:xfrm>
+          <a:prstGeom prst="rect">
+            <a:avLst/>
+          </a:prstGeom>
+          <a:noFill/>
+          <a:ln>
+            <a:noFill/>
+          </a:ln>
+        </p:spPr>
+        <p:style>
+          <a:lnRef idx="2">
+            <a:schemeClr val="accent1">
+              <a:shade val="50000"/>
+            </a:schemeClr>
+          </a:lnRef>
+          <a:fillRef idx="1">
+            <a:schemeClr val="accent1"/>
+          </a:fillRef>
+          <a:effectRef idx="0">
+            <a:schemeClr val="accent1"/>
+          </a:effectRef>
+          <a:fontRef idx="minor">
+            <a:schemeClr val="lt1"/>
+          </a:fontRef>
+        </p:style>
+        <p:txBody>
+          <a:bodyPr wrap="none" lIns="90000" tIns="46800" rIns="90000" rtlCol="0" anchor="ctr">
+            <a:spAutoFit/>
+          </a:bodyPr>
+          <a:lstStyle>
+            <a:lvl1pPr>
+              <a:defRPr lang="en-US" sz="900" b="0" cap="none" spc="0" baseline="0" dirty="0">
+                <a:solidFill>
+                  <a:srgbClr val="0B54E6"/>
+                </a:solidFill>
+                <a:latin typeface="Azeret Mono" pitchFamily="2" charset="77"/>
+                <a:cs typeface="Azeret Mono" pitchFamily="2" charset="77"/>
+              </a:defRPr>
+            </a:lvl1pPr>
+          </a:lstStyle>
+          <a:p>
+            <a:r>
+              <a:rPr lang="nl-NL" dirty="0" err="1"/>
+              <a:t>Generated</a:t>
+            </a:r>
+            <a:r>
+              <a:rPr lang="nl-NL" dirty="0"/>
+              <a:t> </a:t>
+            </a:r>
+            <a:r>
+              <a:rPr lang="nl-NL" dirty="0" err="1"/>
+              <a:t>with</a:t>
+            </a:r>
+            <a:r>
+              <a:rPr lang="nl-NL" dirty="0"/>
+              <a:t> Sigrid</a:t>
+            </a:r>
+          </a:p>
+          <a:p>
+            <a:r>
+              <a:rPr lang="nl-NL" dirty="0" err="1"/>
+              <a:t>for Reportgeneratordemo</a:t>
+            </a:r>
+          </a:p>
+        </p:txBody>
+      </p:sp>
       <p:pic>
         <p:nvPicPr>
           <p:cNvPr id="45" name="Picture 44" descr="image.png"/>
@@ -28021,6 +28627,60 @@
           </p:txBody>
         </p:sp>
       </p:grpSp>
+      <p:sp>
+        <p:nvSpPr>
+          <p:cNvPr id="5" name="Tijdelijke aanduiding voor voettekst 1">
+            <a:extLst>
+              <a:ext uri="{FF2B5EF4-FFF2-40B4-BE49-F238E27FC236}">
+                <a16:creationId xmlns:a16="http://schemas.microsoft.com/office/drawing/2014/main" id="{8BBB7104-DB0E-37E3-6567-BE521D1AD431}"/>
+              </a:ext>
+            </a:extLst>
+          </p:cNvPr>
+          <p:cNvSpPr>
+            <a:spLocks noGrp="1"/>
+          </p:cNvSpPr>
+          <p:nvPr>
+            <p:ph type="ftr" sz="quarter" idx="14"/>
+          </p:nvPr>
+        </p:nvSpPr>
+        <p:spPr>
+          <a:xfrm>
+            <a:off x="194555" y="6387115"/>
+            <a:ext cx="1763922" cy="370422"/>
+          </a:xfrm>
+          <a:prstGeom prst="rect">
+            <a:avLst/>
+          </a:prstGeom>
+        </p:spPr>
+        <p:txBody>
+          <a:bodyPr/>
+          <a:lstStyle/>
+          <a:p>
+            <a:r>
+              <a:rPr lang="nl-NL" dirty="0" err="1"/>
+              <a:t>Generated</a:t>
+            </a:r>
+            <a:r>
+              <a:rPr lang="nl-NL" dirty="0"/>
+              <a:t> </a:t>
+            </a:r>
+            <a:r>
+              <a:rPr lang="nl-NL" dirty="0" err="1"/>
+              <a:t>with</a:t>
+            </a:r>
+            <a:r>
+              <a:rPr lang="nl-NL" dirty="0"/>
+              <a:t> Sigrid</a:t>
+            </a:r>
+          </a:p>
+          <a:p>
+            <a:r>
+              <a:rPr lang="nl-NL" dirty="0" err="1"/>
+              <a:t>for Reportgeneratordemo</a:t>
+            </a:r>
+          </a:p>
+        </p:txBody>
+      </p:sp>
     </p:spTree>
     <p:extLst>
       <p:ext uri="{BB962C8B-B14F-4D97-AF65-F5344CB8AC3E}">
@@ -29102,6 +29762,92 @@
           </a:p>
         </p:txBody>
       </p:sp>
+      <p:sp>
+        <p:nvSpPr>
+          <p:cNvPr id="4" name="Footer Placeholder 5">
+            <a:extLst>
+              <a:ext uri="{FF2B5EF4-FFF2-40B4-BE49-F238E27FC236}">
+                <a16:creationId xmlns:a16="http://schemas.microsoft.com/office/drawing/2014/main" id="{0476B414-9DA5-568A-1156-7476C19E0ADD}"/>
+              </a:ext>
+            </a:extLst>
+          </p:cNvPr>
+          <p:cNvSpPr>
+            <a:spLocks noGrp="1"/>
+          </p:cNvSpPr>
+          <p:nvPr>
+            <p:ph type="ftr" sz="quarter" idx="3"/>
+          </p:nvPr>
+        </p:nvSpPr>
+        <p:spPr>
+          <a:xfrm>
+            <a:off x="194555" y="6383072"/>
+            <a:ext cx="1763922" cy="370422"/>
+          </a:xfrm>
+          <a:prstGeom prst="rect">
+            <a:avLst/>
+          </a:prstGeom>
+          <a:noFill/>
+          <a:ln>
+            <a:noFill/>
+          </a:ln>
+        </p:spPr>
+        <p:style>
+          <a:lnRef idx="2">
+            <a:schemeClr val="accent1">
+              <a:shade val="50000"/>
+            </a:schemeClr>
+          </a:lnRef>
+          <a:fillRef idx="1">
+            <a:schemeClr val="accent1"/>
+          </a:fillRef>
+          <a:effectRef idx="0">
+            <a:schemeClr val="accent1"/>
+          </a:effectRef>
+          <a:fontRef idx="minor">
+            <a:schemeClr val="lt1"/>
+          </a:fontRef>
+        </p:style>
+        <p:txBody>
+          <a:bodyPr wrap="none" lIns="90000" tIns="46800" rIns="90000" rtlCol="0" anchor="ctr">
+            <a:spAutoFit/>
+          </a:bodyPr>
+          <a:lstStyle>
+            <a:lvl1pPr>
+              <a:defRPr lang="en-US" sz="900" b="0" cap="none" spc="0" baseline="0" dirty="0">
+                <a:solidFill>
+                  <a:srgbClr val="0B54E6"/>
+                </a:solidFill>
+                <a:latin typeface="Azeret Mono" pitchFamily="2" charset="77"/>
+                <a:cs typeface="Azeret Mono" pitchFamily="2" charset="77"/>
+              </a:defRPr>
+            </a:lvl1pPr>
+          </a:lstStyle>
+          <a:p>
+            <a:r>
+              <a:rPr lang="nl-NL" dirty="0" err="1"/>
+              <a:t>Generated</a:t>
+            </a:r>
+            <a:r>
+              <a:rPr lang="nl-NL" dirty="0"/>
+              <a:t> </a:t>
+            </a:r>
+            <a:r>
+              <a:rPr lang="nl-NL" dirty="0" err="1"/>
+              <a:t>with</a:t>
+            </a:r>
+            <a:r>
+              <a:rPr lang="nl-NL" dirty="0"/>
+              <a:t> Sigrid</a:t>
+            </a:r>
+          </a:p>
+          <a:p>
+            <a:r>
+              <a:rPr lang="nl-NL" dirty="0" err="1"/>
+              <a:t>for Reportgeneratordemo</a:t>
+            </a:r>
+          </a:p>
+        </p:txBody>
+      </p:sp>
       <p:pic>
         <p:nvPicPr>
           <p:cNvPr id="47" name="Picture 46" descr="image.png"/>
@@ -30216,6 +30962,92 @@
           </a:p>
         </p:txBody>
       </p:sp>
+      <p:sp>
+        <p:nvSpPr>
+          <p:cNvPr id="4" name="Footer Placeholder 5">
+            <a:extLst>
+              <a:ext uri="{FF2B5EF4-FFF2-40B4-BE49-F238E27FC236}">
+                <a16:creationId xmlns:a16="http://schemas.microsoft.com/office/drawing/2014/main" id="{0A35FFDE-258C-B923-8BFA-686A042F4E14}"/>
+              </a:ext>
+            </a:extLst>
+          </p:cNvPr>
+          <p:cNvSpPr>
+            <a:spLocks noGrp="1"/>
+          </p:cNvSpPr>
+          <p:nvPr>
+            <p:ph type="ftr" sz="quarter" idx="3"/>
+          </p:nvPr>
+        </p:nvSpPr>
+        <p:spPr>
+          <a:xfrm>
+            <a:off x="194555" y="6383072"/>
+            <a:ext cx="1763922" cy="370422"/>
+          </a:xfrm>
+          <a:prstGeom prst="rect">
+            <a:avLst/>
+          </a:prstGeom>
+          <a:noFill/>
+          <a:ln>
+            <a:noFill/>
+          </a:ln>
+        </p:spPr>
+        <p:style>
+          <a:lnRef idx="2">
+            <a:schemeClr val="accent1">
+              <a:shade val="50000"/>
+            </a:schemeClr>
+          </a:lnRef>
+          <a:fillRef idx="1">
+            <a:schemeClr val="accent1"/>
+          </a:fillRef>
+          <a:effectRef idx="0">
+            <a:schemeClr val="accent1"/>
+          </a:effectRef>
+          <a:fontRef idx="minor">
+            <a:schemeClr val="lt1"/>
+          </a:fontRef>
+        </p:style>
+        <p:txBody>
+          <a:bodyPr wrap="none" lIns="90000" tIns="46800" rIns="90000" rtlCol="0" anchor="ctr">
+            <a:spAutoFit/>
+          </a:bodyPr>
+          <a:lstStyle>
+            <a:lvl1pPr>
+              <a:defRPr lang="en-US" sz="900" b="0" cap="none" spc="0" baseline="0" dirty="0">
+                <a:solidFill>
+                  <a:srgbClr val="0B54E6"/>
+                </a:solidFill>
+                <a:latin typeface="Azeret Mono" pitchFamily="2" charset="77"/>
+                <a:cs typeface="Azeret Mono" pitchFamily="2" charset="77"/>
+              </a:defRPr>
+            </a:lvl1pPr>
+          </a:lstStyle>
+          <a:p>
+            <a:r>
+              <a:rPr lang="nl-NL" dirty="0" err="1"/>
+              <a:t>Generated</a:t>
+            </a:r>
+            <a:r>
+              <a:rPr lang="nl-NL" dirty="0"/>
+              <a:t> </a:t>
+            </a:r>
+            <a:r>
+              <a:rPr lang="nl-NL" dirty="0" err="1"/>
+              <a:t>with</a:t>
+            </a:r>
+            <a:r>
+              <a:rPr lang="nl-NL" dirty="0"/>
+              <a:t> Sigrid</a:t>
+            </a:r>
+          </a:p>
+          <a:p>
+            <a:r>
+              <a:rPr lang="nl-NL" dirty="0" err="1"/>
+              <a:t>for Reportgeneratordemo</a:t>
+            </a:r>
+          </a:p>
+        </p:txBody>
+      </p:sp>
       <p:pic>
         <p:nvPicPr>
           <p:cNvPr id="45" name="Picture 44" descr="image.png"/>
@@ -31330,6 +32162,92 @@
           </a:p>
         </p:txBody>
       </p:sp>
+      <p:sp>
+        <p:nvSpPr>
+          <p:cNvPr id="4" name="Footer Placeholder 5">
+            <a:extLst>
+              <a:ext uri="{FF2B5EF4-FFF2-40B4-BE49-F238E27FC236}">
+                <a16:creationId xmlns:a16="http://schemas.microsoft.com/office/drawing/2014/main" id="{CD0BEDA0-A614-7EF6-D020-A50AEBD31A20}"/>
+              </a:ext>
+            </a:extLst>
+          </p:cNvPr>
+          <p:cNvSpPr>
+            <a:spLocks noGrp="1"/>
+          </p:cNvSpPr>
+          <p:nvPr>
+            <p:ph type="ftr" sz="quarter" idx="3"/>
+          </p:nvPr>
+        </p:nvSpPr>
+        <p:spPr>
+          <a:xfrm>
+            <a:off x="194555" y="6383072"/>
+            <a:ext cx="1763922" cy="370422"/>
+          </a:xfrm>
+          <a:prstGeom prst="rect">
+            <a:avLst/>
+          </a:prstGeom>
+          <a:noFill/>
+          <a:ln>
+            <a:noFill/>
+          </a:ln>
+        </p:spPr>
+        <p:style>
+          <a:lnRef idx="2">
+            <a:schemeClr val="accent1">
+              <a:shade val="50000"/>
+            </a:schemeClr>
+          </a:lnRef>
+          <a:fillRef idx="1">
+            <a:schemeClr val="accent1"/>
+          </a:fillRef>
+          <a:effectRef idx="0">
+            <a:schemeClr val="accent1"/>
+          </a:effectRef>
+          <a:fontRef idx="minor">
+            <a:schemeClr val="lt1"/>
+          </a:fontRef>
+        </p:style>
+        <p:txBody>
+          <a:bodyPr wrap="none" lIns="90000" tIns="46800" rIns="90000" rtlCol="0" anchor="ctr">
+            <a:spAutoFit/>
+          </a:bodyPr>
+          <a:lstStyle>
+            <a:lvl1pPr>
+              <a:defRPr lang="en-US" sz="900" b="0" cap="none" spc="0" baseline="0" dirty="0">
+                <a:solidFill>
+                  <a:srgbClr val="0B54E6"/>
+                </a:solidFill>
+                <a:latin typeface="Azeret Mono" pitchFamily="2" charset="77"/>
+                <a:cs typeface="Azeret Mono" pitchFamily="2" charset="77"/>
+              </a:defRPr>
+            </a:lvl1pPr>
+          </a:lstStyle>
+          <a:p>
+            <a:r>
+              <a:rPr lang="nl-NL" dirty="0" err="1"/>
+              <a:t>Generated</a:t>
+            </a:r>
+            <a:r>
+              <a:rPr lang="nl-NL" dirty="0"/>
+              <a:t> </a:t>
+            </a:r>
+            <a:r>
+              <a:rPr lang="nl-NL" dirty="0" err="1"/>
+              <a:t>with</a:t>
+            </a:r>
+            <a:r>
+              <a:rPr lang="nl-NL" dirty="0"/>
+              <a:t> Sigrid</a:t>
+            </a:r>
+          </a:p>
+          <a:p>
+            <a:r>
+              <a:rPr lang="nl-NL" dirty="0" err="1"/>
+              <a:t>for Reportgeneratordemo</a:t>
+            </a:r>
+          </a:p>
+        </p:txBody>
+      </p:sp>
       <p:pic>
         <p:nvPicPr>
           <p:cNvPr id="44" name="Picture 43" descr="image.png"/>
@@ -31776,6 +32694,92 @@
           </a:graphicData>
         </a:graphic>
       </p:graphicFrame>
+      <p:sp>
+        <p:nvSpPr>
+          <p:cNvPr id="5" name="Footer Placeholder 5">
+            <a:extLst>
+              <a:ext uri="{FF2B5EF4-FFF2-40B4-BE49-F238E27FC236}">
+                <a16:creationId xmlns:a16="http://schemas.microsoft.com/office/drawing/2014/main" id="{45FEEADB-79FE-B13B-140F-962C130AA548}"/>
+              </a:ext>
+            </a:extLst>
+          </p:cNvPr>
+          <p:cNvSpPr>
+            <a:spLocks noGrp="1"/>
+          </p:cNvSpPr>
+          <p:nvPr>
+            <p:ph type="ftr" sz="quarter" idx="3"/>
+          </p:nvPr>
+        </p:nvSpPr>
+        <p:spPr>
+          <a:xfrm>
+            <a:off x="194555" y="6383072"/>
+            <a:ext cx="1763922" cy="370422"/>
+          </a:xfrm>
+          <a:prstGeom prst="rect">
+            <a:avLst/>
+          </a:prstGeom>
+          <a:noFill/>
+          <a:ln>
+            <a:noFill/>
+          </a:ln>
+        </p:spPr>
+        <p:style>
+          <a:lnRef idx="2">
+            <a:schemeClr val="accent1">
+              <a:shade val="50000"/>
+            </a:schemeClr>
+          </a:lnRef>
+          <a:fillRef idx="1">
+            <a:schemeClr val="accent1"/>
+          </a:fillRef>
+          <a:effectRef idx="0">
+            <a:schemeClr val="accent1"/>
+          </a:effectRef>
+          <a:fontRef idx="minor">
+            <a:schemeClr val="lt1"/>
+          </a:fontRef>
+        </p:style>
+        <p:txBody>
+          <a:bodyPr wrap="none" lIns="90000" tIns="46800" rIns="90000" rtlCol="0" anchor="ctr">
+            <a:spAutoFit/>
+          </a:bodyPr>
+          <a:lstStyle>
+            <a:lvl1pPr>
+              <a:defRPr lang="en-US" sz="900" b="0" cap="none" spc="0" baseline="0" dirty="0">
+                <a:solidFill>
+                  <a:srgbClr val="0B54E6"/>
+                </a:solidFill>
+                <a:latin typeface="Azeret Mono" pitchFamily="2" charset="77"/>
+                <a:cs typeface="Azeret Mono" pitchFamily="2" charset="77"/>
+              </a:defRPr>
+            </a:lvl1pPr>
+          </a:lstStyle>
+          <a:p>
+            <a:r>
+              <a:rPr lang="nl-NL" dirty="0" err="1"/>
+              <a:t>Generated</a:t>
+            </a:r>
+            <a:r>
+              <a:rPr lang="nl-NL" dirty="0"/>
+              <a:t> </a:t>
+            </a:r>
+            <a:r>
+              <a:rPr lang="nl-NL" dirty="0" err="1"/>
+              <a:t>with</a:t>
+            </a:r>
+            <a:r>
+              <a:rPr lang="nl-NL" dirty="0"/>
+              <a:t> Sigrid</a:t>
+            </a:r>
+          </a:p>
+          <a:p>
+            <a:r>
+              <a:rPr lang="nl-NL" dirty="0" err="1"/>
+              <a:t>for Reportgeneratordemo</a:t>
+            </a:r>
+          </a:p>
+        </p:txBody>
+      </p:sp>
     </p:spTree>
     <p:extLst>
       <p:ext uri="{BB962C8B-B14F-4D97-AF65-F5344CB8AC3E}">
@@ -31833,9 +32837,10 @@
           <a:lstStyle/>
           <a:p>
             <a:r>
-              <a:rPr lang="en-GB" dirty="0"/>
+              <a:rPr lang="en-GB"/>
               <a:t>Portfolio trends – Security</a:t>
             </a:r>
+            <a:endParaRPr lang="en-GB" dirty="0"/>
           </a:p>
         </p:txBody>
       </p:sp>
@@ -31896,9 +32901,10 @@
           <a:lstStyle/>
           <a:p>
             <a:r>
-              <a:rPr lang="en-GB" dirty="0"/>
+              <a:rPr lang="en-GB"/>
               <a:t>Security ratings of the portfolio on 8 March 2026</a:t>
             </a:r>
+            <a:endParaRPr lang="en-GB" dirty="0"/>
           </a:p>
         </p:txBody>
       </p:sp>
@@ -32866,6 +33872,92 @@
           </a:p>
         </p:txBody>
       </p:sp>
+      <p:sp>
+        <p:nvSpPr>
+          <p:cNvPr id="10" name="Footer Placeholder 5">
+            <a:extLst>
+              <a:ext uri="{FF2B5EF4-FFF2-40B4-BE49-F238E27FC236}">
+                <a16:creationId xmlns:a16="http://schemas.microsoft.com/office/drawing/2014/main" id="{2FB0E97C-F974-577B-FB38-C4432CA701BB}"/>
+              </a:ext>
+            </a:extLst>
+          </p:cNvPr>
+          <p:cNvSpPr>
+            <a:spLocks noGrp="1"/>
+          </p:cNvSpPr>
+          <p:nvPr>
+            <p:ph type="ftr" sz="quarter" idx="3"/>
+          </p:nvPr>
+        </p:nvSpPr>
+        <p:spPr>
+          <a:xfrm>
+            <a:off x="194555" y="6383072"/>
+            <a:ext cx="1763922" cy="370422"/>
+          </a:xfrm>
+          <a:prstGeom prst="rect">
+            <a:avLst/>
+          </a:prstGeom>
+          <a:noFill/>
+          <a:ln>
+            <a:noFill/>
+          </a:ln>
+        </p:spPr>
+        <p:style>
+          <a:lnRef idx="2">
+            <a:schemeClr val="accent1">
+              <a:shade val="50000"/>
+            </a:schemeClr>
+          </a:lnRef>
+          <a:fillRef idx="1">
+            <a:schemeClr val="accent1"/>
+          </a:fillRef>
+          <a:effectRef idx="0">
+            <a:schemeClr val="accent1"/>
+          </a:effectRef>
+          <a:fontRef idx="minor">
+            <a:schemeClr val="lt1"/>
+          </a:fontRef>
+        </p:style>
+        <p:txBody>
+          <a:bodyPr wrap="none" lIns="90000" tIns="46800" rIns="90000" rtlCol="0" anchor="ctr">
+            <a:spAutoFit/>
+          </a:bodyPr>
+          <a:lstStyle>
+            <a:lvl1pPr>
+              <a:defRPr lang="en-US" sz="900" b="0" cap="none" spc="0" baseline="0" dirty="0">
+                <a:solidFill>
+                  <a:srgbClr val="0B54E6"/>
+                </a:solidFill>
+                <a:latin typeface="Azeret Mono" pitchFamily="2" charset="77"/>
+                <a:cs typeface="Azeret Mono" pitchFamily="2" charset="77"/>
+              </a:defRPr>
+            </a:lvl1pPr>
+          </a:lstStyle>
+          <a:p>
+            <a:r>
+              <a:rPr lang="nl-NL" dirty="0" err="1"/>
+              <a:t>Generated</a:t>
+            </a:r>
+            <a:r>
+              <a:rPr lang="nl-NL" dirty="0"/>
+              <a:t> </a:t>
+            </a:r>
+            <a:r>
+              <a:rPr lang="nl-NL" dirty="0" err="1"/>
+              <a:t>with</a:t>
+            </a:r>
+            <a:r>
+              <a:rPr lang="nl-NL" dirty="0"/>
+              <a:t> Sigrid</a:t>
+            </a:r>
+          </a:p>
+          <a:p>
+            <a:r>
+              <a:rPr lang="nl-NL" dirty="0" err="1"/>
+              <a:t>for Reportgeneratordemo</a:t>
+            </a:r>
+          </a:p>
+        </p:txBody>
+      </p:sp>
       <p:pic>
         <p:nvPicPr>
           <p:cNvPr id="45" name="Picture 44" descr="image.png"/>
@@ -33184,6 +34276,92 @@
           </a:p>
         </p:txBody>
       </p:sp>
+      <p:sp>
+        <p:nvSpPr>
+          <p:cNvPr id="2" name="Footer Placeholder 5">
+            <a:extLst>
+              <a:ext uri="{FF2B5EF4-FFF2-40B4-BE49-F238E27FC236}">
+                <a16:creationId xmlns:a16="http://schemas.microsoft.com/office/drawing/2014/main" id="{F1341C02-B5DA-9A6B-6630-1BC07730E8A1}"/>
+              </a:ext>
+            </a:extLst>
+          </p:cNvPr>
+          <p:cNvSpPr>
+            <a:spLocks noGrp="1"/>
+          </p:cNvSpPr>
+          <p:nvPr>
+            <p:ph type="ftr" sz="quarter" idx="3"/>
+          </p:nvPr>
+        </p:nvSpPr>
+        <p:spPr>
+          <a:xfrm>
+            <a:off x="194555" y="6388767"/>
+            <a:ext cx="1763922" cy="370422"/>
+          </a:xfrm>
+          <a:prstGeom prst="rect">
+            <a:avLst/>
+          </a:prstGeom>
+          <a:noFill/>
+          <a:ln>
+            <a:noFill/>
+          </a:ln>
+        </p:spPr>
+        <p:style>
+          <a:lnRef idx="2">
+            <a:schemeClr val="accent1">
+              <a:shade val="50000"/>
+            </a:schemeClr>
+          </a:lnRef>
+          <a:fillRef idx="1">
+            <a:schemeClr val="accent1"/>
+          </a:fillRef>
+          <a:effectRef idx="0">
+            <a:schemeClr val="accent1"/>
+          </a:effectRef>
+          <a:fontRef idx="minor">
+            <a:schemeClr val="lt1"/>
+          </a:fontRef>
+        </p:style>
+        <p:txBody>
+          <a:bodyPr wrap="none" lIns="90000" tIns="46800" rIns="90000" rtlCol="0" anchor="ctr">
+            <a:spAutoFit/>
+          </a:bodyPr>
+          <a:lstStyle>
+            <a:lvl1pPr>
+              <a:defRPr lang="en-US" sz="900" b="0" cap="none" spc="0" baseline="0" dirty="0">
+                <a:solidFill>
+                  <a:schemeClr val="bg1"/>
+                </a:solidFill>
+                <a:latin typeface="Azeret Mono" pitchFamily="2" charset="77"/>
+                <a:cs typeface="Azeret Mono" pitchFamily="2" charset="77"/>
+              </a:defRPr>
+            </a:lvl1pPr>
+          </a:lstStyle>
+          <a:p>
+            <a:r>
+              <a:rPr lang="nl-NL" dirty="0" err="1"/>
+              <a:t>Generated</a:t>
+            </a:r>
+            <a:r>
+              <a:rPr lang="nl-NL" dirty="0"/>
+              <a:t> </a:t>
+            </a:r>
+            <a:r>
+              <a:rPr lang="nl-NL" dirty="0" err="1"/>
+              <a:t>with</a:t>
+            </a:r>
+            <a:r>
+              <a:rPr lang="nl-NL" dirty="0"/>
+              <a:t> Sigrid</a:t>
+            </a:r>
+          </a:p>
+          <a:p>
+            <a:r>
+              <a:rPr lang="nl-NL" dirty="0" err="1"/>
+              <a:t>for Reportgeneratordemo</a:t>
+            </a:r>
+          </a:p>
+        </p:txBody>
+      </p:sp>
     </p:spTree>
     <p:extLst>
       <p:ext uri="{BB962C8B-B14F-4D97-AF65-F5344CB8AC3E}">
@@ -33241,7 +34419,7 @@
           <a:lstStyle/>
           <a:p>
             <a:r>
-              <a:rPr lang="en-GB" dirty="0">
+              <a:rPr lang="en-GB">
                 <a:solidFill>
                   <a:schemeClr val="tx2"/>
                 </a:solidFill>
@@ -33273,7 +34451,7 @@
           <a:bodyPr/>
           <a:lstStyle/>
           <a:p>
-            <a:endParaRPr lang="en-GB" b="1" dirty="0"/>
+            <a:endParaRPr lang="en-GB" b="1"/>
           </a:p>
           <a:p>
             <a:pPr marL="285750" indent="-285750">
@@ -33281,7 +34459,7 @@
               <a:buChar char="•"/>
             </a:pPr>
             <a:r>
-              <a:rPr lang="en-GB" dirty="0"/>
+              <a:rPr lang="en-GB"/>
               <a:t>Congratulations for having successfully completed your Sigrid onboarding!</a:t>
             </a:r>
           </a:p>
@@ -33291,7 +34469,7 @@
               <a:buChar char="•"/>
             </a:pPr>
             <a:r>
-              <a:rPr lang="en-GB" dirty="0"/>
+              <a:rPr lang="en-GB"/>
               <a:t>This is a baseline report showing the quality and security state of your software portfolio at the start of your Sigrid journey, to help you get a first overview and set your priorities for the coming period.</a:t>
             </a:r>
           </a:p>
@@ -33301,7 +34479,7 @@
               <a:buChar char="•"/>
             </a:pPr>
             <a:r>
-              <a:rPr lang="en-GB" dirty="0"/>
+              <a:rPr lang="en-GB"/>
               <a:t>This report has been automatically generated by our consultants based on the information in your Sigrid.</a:t>
             </a:r>
           </a:p>
@@ -33311,17 +34489,17 @@
               <a:buChar char="•"/>
             </a:pPr>
             <a:r>
-              <a:rPr lang="en-GB" dirty="0"/>
+              <a:rPr lang="en-GB"/>
               <a:t>If you find this report useful, you as well can easily generate similar reports! Simply follow the instructions in our public </a:t>
             </a:r>
             <a:r>
-              <a:rPr lang="en-GB" dirty="0">
+              <a:rPr lang="en-GB">
                 <a:hlinkClick r:id="rId2"/>
               </a:rPr>
               <a:t>GitHub repository</a:t>
             </a:r>
             <a:r>
-              <a:rPr lang="en-GB" dirty="0"/>
+              <a:rPr lang="en-GB"/>
               <a:t> or contact your Customer Success Manager for more information.</a:t>
             </a:r>
           </a:p>
@@ -33352,7 +34530,7 @@
           <a:lstStyle/>
           <a:p>
             <a:pPr algn="just"/>
-            <a:endParaRPr lang="en-GB" b="1" dirty="0">
+            <a:endParaRPr lang="en-GB" b="1">
               <a:solidFill>
                 <a:schemeClr val="accent2"/>
               </a:solidFill>
@@ -33361,7 +34539,7 @@
           <a:p>
             <a:pPr algn="just"/>
             <a:r>
-              <a:rPr lang="en-GB" b="1" dirty="0">
+              <a:rPr lang="en-GB" b="1">
                 <a:solidFill>
                   <a:schemeClr val="accent2"/>
                 </a:solidFill>
@@ -33369,7 +34547,7 @@
               <a:t>Contents</a:t>
             </a:r>
             <a:r>
-              <a:rPr lang="en-GB" b="1" dirty="0">
+              <a:rPr lang="en-GB" b="1">
                 <a:solidFill>
                   <a:schemeClr val="bg1"/>
                 </a:solidFill>
@@ -33384,7 +34562,7 @@
               </a:buClr>
             </a:pPr>
             <a:r>
-              <a:rPr lang="en-GB" b="1" dirty="0">
+              <a:rPr lang="en-GB" b="1">
                 <a:solidFill>
                   <a:schemeClr val="tx1"/>
                 </a:solidFill>
@@ -33392,7 +34570,7 @@
               <a:t>Sigrid portfolio hygiene:</a:t>
             </a:r>
             <a:r>
-              <a:rPr lang="en-GB" dirty="0">
+              <a:rPr lang="en-GB">
                 <a:solidFill>
                   <a:schemeClr val="tx1"/>
                 </a:solidFill>
@@ -33407,7 +34585,7 @@
               </a:buClr>
             </a:pPr>
             <a:r>
-              <a:rPr lang="en-GB" b="1" dirty="0">
+              <a:rPr lang="en-GB" b="1">
                 <a:solidFill>
                   <a:schemeClr val="tx1"/>
                 </a:solidFill>
@@ -33415,7 +34593,7 @@
               <a:t>Objectives:</a:t>
             </a:r>
             <a:r>
-              <a:rPr lang="en-GB" dirty="0">
+              <a:rPr lang="en-GB">
                 <a:solidFill>
                   <a:schemeClr val="tx1"/>
                 </a:solidFill>
@@ -33430,7 +34608,7 @@
               </a:buClr>
             </a:pPr>
             <a:r>
-              <a:rPr lang="en-GB" b="1" dirty="0">
+              <a:rPr lang="en-GB" b="1">
                 <a:solidFill>
                   <a:schemeClr val="tx1"/>
                 </a:solidFill>
@@ -33438,7 +34616,7 @@
               <a:t>Portfolio trends:</a:t>
             </a:r>
             <a:r>
-              <a:rPr lang="en-GB" dirty="0">
+              <a:rPr lang="en-GB">
                 <a:solidFill>
                   <a:schemeClr val="tx1"/>
                 </a:solidFill>
@@ -33473,9 +34651,10 @@
           <a:lstStyle/>
           <a:p>
             <a:r>
-              <a:rPr lang="en-GB" dirty="0"/>
+              <a:rPr lang="en-GB"/>
               <a:t>Introduction to the baseline report</a:t>
             </a:r>
+            <a:endParaRPr lang="en-GB" dirty="0"/>
           </a:p>
         </p:txBody>
       </p:sp>
@@ -33506,6 +34685,92 @@
               <a:t>3</a:t>
             </a:fld>
             <a:endParaRPr lang="en-GB" dirty="0"/>
+          </a:p>
+        </p:txBody>
+      </p:sp>
+      <p:sp>
+        <p:nvSpPr>
+          <p:cNvPr id="6" name="Footer Placeholder 5">
+            <a:extLst>
+              <a:ext uri="{FF2B5EF4-FFF2-40B4-BE49-F238E27FC236}">
+                <a16:creationId xmlns:a16="http://schemas.microsoft.com/office/drawing/2014/main" id="{48CCE201-D532-5332-1ABA-1148677A097F}"/>
+              </a:ext>
+            </a:extLst>
+          </p:cNvPr>
+          <p:cNvSpPr>
+            <a:spLocks noGrp="1"/>
+          </p:cNvSpPr>
+          <p:nvPr>
+            <p:ph type="ftr" sz="quarter" idx="3"/>
+          </p:nvPr>
+        </p:nvSpPr>
+        <p:spPr>
+          <a:xfrm>
+            <a:off x="194555" y="6383072"/>
+            <a:ext cx="1763922" cy="370422"/>
+          </a:xfrm>
+          <a:prstGeom prst="rect">
+            <a:avLst/>
+          </a:prstGeom>
+          <a:noFill/>
+          <a:ln>
+            <a:noFill/>
+          </a:ln>
+        </p:spPr>
+        <p:style>
+          <a:lnRef idx="2">
+            <a:schemeClr val="accent1">
+              <a:shade val="50000"/>
+            </a:schemeClr>
+          </a:lnRef>
+          <a:fillRef idx="1">
+            <a:schemeClr val="accent1"/>
+          </a:fillRef>
+          <a:effectRef idx="0">
+            <a:schemeClr val="accent1"/>
+          </a:effectRef>
+          <a:fontRef idx="minor">
+            <a:schemeClr val="lt1"/>
+          </a:fontRef>
+        </p:style>
+        <p:txBody>
+          <a:bodyPr wrap="none" lIns="90000" tIns="46800" rIns="90000" rtlCol="0" anchor="ctr">
+            <a:spAutoFit/>
+          </a:bodyPr>
+          <a:lstStyle>
+            <a:lvl1pPr>
+              <a:defRPr lang="en-US" sz="900" b="0" cap="none" spc="0" baseline="0" dirty="0">
+                <a:solidFill>
+                  <a:srgbClr val="0B54E6"/>
+                </a:solidFill>
+                <a:latin typeface="Azeret Mono" pitchFamily="2" charset="77"/>
+                <a:cs typeface="Azeret Mono" pitchFamily="2" charset="77"/>
+              </a:defRPr>
+            </a:lvl1pPr>
+          </a:lstStyle>
+          <a:p>
+            <a:r>
+              <a:rPr lang="nl-NL" dirty="0" err="1"/>
+              <a:t>Generated</a:t>
+            </a:r>
+            <a:r>
+              <a:rPr lang="nl-NL" dirty="0"/>
+              <a:t> </a:t>
+            </a:r>
+            <a:r>
+              <a:rPr lang="nl-NL" dirty="0" err="1"/>
+              <a:t>with</a:t>
+            </a:r>
+            <a:r>
+              <a:rPr lang="nl-NL" dirty="0"/>
+              <a:t> Sigrid</a:t>
+            </a:r>
+          </a:p>
+          <a:p>
+            <a:r>
+              <a:rPr lang="nl-NL" dirty="0" err="1"/>
+              <a:t>for Reportgeneratordemo</a:t>
+            </a:r>
           </a:p>
         </p:txBody>
       </p:sp>
@@ -33803,6 +35068,92 @@
           </a:p>
         </p:txBody>
       </p:sp>
+      <p:sp>
+        <p:nvSpPr>
+          <p:cNvPr id="2" name="Footer Placeholder 5">
+            <a:extLst>
+              <a:ext uri="{FF2B5EF4-FFF2-40B4-BE49-F238E27FC236}">
+                <a16:creationId xmlns:a16="http://schemas.microsoft.com/office/drawing/2014/main" id="{26F7AFB7-FFF9-E2FD-4842-317140D1DFCA}"/>
+              </a:ext>
+            </a:extLst>
+          </p:cNvPr>
+          <p:cNvSpPr>
+            <a:spLocks noGrp="1"/>
+          </p:cNvSpPr>
+          <p:nvPr>
+            <p:ph type="ftr" sz="quarter" idx="3"/>
+          </p:nvPr>
+        </p:nvSpPr>
+        <p:spPr>
+          <a:xfrm>
+            <a:off x="194555" y="6388767"/>
+            <a:ext cx="1763922" cy="370422"/>
+          </a:xfrm>
+          <a:prstGeom prst="rect">
+            <a:avLst/>
+          </a:prstGeom>
+          <a:noFill/>
+          <a:ln>
+            <a:noFill/>
+          </a:ln>
+        </p:spPr>
+        <p:style>
+          <a:lnRef idx="2">
+            <a:schemeClr val="accent1">
+              <a:shade val="50000"/>
+            </a:schemeClr>
+          </a:lnRef>
+          <a:fillRef idx="1">
+            <a:schemeClr val="accent1"/>
+          </a:fillRef>
+          <a:effectRef idx="0">
+            <a:schemeClr val="accent1"/>
+          </a:effectRef>
+          <a:fontRef idx="minor">
+            <a:schemeClr val="lt1"/>
+          </a:fontRef>
+        </p:style>
+        <p:txBody>
+          <a:bodyPr wrap="none" lIns="90000" tIns="46800" rIns="90000" rtlCol="0" anchor="ctr">
+            <a:spAutoFit/>
+          </a:bodyPr>
+          <a:lstStyle>
+            <a:lvl1pPr>
+              <a:defRPr lang="en-US" sz="900" b="0" cap="none" spc="0" baseline="0" dirty="0">
+                <a:solidFill>
+                  <a:schemeClr val="bg1"/>
+                </a:solidFill>
+                <a:latin typeface="Azeret Mono" pitchFamily="2" charset="77"/>
+                <a:cs typeface="Azeret Mono" pitchFamily="2" charset="77"/>
+              </a:defRPr>
+            </a:lvl1pPr>
+          </a:lstStyle>
+          <a:p>
+            <a:r>
+              <a:rPr lang="nl-NL" dirty="0" err="1"/>
+              <a:t>Generated</a:t>
+            </a:r>
+            <a:r>
+              <a:rPr lang="nl-NL" dirty="0"/>
+              <a:t> </a:t>
+            </a:r>
+            <a:r>
+              <a:rPr lang="nl-NL" dirty="0" err="1"/>
+              <a:t>with</a:t>
+            </a:r>
+            <a:r>
+              <a:rPr lang="nl-NL" dirty="0"/>
+              <a:t> Sigrid</a:t>
+            </a:r>
+          </a:p>
+          <a:p>
+            <a:r>
+              <a:rPr lang="nl-NL" dirty="0" err="1"/>
+              <a:t>for Reportgeneratordemo</a:t>
+            </a:r>
+          </a:p>
+        </p:txBody>
+      </p:sp>
     </p:spTree>
     <p:extLst>
       <p:ext uri="{BB962C8B-B14F-4D97-AF65-F5344CB8AC3E}">
@@ -33860,9 +35211,10 @@
           <a:lstStyle/>
           <a:p>
             <a:r>
-              <a:rPr lang="en-GB" dirty="0"/>
+              <a:rPr lang="en-GB"/>
               <a:t>Sigrid portfolio hygiene</a:t>
             </a:r>
+            <a:endParaRPr lang="en-GB" dirty="0"/>
           </a:p>
         </p:txBody>
       </p:sp>
@@ -33920,9 +35272,10 @@
           <a:lstStyle/>
           <a:p>
             <a:r>
-              <a:rPr lang="en-GB" dirty="0"/>
+              <a:rPr lang="en-GB"/>
               <a:t>Metadata completeness per field</a:t>
             </a:r>
+            <a:endParaRPr lang="en-GB" dirty="0"/>
           </a:p>
         </p:txBody>
       </p:sp>
@@ -33985,7 +35338,7 @@
               <a:buChar char="•"/>
             </a:pPr>
             <a:r>
-              <a:rPr lang="en-US" dirty="0"/>
+              <a:rPr lang="en-US"/>
               <a:t>Results in Sigrid and the contents of this report become more accurate and useful the more systems have the metadata filled in.</a:t>
             </a:r>
           </a:p>
@@ -33995,19 +35348,20 @@
               <a:buChar char="•"/>
             </a:pPr>
             <a:r>
-              <a:rPr lang="en-US" dirty="0"/>
+              <a:rPr lang="en-US"/>
               <a:t>If you have not yet defined your metadata, you can learn how to so in the </a:t>
             </a:r>
             <a:r>
-              <a:rPr lang="en-US" dirty="0">
+              <a:rPr lang="en-US">
                 <a:hlinkClick r:id="rId4"/>
               </a:rPr>
               <a:t>Sigrid documentation</a:t>
             </a:r>
             <a:r>
-              <a:rPr lang="en-US" dirty="0"/>
+              <a:rPr lang="en-US"/>
               <a:t>.</a:t>
             </a:r>
+            <a:endParaRPr lang="en-US" dirty="0"/>
           </a:p>
         </p:txBody>
       </p:sp>
@@ -34051,6 +35405,92 @@
                 </a:solidFill>
               </a:rPr>
               <a:t>Percentage of portfolio</a:t>
+            </a:r>
+          </a:p>
+        </p:txBody>
+      </p:sp>
+      <p:sp>
+        <p:nvSpPr>
+          <p:cNvPr id="3" name="Footer Placeholder 5">
+            <a:extLst>
+              <a:ext uri="{FF2B5EF4-FFF2-40B4-BE49-F238E27FC236}">
+                <a16:creationId xmlns:a16="http://schemas.microsoft.com/office/drawing/2014/main" id="{55AE2176-E53D-677F-8417-DF6E32C6E391}"/>
+              </a:ext>
+            </a:extLst>
+          </p:cNvPr>
+          <p:cNvSpPr>
+            <a:spLocks noGrp="1"/>
+          </p:cNvSpPr>
+          <p:nvPr>
+            <p:ph type="ftr" sz="quarter" idx="3"/>
+          </p:nvPr>
+        </p:nvSpPr>
+        <p:spPr>
+          <a:xfrm>
+            <a:off x="194555" y="6403168"/>
+            <a:ext cx="1763922" cy="370422"/>
+          </a:xfrm>
+          <a:prstGeom prst="rect">
+            <a:avLst/>
+          </a:prstGeom>
+          <a:noFill/>
+          <a:ln>
+            <a:noFill/>
+          </a:ln>
+        </p:spPr>
+        <p:style>
+          <a:lnRef idx="2">
+            <a:schemeClr val="accent1">
+              <a:shade val="50000"/>
+            </a:schemeClr>
+          </a:lnRef>
+          <a:fillRef idx="1">
+            <a:schemeClr val="accent1"/>
+          </a:fillRef>
+          <a:effectRef idx="0">
+            <a:schemeClr val="accent1"/>
+          </a:effectRef>
+          <a:fontRef idx="minor">
+            <a:schemeClr val="lt1"/>
+          </a:fontRef>
+        </p:style>
+        <p:txBody>
+          <a:bodyPr wrap="none" lIns="90000" tIns="46800" rIns="90000" rtlCol="0" anchor="ctr">
+            <a:spAutoFit/>
+          </a:bodyPr>
+          <a:lstStyle>
+            <a:lvl1pPr>
+              <a:defRPr lang="en-US" sz="900" b="0" cap="none" spc="0" baseline="0" dirty="0">
+                <a:solidFill>
+                  <a:srgbClr val="0B54E6"/>
+                </a:solidFill>
+                <a:latin typeface="Azeret Mono" pitchFamily="2" charset="77"/>
+                <a:cs typeface="Azeret Mono" pitchFamily="2" charset="77"/>
+              </a:defRPr>
+            </a:lvl1pPr>
+          </a:lstStyle>
+          <a:p>
+            <a:r>
+              <a:rPr lang="nl-NL" dirty="0" err="1"/>
+              <a:t>Generated</a:t>
+            </a:r>
+            <a:r>
+              <a:rPr lang="nl-NL" dirty="0"/>
+              <a:t> </a:t>
+            </a:r>
+            <a:r>
+              <a:rPr lang="nl-NL" dirty="0" err="1"/>
+              <a:t>with</a:t>
+            </a:r>
+            <a:r>
+              <a:rPr lang="nl-NL" dirty="0"/>
+              <a:t> Sigrid</a:t>
+            </a:r>
+          </a:p>
+          <a:p>
+            <a:r>
+              <a:rPr lang="nl-NL" dirty="0" err="1"/>
+              <a:t>for Reportgeneratordemo</a:t>
             </a:r>
           </a:p>
         </p:txBody>
@@ -34112,9 +35552,10 @@
           <a:lstStyle/>
           <a:p>
             <a:r>
-              <a:rPr lang="en-US" dirty="0"/>
+              <a:rPr lang="en-US"/>
               <a:t>Sigrid portfolio hygiene</a:t>
             </a:r>
+            <a:endParaRPr lang="en-US" dirty="0"/>
           </a:p>
         </p:txBody>
       </p:sp>
@@ -34170,9 +35611,10 @@
           <a:lstStyle/>
           <a:p>
             <a:r>
-              <a:rPr lang="en-US" dirty="0"/>
+              <a:rPr lang="en-US"/>
               <a:t>Number of systems covered by objectives</a:t>
             </a:r>
+            <a:endParaRPr lang="en-US" dirty="0"/>
           </a:p>
         </p:txBody>
       </p:sp>
@@ -34235,7 +35677,7 @@
               <a:buChar char="•"/>
             </a:pPr>
             <a:r>
-              <a:rPr lang="en-US" dirty="0"/>
+              <a:rPr lang="en-US"/>
               <a:t>Having objectives set in Sigrid helps your teams to track the quality of the portfolio and gradually improve it over time.</a:t>
             </a:r>
           </a:p>
@@ -34245,18 +35687,105 @@
               <a:buChar char="•"/>
             </a:pPr>
             <a:r>
-              <a:rPr lang="en-US" dirty="0"/>
+              <a:rPr lang="en-US"/>
               <a:t>If you have not yet defined objectives for all systems, you can learn how to so in the </a:t>
             </a:r>
             <a:r>
-              <a:rPr lang="en-US" dirty="0">
+              <a:rPr lang="en-US">
                 <a:hlinkClick r:id="rId3"/>
               </a:rPr>
               <a:t>Sigrid documentation</a:t>
             </a:r>
             <a:r>
-              <a:rPr lang="en-US" dirty="0"/>
+              <a:rPr lang="en-US"/>
               <a:t>.</a:t>
+            </a:r>
+            <a:endParaRPr lang="en-US" dirty="0"/>
+          </a:p>
+        </p:txBody>
+      </p:sp>
+      <p:sp>
+        <p:nvSpPr>
+          <p:cNvPr id="11" name="Footer Placeholder 5">
+            <a:extLst>
+              <a:ext uri="{FF2B5EF4-FFF2-40B4-BE49-F238E27FC236}">
+                <a16:creationId xmlns:a16="http://schemas.microsoft.com/office/drawing/2014/main" id="{5AD26C79-29F6-03B3-8BCE-68F31D64F07D}"/>
+              </a:ext>
+            </a:extLst>
+          </p:cNvPr>
+          <p:cNvSpPr>
+            <a:spLocks noGrp="1"/>
+          </p:cNvSpPr>
+          <p:nvPr>
+            <p:ph type="ftr" sz="quarter" idx="3"/>
+          </p:nvPr>
+        </p:nvSpPr>
+        <p:spPr>
+          <a:xfrm>
+            <a:off x="194555" y="6403168"/>
+            <a:ext cx="1763922" cy="370422"/>
+          </a:xfrm>
+          <a:prstGeom prst="rect">
+            <a:avLst/>
+          </a:prstGeom>
+          <a:noFill/>
+          <a:ln>
+            <a:noFill/>
+          </a:ln>
+        </p:spPr>
+        <p:style>
+          <a:lnRef idx="2">
+            <a:schemeClr val="accent1">
+              <a:shade val="50000"/>
+            </a:schemeClr>
+          </a:lnRef>
+          <a:fillRef idx="1">
+            <a:schemeClr val="accent1"/>
+          </a:fillRef>
+          <a:effectRef idx="0">
+            <a:schemeClr val="accent1"/>
+          </a:effectRef>
+          <a:fontRef idx="minor">
+            <a:schemeClr val="lt1"/>
+          </a:fontRef>
+        </p:style>
+        <p:txBody>
+          <a:bodyPr wrap="none" lIns="90000" tIns="46800" rIns="90000" rtlCol="0" anchor="ctr">
+            <a:spAutoFit/>
+          </a:bodyPr>
+          <a:lstStyle>
+            <a:lvl1pPr>
+              <a:defRPr lang="en-US" sz="900" b="0" cap="none" spc="0" baseline="0" dirty="0">
+                <a:solidFill>
+                  <a:srgbClr val="0B54E6"/>
+                </a:solidFill>
+                <a:latin typeface="Azeret Mono" pitchFamily="2" charset="77"/>
+                <a:cs typeface="Azeret Mono" pitchFamily="2" charset="77"/>
+              </a:defRPr>
+            </a:lvl1pPr>
+          </a:lstStyle>
+          <a:p>
+            <a:r>
+              <a:rPr lang="nl-NL" dirty="0" err="1"/>
+              <a:t>Generated</a:t>
+            </a:r>
+            <a:r>
+              <a:rPr lang="nl-NL" dirty="0"/>
+              <a:t> </a:t>
+            </a:r>
+            <a:r>
+              <a:rPr lang="nl-NL" dirty="0" err="1"/>
+              <a:t>with</a:t>
+            </a:r>
+            <a:r>
+              <a:rPr lang="nl-NL" dirty="0"/>
+              <a:t> Sigrid</a:t>
+            </a:r>
+          </a:p>
+          <a:p>
+            <a:r>
+              <a:rPr lang="nl-NL" dirty="0" err="1"/>
+              <a:t>for Reportgeneratordemo</a:t>
             </a:r>
           </a:p>
         </p:txBody>
@@ -35105,6 +36634,92 @@
           </a:p>
         </p:txBody>
       </p:sp>
+      <p:sp>
+        <p:nvSpPr>
+          <p:cNvPr id="7" name="Footer Placeholder 5">
+            <a:extLst>
+              <a:ext uri="{FF2B5EF4-FFF2-40B4-BE49-F238E27FC236}">
+                <a16:creationId xmlns:a16="http://schemas.microsoft.com/office/drawing/2014/main" id="{1A1C669E-868F-5C5F-C159-D257CADC15AC}"/>
+              </a:ext>
+            </a:extLst>
+          </p:cNvPr>
+          <p:cNvSpPr>
+            <a:spLocks noGrp="1"/>
+          </p:cNvSpPr>
+          <p:nvPr>
+            <p:ph type="ftr" sz="quarter" idx="3"/>
+          </p:nvPr>
+        </p:nvSpPr>
+        <p:spPr>
+          <a:xfrm>
+            <a:off x="194555" y="6383072"/>
+            <a:ext cx="1763922" cy="370422"/>
+          </a:xfrm>
+          <a:prstGeom prst="rect">
+            <a:avLst/>
+          </a:prstGeom>
+          <a:noFill/>
+          <a:ln>
+            <a:noFill/>
+          </a:ln>
+        </p:spPr>
+        <p:style>
+          <a:lnRef idx="2">
+            <a:schemeClr val="accent1">
+              <a:shade val="50000"/>
+            </a:schemeClr>
+          </a:lnRef>
+          <a:fillRef idx="1">
+            <a:schemeClr val="accent1"/>
+          </a:fillRef>
+          <a:effectRef idx="0">
+            <a:schemeClr val="accent1"/>
+          </a:effectRef>
+          <a:fontRef idx="minor">
+            <a:schemeClr val="lt1"/>
+          </a:fontRef>
+        </p:style>
+        <p:txBody>
+          <a:bodyPr wrap="none" lIns="90000" tIns="46800" rIns="90000" rtlCol="0" anchor="ctr">
+            <a:spAutoFit/>
+          </a:bodyPr>
+          <a:lstStyle>
+            <a:lvl1pPr>
+              <a:defRPr lang="en-US" sz="900" b="0" cap="none" spc="0" baseline="0" dirty="0">
+                <a:solidFill>
+                  <a:srgbClr val="0B54E6"/>
+                </a:solidFill>
+                <a:latin typeface="Azeret Mono" pitchFamily="2" charset="77"/>
+                <a:cs typeface="Azeret Mono" pitchFamily="2" charset="77"/>
+              </a:defRPr>
+            </a:lvl1pPr>
+          </a:lstStyle>
+          <a:p>
+            <a:r>
+              <a:rPr lang="nl-NL" dirty="0" err="1"/>
+              <a:t>Generated</a:t>
+            </a:r>
+            <a:r>
+              <a:rPr lang="nl-NL" dirty="0"/>
+              <a:t> </a:t>
+            </a:r>
+            <a:r>
+              <a:rPr lang="nl-NL" dirty="0" err="1"/>
+              <a:t>with</a:t>
+            </a:r>
+            <a:r>
+              <a:rPr lang="nl-NL" dirty="0"/>
+              <a:t> Sigrid</a:t>
+            </a:r>
+          </a:p>
+          <a:p>
+            <a:r>
+              <a:rPr lang="nl-NL" dirty="0" err="1"/>
+              <a:t>for Reportgeneratordemo</a:t>
+            </a:r>
+          </a:p>
+        </p:txBody>
+      </p:sp>
     </p:spTree>
     <p:extLst>
       <p:ext uri="{BB962C8B-B14F-4D97-AF65-F5344CB8AC3E}">
@@ -35370,6 +36985,92 @@
                 </a:solidFill>
               </a:rPr>
               <a:t> Incomplete</a:t>
+            </a:r>
+          </a:p>
+        </p:txBody>
+      </p:sp>
+      <p:sp>
+        <p:nvSpPr>
+          <p:cNvPr id="5" name="Footer Placeholder 5">
+            <a:extLst>
+              <a:ext uri="{FF2B5EF4-FFF2-40B4-BE49-F238E27FC236}">
+                <a16:creationId xmlns:a16="http://schemas.microsoft.com/office/drawing/2014/main" id="{A9C608DA-694C-3895-9324-CF9DC8B04B8D}"/>
+              </a:ext>
+            </a:extLst>
+          </p:cNvPr>
+          <p:cNvSpPr>
+            <a:spLocks noGrp="1"/>
+          </p:cNvSpPr>
+          <p:nvPr>
+            <p:ph type="ftr" sz="quarter" idx="3"/>
+          </p:nvPr>
+        </p:nvSpPr>
+        <p:spPr>
+          <a:xfrm>
+            <a:off x="194555" y="6383072"/>
+            <a:ext cx="1763922" cy="370422"/>
+          </a:xfrm>
+          <a:prstGeom prst="rect">
+            <a:avLst/>
+          </a:prstGeom>
+          <a:noFill/>
+          <a:ln>
+            <a:noFill/>
+          </a:ln>
+        </p:spPr>
+        <p:style>
+          <a:lnRef idx="2">
+            <a:schemeClr val="accent1">
+              <a:shade val="50000"/>
+            </a:schemeClr>
+          </a:lnRef>
+          <a:fillRef idx="1">
+            <a:schemeClr val="accent1"/>
+          </a:fillRef>
+          <a:effectRef idx="0">
+            <a:schemeClr val="accent1"/>
+          </a:effectRef>
+          <a:fontRef idx="minor">
+            <a:schemeClr val="lt1"/>
+          </a:fontRef>
+        </p:style>
+        <p:txBody>
+          <a:bodyPr wrap="none" lIns="90000" tIns="46800" rIns="90000" rtlCol="0" anchor="ctr">
+            <a:spAutoFit/>
+          </a:bodyPr>
+          <a:lstStyle>
+            <a:lvl1pPr>
+              <a:defRPr lang="en-US" sz="900" b="0" cap="none" spc="0" baseline="0" dirty="0">
+                <a:solidFill>
+                  <a:srgbClr val="0B54E6"/>
+                </a:solidFill>
+                <a:latin typeface="Azeret Mono" pitchFamily="2" charset="77"/>
+                <a:cs typeface="Azeret Mono" pitchFamily="2" charset="77"/>
+              </a:defRPr>
+            </a:lvl1pPr>
+          </a:lstStyle>
+          <a:p>
+            <a:r>
+              <a:rPr lang="nl-NL" dirty="0" err="1"/>
+              <a:t>Generated</a:t>
+            </a:r>
+            <a:r>
+              <a:rPr lang="nl-NL" dirty="0"/>
+              <a:t> </a:t>
+            </a:r>
+            <a:r>
+              <a:rPr lang="nl-NL" dirty="0" err="1"/>
+              <a:t>with</a:t>
+            </a:r>
+            <a:r>
+              <a:rPr lang="nl-NL" dirty="0"/>
+              <a:t> Sigrid</a:t>
+            </a:r>
+          </a:p>
+          <a:p>
+            <a:r>
+              <a:rPr lang="nl-NL" dirty="0" err="1"/>
+              <a:t>for Reportgeneratordemo</a:t>
             </a:r>
           </a:p>
         </p:txBody>
@@ -36636,21 +38337,6 @@
 </file>
 
 <file path=customXml/item1.xml><?xml version="1.0" encoding="utf-8"?>
-<?mso-contentType ?>
-<FormTemplates xmlns="http://schemas.microsoft.com/sharepoint/v3/contenttype/forms">
-  <Display>DocumentLibraryForm</Display>
-  <Edit>DocumentLibraryForm</Edit>
-  <New>DocumentLibraryForm</New>
-</FormTemplates>
-</file>
-
-<file path=customXml/item2.xml><?xml version="1.0" encoding="utf-8"?>
-<p:properties xmlns:p="http://schemas.microsoft.com/office/2006/metadata/properties" xmlns:xsi="http://www.w3.org/2001/XMLSchema-instance" xmlns:pc="http://schemas.microsoft.com/office/infopath/2007/PartnerControls">
-  <documentManagement/>
-</p:properties>
-</file>
-
-<file path=customXml/item3.xml><?xml version="1.0" encoding="utf-8"?>
 <ct:contentTypeSchema xmlns:ct="http://schemas.microsoft.com/office/2006/metadata/contentType" xmlns:ma="http://schemas.microsoft.com/office/2006/metadata/properties/metaAttributes" ct:_="" ma:_="" ma:contentTypeName="Document" ma:contentTypeID="0x0101004DEF897B6A9E5243A3BAB7B7BDA55B95" ma:contentTypeVersion="3" ma:contentTypeDescription="Een nieuw document maken." ma:contentTypeScope="" ma:versionID="0a97628efbdf127f23042160181f1d9a">
   <xsd:schema xmlns:xsd="http://www.w3.org/2001/XMLSchema" xmlns:xs="http://www.w3.org/2001/XMLSchema" xmlns:p="http://schemas.microsoft.com/office/2006/metadata/properties" xmlns:ns2="444ebd02-7183-4d1c-abe9-f175efe83725" targetNamespace="http://schemas.microsoft.com/office/2006/metadata/properties" ma:root="true" ma:fieldsID="44a7a3b93c857102c842f6fb1da07824" ns2:_="">
     <xsd:import namespace="444ebd02-7183-4d1c-abe9-f175efe83725"/>
@@ -36788,10 +38474,35 @@
 </ct:contentTypeSchema>
 </file>
 
+<file path=customXml/item2.xml><?xml version="1.0" encoding="utf-8"?>
+<p:properties xmlns:p="http://schemas.microsoft.com/office/2006/metadata/properties" xmlns:xsi="http://www.w3.org/2001/XMLSchema-instance" xmlns:pc="http://schemas.microsoft.com/office/infopath/2007/PartnerControls">
+  <documentManagement/>
+</p:properties>
+</file>
+
+<file path=customXml/item3.xml><?xml version="1.0" encoding="utf-8"?>
+<?mso-contentType ?>
+<FormTemplates xmlns="http://schemas.microsoft.com/sharepoint/v3/contenttype/forms">
+  <Display>DocumentLibraryForm</Display>
+  <Edit>DocumentLibraryForm</Edit>
+  <New>DocumentLibraryForm</New>
+</FormTemplates>
+</file>
+
 <file path=customXml/itemProps1.xml><?xml version="1.0" encoding="utf-8"?>
-<ds:datastoreItem xmlns:ds="http://schemas.openxmlformats.org/officeDocument/2006/customXml" ds:itemID="{88AD9160-B56A-4FCD-857D-8AE63521E7FB}">
+<ds:datastoreItem xmlns:ds="http://schemas.openxmlformats.org/officeDocument/2006/customXml" ds:itemID="{3AFAF3E6-8A11-4BDC-9823-6F0ACEBB33D3}">
   <ds:schemaRefs>
-    <ds:schemaRef ds:uri="http://schemas.microsoft.com/sharepoint/v3/contenttype/forms"/>
+    <ds:schemaRef ds:uri="http://schemas.microsoft.com/office/2006/metadata/contentType"/>
+    <ds:schemaRef ds:uri="http://schemas.microsoft.com/office/2006/metadata/properties/metaAttributes"/>
+    <ds:schemaRef ds:uri="http://www.w3.org/2001/XMLSchema"/>
+    <ds:schemaRef ds:uri="http://schemas.microsoft.com/office/2006/metadata/properties"/>
+    <ds:schemaRef ds:uri="444ebd02-7183-4d1c-abe9-f175efe83725"/>
+    <ds:schemaRef ds:uri="http://schemas.microsoft.com/office/2006/documentManagement/types"/>
+    <ds:schemaRef ds:uri="http://schemas.microsoft.com/office/infopath/2007/PartnerControls"/>
+    <ds:schemaRef ds:uri="http://schemas.openxmlformats.org/package/2006/metadata/core-properties"/>
+    <ds:schemaRef ds:uri="http://purl.org/dc/elements/1.1/"/>
+    <ds:schemaRef ds:uri="http://purl.org/dc/terms/"/>
+    <ds:schemaRef ds:uri="http://schemas.microsoft.com/internal/obd"/>
   </ds:schemaRefs>
 </ds:datastoreItem>
 </file>
@@ -36813,19 +38524,9 @@
 </file>
 
 <file path=customXml/itemProps3.xml><?xml version="1.0" encoding="utf-8"?>
-<ds:datastoreItem xmlns:ds="http://schemas.openxmlformats.org/officeDocument/2006/customXml" ds:itemID="{3AFAF3E6-8A11-4BDC-9823-6F0ACEBB33D3}">
+<ds:datastoreItem xmlns:ds="http://schemas.openxmlformats.org/officeDocument/2006/customXml" ds:itemID="{88AD9160-B56A-4FCD-857D-8AE63521E7FB}">
   <ds:schemaRefs>
-    <ds:schemaRef ds:uri="http://schemas.microsoft.com/office/2006/metadata/contentType"/>
-    <ds:schemaRef ds:uri="http://schemas.microsoft.com/office/2006/metadata/properties/metaAttributes"/>
-    <ds:schemaRef ds:uri="http://www.w3.org/2001/XMLSchema"/>
-    <ds:schemaRef ds:uri="http://schemas.microsoft.com/office/2006/metadata/properties"/>
-    <ds:schemaRef ds:uri="444ebd02-7183-4d1c-abe9-f175efe83725"/>
-    <ds:schemaRef ds:uri="http://schemas.microsoft.com/office/2006/documentManagement/types"/>
-    <ds:schemaRef ds:uri="http://schemas.microsoft.com/office/infopath/2007/PartnerControls"/>
-    <ds:schemaRef ds:uri="http://schemas.openxmlformats.org/package/2006/metadata/core-properties"/>
-    <ds:schemaRef ds:uri="http://purl.org/dc/elements/1.1/"/>
-    <ds:schemaRef ds:uri="http://purl.org/dc/terms/"/>
-    <ds:schemaRef ds:uri="http://schemas.microsoft.com/internal/obd"/>
+    <ds:schemaRef ds:uri="http://schemas.microsoft.com/sharepoint/v3/contenttype/forms"/>
   </ds:schemaRefs>
 </ds:datastoreItem>
 </file>